--- a/AIS5103/ML-slide-8.pptx
+++ b/AIS5103/ML-slide-8.pptx
@@ -5,22 +5,27 @@
     <p:sldMasterId id="2147483660" r:id="rId1"/>
   </p:sldMasterIdLst>
   <p:notesMasterIdLst>
-    <p:notesMasterId r:id="rId15"/>
+    <p:notesMasterId r:id="rId20"/>
   </p:notesMasterIdLst>
   <p:sldIdLst>
     <p:sldId id="258" r:id="rId2"/>
-    <p:sldId id="304" r:id="rId3"/>
-    <p:sldId id="305" r:id="rId4"/>
-    <p:sldId id="306" r:id="rId5"/>
-    <p:sldId id="307" r:id="rId6"/>
-    <p:sldId id="308" r:id="rId7"/>
-    <p:sldId id="311" r:id="rId8"/>
-    <p:sldId id="310" r:id="rId9"/>
-    <p:sldId id="314" r:id="rId10"/>
-    <p:sldId id="315" r:id="rId11"/>
-    <p:sldId id="309" r:id="rId12"/>
-    <p:sldId id="312" r:id="rId13"/>
-    <p:sldId id="313" r:id="rId14"/>
+    <p:sldId id="318" r:id="rId3"/>
+    <p:sldId id="304" r:id="rId4"/>
+    <p:sldId id="305" r:id="rId5"/>
+    <p:sldId id="306" r:id="rId6"/>
+    <p:sldId id="316" r:id="rId7"/>
+    <p:sldId id="307" r:id="rId8"/>
+    <p:sldId id="308" r:id="rId9"/>
+    <p:sldId id="311" r:id="rId10"/>
+    <p:sldId id="310" r:id="rId11"/>
+    <p:sldId id="314" r:id="rId12"/>
+    <p:sldId id="315" r:id="rId13"/>
+    <p:sldId id="309" r:id="rId14"/>
+    <p:sldId id="312" r:id="rId15"/>
+    <p:sldId id="313" r:id="rId16"/>
+    <p:sldId id="320" r:id="rId17"/>
+    <p:sldId id="317" r:id="rId18"/>
+    <p:sldId id="319" r:id="rId19"/>
   </p:sldIdLst>
   <p:sldSz cx="9144000" cy="6858000" type="screen4x3"/>
   <p:notesSz cx="6858000" cy="9144000"/>
@@ -130,7 +135,7 @@
 <file path=ppt/revisionInfo.xml><?xml version="1.0" encoding="utf-8"?>
 <p1510:revInfo xmlns:a="http://schemas.openxmlformats.org/drawingml/2006/main" xmlns:r="http://schemas.openxmlformats.org/officeDocument/2006/relationships" xmlns:p1510="http://schemas.microsoft.com/office/powerpoint/2015/10/main">
   <p1510:revLst>
-    <p1510:client id="{631681F2-9C47-479C-B7BD-89AA36AE2E58}" v="297" dt="2026-03-21T07:30:47.502"/>
+    <p1510:client id="{386D1DD3-959A-4AA2-B3C6-39D7796E2911}" v="359" dt="2026-09-26T03:31:07.281"/>
   </p1510:revLst>
 </p1510:revInfo>
 </file>
@@ -139,19 +144,252 @@
 <pc:chgInfo xmlns:a="http://schemas.openxmlformats.org/drawingml/2006/main" xmlns:r="http://schemas.openxmlformats.org/officeDocument/2006/relationships" xmlns:ac="http://schemas.microsoft.com/office/drawing/2013/main/command" xmlns:pc="http://schemas.microsoft.com/office/powerpoint/2013/main/command">
   <pc:docChgLst>
     <pc:chgData name="Wang Jian-Sheng" userId="7d25d710-0931-49a3-acef-49192cec40f2" providerId="ADAL" clId="{66572D02-9A0D-4195-ADB6-5DBDF78AF6B3}"/>
-    <pc:docChg chg="modSld">
-      <pc:chgData name="Wang Jian-Sheng" userId="7d25d710-0931-49a3-acef-49192cec40f2" providerId="ADAL" clId="{66572D02-9A0D-4195-ADB6-5DBDF78AF6B3}" dt="2026-03-21T07:30:47.502" v="474" actId="16959"/>
+    <pc:docChg chg="custSel addSld modSld">
+      <pc:chgData name="Wang Jian-Sheng" userId="7d25d710-0931-49a3-acef-49192cec40f2" providerId="ADAL" clId="{66572D02-9A0D-4195-ADB6-5DBDF78AF6B3}" dt="2026-09-26T03:32:05.488" v="3874" actId="20577"/>
       <pc:docMkLst>
         <pc:docMk/>
       </pc:docMkLst>
       <pc:sldChg chg="modSp mod">
-        <pc:chgData name="Wang Jian-Sheng" userId="7d25d710-0931-49a3-acef-49192cec40f2" providerId="ADAL" clId="{66572D02-9A0D-4195-ADB6-5DBDF78AF6B3}" dt="2026-03-20T05:57:57.423" v="1" actId="20577"/>
+        <pc:chgData name="Wang Jian-Sheng" userId="7d25d710-0931-49a3-acef-49192cec40f2" providerId="ADAL" clId="{66572D02-9A0D-4195-ADB6-5DBDF78AF6B3}" dt="2026-09-19T02:24:06.332" v="1119" actId="20577"/>
+        <pc:sldMkLst>
+          <pc:docMk/>
+          <pc:sldMk cId="2153188837" sldId="258"/>
+        </pc:sldMkLst>
+        <pc:spChg chg="mod">
+          <ac:chgData name="Wang Jian-Sheng" userId="7d25d710-0931-49a3-acef-49192cec40f2" providerId="ADAL" clId="{66572D02-9A0D-4195-ADB6-5DBDF78AF6B3}" dt="2026-09-19T02:24:06.332" v="1119" actId="20577"/>
+          <ac:spMkLst>
+            <pc:docMk/>
+            <pc:sldMk cId="2153188837" sldId="258"/>
+            <ac:spMk id="4" creationId="{FE2F1026-AD94-4412-BD4F-59BB80E5138D}"/>
+          </ac:spMkLst>
+        </pc:spChg>
+      </pc:sldChg>
+      <pc:sldChg chg="modSp mod">
+        <pc:chgData name="Wang Jian-Sheng" userId="7d25d710-0931-49a3-acef-49192cec40f2" providerId="ADAL" clId="{66572D02-9A0D-4195-ADB6-5DBDF78AF6B3}" dt="2026-09-19T03:50:33.724" v="2497" actId="20577"/>
+        <pc:sldMkLst>
+          <pc:docMk/>
+          <pc:sldMk cId="3846017107" sldId="304"/>
+        </pc:sldMkLst>
+        <pc:spChg chg="mod">
+          <ac:chgData name="Wang Jian-Sheng" userId="7d25d710-0931-49a3-acef-49192cec40f2" providerId="ADAL" clId="{66572D02-9A0D-4195-ADB6-5DBDF78AF6B3}" dt="2026-09-19T02:50:25.703" v="1428" actId="20577"/>
+          <ac:spMkLst>
+            <pc:docMk/>
+            <pc:sldMk cId="3846017107" sldId="304"/>
+            <ac:spMk id="2" creationId="{0AC41597-BE87-4FFC-BF41-FF7271A1F3A5}"/>
+          </ac:spMkLst>
+        </pc:spChg>
+        <pc:spChg chg="mod">
+          <ac:chgData name="Wang Jian-Sheng" userId="7d25d710-0931-49a3-acef-49192cec40f2" providerId="ADAL" clId="{66572D02-9A0D-4195-ADB6-5DBDF78AF6B3}" dt="2026-09-19T03:50:33.724" v="2497" actId="20577"/>
+          <ac:spMkLst>
+            <pc:docMk/>
+            <pc:sldMk cId="3846017107" sldId="304"/>
+            <ac:spMk id="3" creationId="{676C924D-4654-4B6C-8AF8-EF65082555DF}"/>
+          </ac:spMkLst>
+        </pc:spChg>
+      </pc:sldChg>
+      <pc:sldChg chg="addSp delSp modSp mod">
+        <pc:chgData name="Wang Jian-Sheng" userId="7d25d710-0931-49a3-acef-49192cec40f2" providerId="ADAL" clId="{66572D02-9A0D-4195-ADB6-5DBDF78AF6B3}" dt="2026-09-19T02:51:29.815" v="1445" actId="20577"/>
+        <pc:sldMkLst>
+          <pc:docMk/>
+          <pc:sldMk cId="939273039" sldId="305"/>
+        </pc:sldMkLst>
+        <pc:spChg chg="mod">
+          <ac:chgData name="Wang Jian-Sheng" userId="7d25d710-0931-49a3-acef-49192cec40f2" providerId="ADAL" clId="{66572D02-9A0D-4195-ADB6-5DBDF78AF6B3}" dt="2026-09-19T02:51:29.815" v="1445" actId="20577"/>
+          <ac:spMkLst>
+            <pc:docMk/>
+            <pc:sldMk cId="939273039" sldId="305"/>
+            <ac:spMk id="4" creationId="{90584934-63E7-489A-9AE2-3950F5D18C47}"/>
+          </ac:spMkLst>
+        </pc:spChg>
+        <pc:spChg chg="mod">
+          <ac:chgData name="Wang Jian-Sheng" userId="7d25d710-0931-49a3-acef-49192cec40f2" providerId="ADAL" clId="{66572D02-9A0D-4195-ADB6-5DBDF78AF6B3}" dt="2026-09-19T01:59:47.666" v="811" actId="1038"/>
+          <ac:spMkLst>
+            <pc:docMk/>
+            <pc:sldMk cId="939273039" sldId="305"/>
+            <ac:spMk id="24" creationId="{887D6893-1B2F-47A5-ACFF-021553E625FA}"/>
+          </ac:spMkLst>
+        </pc:spChg>
+        <pc:spChg chg="mod">
+          <ac:chgData name="Wang Jian-Sheng" userId="7d25d710-0931-49a3-acef-49192cec40f2" providerId="ADAL" clId="{66572D02-9A0D-4195-ADB6-5DBDF78AF6B3}" dt="2026-09-19T02:28:22.695" v="1164" actId="20577"/>
+          <ac:spMkLst>
+            <pc:docMk/>
+            <pc:sldMk cId="939273039" sldId="305"/>
+            <ac:spMk id="27" creationId="{2D3631AE-53B2-4B00-BAF1-C6AB438474C5}"/>
+          </ac:spMkLst>
+        </pc:spChg>
+        <pc:spChg chg="mod">
+          <ac:chgData name="Wang Jian-Sheng" userId="7d25d710-0931-49a3-acef-49192cec40f2" providerId="ADAL" clId="{66572D02-9A0D-4195-ADB6-5DBDF78AF6B3}" dt="2026-09-19T02:28:32.423" v="1177" actId="20577"/>
+          <ac:spMkLst>
+            <pc:docMk/>
+            <pc:sldMk cId="939273039" sldId="305"/>
+            <ac:spMk id="30" creationId="{55373E82-8968-4F0F-A91D-27FEFA7D8EF4}"/>
+          </ac:spMkLst>
+        </pc:spChg>
+        <pc:spChg chg="mod">
+          <ac:chgData name="Wang Jian-Sheng" userId="7d25d710-0931-49a3-acef-49192cec40f2" providerId="ADAL" clId="{66572D02-9A0D-4195-ADB6-5DBDF78AF6B3}" dt="2026-09-19T02:28:40.869" v="1190" actId="20577"/>
+          <ac:spMkLst>
+            <pc:docMk/>
+            <pc:sldMk cId="939273039" sldId="305"/>
+            <ac:spMk id="33" creationId="{8B600760-91F5-44FA-B308-049C498F45E7}"/>
+          </ac:spMkLst>
+        </pc:spChg>
+        <pc:spChg chg="mod">
+          <ac:chgData name="Wang Jian-Sheng" userId="7d25d710-0931-49a3-acef-49192cec40f2" providerId="ADAL" clId="{66572D02-9A0D-4195-ADB6-5DBDF78AF6B3}" dt="2026-09-19T02:28:57.560" v="1210" actId="20577"/>
+          <ac:spMkLst>
+            <pc:docMk/>
+            <pc:sldMk cId="939273039" sldId="305"/>
+            <ac:spMk id="36" creationId="{D22F5F3A-E01D-4032-BE7E-E36A0B3622E6}"/>
+          </ac:spMkLst>
+        </pc:spChg>
+        <pc:spChg chg="mod">
+          <ac:chgData name="Wang Jian-Sheng" userId="7d25d710-0931-49a3-acef-49192cec40f2" providerId="ADAL" clId="{66572D02-9A0D-4195-ADB6-5DBDF78AF6B3}" dt="2026-09-19T01:57:48.419" v="494" actId="20577"/>
+          <ac:spMkLst>
+            <pc:docMk/>
+            <pc:sldMk cId="939273039" sldId="305"/>
+            <ac:spMk id="46" creationId="{D71799B7-11CB-4733-A0A7-8BB5B2C00BAF}"/>
+          </ac:spMkLst>
+        </pc:spChg>
+        <pc:spChg chg="mod">
+          <ac:chgData name="Wang Jian-Sheng" userId="7d25d710-0931-49a3-acef-49192cec40f2" providerId="ADAL" clId="{66572D02-9A0D-4195-ADB6-5DBDF78AF6B3}" dt="2026-09-19T01:57:43.480" v="493" actId="20577"/>
+          <ac:spMkLst>
+            <pc:docMk/>
+            <pc:sldMk cId="939273039" sldId="305"/>
+            <ac:spMk id="47" creationId="{EDECE6F1-D46B-4B22-A378-E51F91548821}"/>
+          </ac:spMkLst>
+        </pc:spChg>
+        <pc:cxnChg chg="mod">
+          <ac:chgData name="Wang Jian-Sheng" userId="7d25d710-0931-49a3-acef-49192cec40f2" providerId="ADAL" clId="{66572D02-9A0D-4195-ADB6-5DBDF78AF6B3}" dt="2026-09-19T01:58:27.925" v="510" actId="1037"/>
+          <ac:cxnSpMkLst>
+            <pc:docMk/>
+            <pc:sldMk cId="939273039" sldId="305"/>
+            <ac:cxnSpMk id="26" creationId="{59C8A00B-1BDE-49D6-A747-5B43CC1E9C6C}"/>
+          </ac:cxnSpMkLst>
+        </pc:cxnChg>
+        <pc:cxnChg chg="mod">
+          <ac:chgData name="Wang Jian-Sheng" userId="7d25d710-0931-49a3-acef-49192cec40f2" providerId="ADAL" clId="{66572D02-9A0D-4195-ADB6-5DBDF78AF6B3}" dt="2026-09-19T01:58:09.667" v="505" actId="1038"/>
+          <ac:cxnSpMkLst>
+            <pc:docMk/>
+            <pc:sldMk cId="939273039" sldId="305"/>
+            <ac:cxnSpMk id="35" creationId="{FA4144CC-4911-4C03-84F9-E1FDFADD9D20}"/>
+          </ac:cxnSpMkLst>
+        </pc:cxnChg>
+        <pc:cxnChg chg="mod">
+          <ac:chgData name="Wang Jian-Sheng" userId="7d25d710-0931-49a3-acef-49192cec40f2" providerId="ADAL" clId="{66572D02-9A0D-4195-ADB6-5DBDF78AF6B3}" dt="2026-09-19T01:58:27.925" v="510" actId="1037"/>
+          <ac:cxnSpMkLst>
+            <pc:docMk/>
+            <pc:sldMk cId="939273039" sldId="305"/>
+            <ac:cxnSpMk id="41" creationId="{1D368BC0-A379-48B3-A258-1E19F3702A96}"/>
+          </ac:cxnSpMkLst>
+        </pc:cxnChg>
+        <pc:cxnChg chg="mod">
+          <ac:chgData name="Wang Jian-Sheng" userId="7d25d710-0931-49a3-acef-49192cec40f2" providerId="ADAL" clId="{66572D02-9A0D-4195-ADB6-5DBDF78AF6B3}" dt="2026-09-19T01:58:09.667" v="505" actId="1038"/>
+          <ac:cxnSpMkLst>
+            <pc:docMk/>
+            <pc:sldMk cId="939273039" sldId="305"/>
+            <ac:cxnSpMk id="44" creationId="{C846AA65-BFE2-4E84-83FB-644F6E200D98}"/>
+          </ac:cxnSpMkLst>
+        </pc:cxnChg>
+      </pc:sldChg>
+      <pc:sldChg chg="modSp mod">
+        <pc:chgData name="Wang Jian-Sheng" userId="7d25d710-0931-49a3-acef-49192cec40f2" providerId="ADAL" clId="{66572D02-9A0D-4195-ADB6-5DBDF78AF6B3}" dt="2026-09-19T03:08:26.792" v="1825" actId="20577"/>
+        <pc:sldMkLst>
+          <pc:docMk/>
+          <pc:sldMk cId="729036343" sldId="306"/>
+        </pc:sldMkLst>
+        <pc:spChg chg="mod">
+          <ac:chgData name="Wang Jian-Sheng" userId="7d25d710-0931-49a3-acef-49192cec40f2" providerId="ADAL" clId="{66572D02-9A0D-4195-ADB6-5DBDF78AF6B3}" dt="2026-09-19T02:29:59.840" v="1233" actId="20577"/>
+          <ac:spMkLst>
+            <pc:docMk/>
+            <pc:sldMk cId="729036343" sldId="306"/>
+            <ac:spMk id="2" creationId="{D48FAD49-3376-4AA1-9B14-A415C3B88D59}"/>
+          </ac:spMkLst>
+        </pc:spChg>
+        <pc:spChg chg="mod">
+          <ac:chgData name="Wang Jian-Sheng" userId="7d25d710-0931-49a3-acef-49192cec40f2" providerId="ADAL" clId="{66572D02-9A0D-4195-ADB6-5DBDF78AF6B3}" dt="2026-09-19T03:08:26.792" v="1825" actId="20577"/>
+          <ac:spMkLst>
+            <pc:docMk/>
+            <pc:sldMk cId="729036343" sldId="306"/>
+            <ac:spMk id="5" creationId="{7C4F306E-DC1A-4E10-AFAE-E7D8F2DABA5B}"/>
+          </ac:spMkLst>
+        </pc:spChg>
+      </pc:sldChg>
+      <pc:sldChg chg="modSp mod">
+        <pc:chgData name="Wang Jian-Sheng" userId="7d25d710-0931-49a3-acef-49192cec40f2" providerId="ADAL" clId="{66572D02-9A0D-4195-ADB6-5DBDF78AF6B3}" dt="2026-09-19T02:32:00.731" v="1291" actId="20577"/>
+        <pc:sldMkLst>
+          <pc:docMk/>
+          <pc:sldMk cId="108694981" sldId="307"/>
+        </pc:sldMkLst>
+        <pc:spChg chg="mod">
+          <ac:chgData name="Wang Jian-Sheng" userId="7d25d710-0931-49a3-acef-49192cec40f2" providerId="ADAL" clId="{66572D02-9A0D-4195-ADB6-5DBDF78AF6B3}" dt="2026-09-19T02:32:00.731" v="1291" actId="20577"/>
+          <ac:spMkLst>
+            <pc:docMk/>
+            <pc:sldMk cId="108694981" sldId="307"/>
+            <ac:spMk id="2" creationId="{23E63AF8-2FFE-4BDF-A33D-4C29660FD3F6}"/>
+          </ac:spMkLst>
+        </pc:spChg>
+      </pc:sldChg>
+      <pc:sldChg chg="modSp mod">
+        <pc:chgData name="Wang Jian-Sheng" userId="7d25d710-0931-49a3-acef-49192cec40f2" providerId="ADAL" clId="{66572D02-9A0D-4195-ADB6-5DBDF78AF6B3}" dt="2026-09-19T02:52:19.224" v="1460" actId="20577"/>
+        <pc:sldMkLst>
+          <pc:docMk/>
+          <pc:sldMk cId="3208573895" sldId="308"/>
+        </pc:sldMkLst>
+        <pc:spChg chg="mod">
+          <ac:chgData name="Wang Jian-Sheng" userId="7d25d710-0931-49a3-acef-49192cec40f2" providerId="ADAL" clId="{66572D02-9A0D-4195-ADB6-5DBDF78AF6B3}" dt="2026-09-19T02:52:19.224" v="1460" actId="20577"/>
+          <ac:spMkLst>
+            <pc:docMk/>
+            <pc:sldMk cId="3208573895" sldId="308"/>
+            <ac:spMk id="3" creationId="{649BBC25-EEB3-4AB0-96E2-BCD45FB4BB16}"/>
+          </ac:spMkLst>
+        </pc:spChg>
+      </pc:sldChg>
+      <pc:sldChg chg="addSp modSp mod modNotesTx">
+        <pc:chgData name="Wang Jian-Sheng" userId="7d25d710-0931-49a3-acef-49192cec40f2" providerId="ADAL" clId="{66572D02-9A0D-4195-ADB6-5DBDF78AF6B3}" dt="2026-09-26T03:08:21.247" v="3761" actId="20577"/>
+        <pc:sldMkLst>
+          <pc:docMk/>
+          <pc:sldMk cId="2359578012" sldId="309"/>
+        </pc:sldMkLst>
+        <pc:spChg chg="mod">
+          <ac:chgData name="Wang Jian-Sheng" userId="7d25d710-0931-49a3-acef-49192cec40f2" providerId="ADAL" clId="{66572D02-9A0D-4195-ADB6-5DBDF78AF6B3}" dt="2026-09-26T03:08:21.247" v="3761" actId="20577"/>
+          <ac:spMkLst>
+            <pc:docMk/>
+            <pc:sldMk cId="2359578012" sldId="309"/>
+            <ac:spMk id="2" creationId="{D629F4B2-5B83-4CE4-9F64-C6B1F00848AB}"/>
+          </ac:spMkLst>
+        </pc:spChg>
+        <pc:spChg chg="mod">
+          <ac:chgData name="Wang Jian-Sheng" userId="7d25d710-0931-49a3-acef-49192cec40f2" providerId="ADAL" clId="{66572D02-9A0D-4195-ADB6-5DBDF78AF6B3}" dt="2026-09-19T03:11:22.078" v="1848" actId="20577"/>
+          <ac:spMkLst>
+            <pc:docMk/>
+            <pc:sldMk cId="2359578012" sldId="309"/>
+            <ac:spMk id="3" creationId="{A4F39299-424B-4D7D-85E2-40D52E826613}"/>
+          </ac:spMkLst>
+        </pc:spChg>
+        <pc:spChg chg="add mod">
+          <ac:chgData name="Wang Jian-Sheng" userId="7d25d710-0931-49a3-acef-49192cec40f2" providerId="ADAL" clId="{66572D02-9A0D-4195-ADB6-5DBDF78AF6B3}" dt="2026-09-19T02:16:29.089" v="1025" actId="14100"/>
+          <ac:spMkLst>
+            <pc:docMk/>
+            <pc:sldMk cId="2359578012" sldId="309"/>
+            <ac:spMk id="4" creationId="{2BDA37CE-1E60-6903-CF77-C689113EEDC4}"/>
+          </ac:spMkLst>
+        </pc:spChg>
+      </pc:sldChg>
+      <pc:sldChg chg="modSp mod">
+        <pc:chgData name="Wang Jian-Sheng" userId="7d25d710-0931-49a3-acef-49192cec40f2" providerId="ADAL" clId="{66572D02-9A0D-4195-ADB6-5DBDF78AF6B3}" dt="2026-09-19T02:57:58.153" v="1748" actId="20577"/>
         <pc:sldMkLst>
           <pc:docMk/>
           <pc:sldMk cId="2847271593" sldId="311"/>
         </pc:sldMkLst>
         <pc:spChg chg="mod">
-          <ac:chgData name="Wang Jian-Sheng" userId="7d25d710-0931-49a3-acef-49192cec40f2" providerId="ADAL" clId="{66572D02-9A0D-4195-ADB6-5DBDF78AF6B3}" dt="2026-03-20T05:57:57.423" v="1" actId="20577"/>
+          <ac:chgData name="Wang Jian-Sheng" userId="7d25d710-0931-49a3-acef-49192cec40f2" providerId="ADAL" clId="{66572D02-9A0D-4195-ADB6-5DBDF78AF6B3}" dt="2026-09-19T02:38:35.097" v="1376" actId="20577"/>
+          <ac:spMkLst>
+            <pc:docMk/>
+            <pc:sldMk cId="2847271593" sldId="311"/>
+            <ac:spMk id="2" creationId="{E710BCA0-1550-45B1-ADFE-73086739879F}"/>
+          </ac:spMkLst>
+        </pc:spChg>
+        <pc:spChg chg="mod">
+          <ac:chgData name="Wang Jian-Sheng" userId="7d25d710-0931-49a3-acef-49192cec40f2" providerId="ADAL" clId="{66572D02-9A0D-4195-ADB6-5DBDF78AF6B3}" dt="2026-09-19T02:57:58.153" v="1748" actId="20577"/>
           <ac:spMkLst>
             <pc:docMk/>
             <pc:sldMk cId="2847271593" sldId="311"/>
@@ -159,41 +397,242 @@
           </ac:spMkLst>
         </pc:spChg>
       </pc:sldChg>
-      <pc:sldChg chg="addSp modSp mod modNotesTx">
-        <pc:chgData name="Wang Jian-Sheng" userId="7d25d710-0931-49a3-acef-49192cec40f2" providerId="ADAL" clId="{66572D02-9A0D-4195-ADB6-5DBDF78AF6B3}" dt="2026-03-21T07:25:08.108" v="414" actId="1038"/>
+      <pc:sldChg chg="addSp modSp mod">
+        <pc:chgData name="Wang Jian-Sheng" userId="7d25d710-0931-49a3-acef-49192cec40f2" providerId="ADAL" clId="{66572D02-9A0D-4195-ADB6-5DBDF78AF6B3}" dt="2026-09-19T03:15:03.961" v="1957" actId="1076"/>
         <pc:sldMkLst>
           <pc:docMk/>
           <pc:sldMk cId="2997646525" sldId="312"/>
         </pc:sldMkLst>
-        <pc:spChg chg="add mod">
-          <ac:chgData name="Wang Jian-Sheng" userId="7d25d710-0931-49a3-acef-49192cec40f2" providerId="ADAL" clId="{66572D02-9A0D-4195-ADB6-5DBDF78AF6B3}" dt="2026-03-21T07:25:08.108" v="414" actId="1038"/>
+        <pc:spChg chg="mod">
+          <ac:chgData name="Wang Jian-Sheng" userId="7d25d710-0931-49a3-acef-49192cec40f2" providerId="ADAL" clId="{66572D02-9A0D-4195-ADB6-5DBDF78AF6B3}" dt="2026-09-19T02:35:55.622" v="1375" actId="20577"/>
           <ac:spMkLst>
             <pc:docMk/>
             <pc:sldMk cId="2997646525" sldId="312"/>
-            <ac:spMk id="3" creationId="{8C6ADF94-A040-D063-35D2-67CFBA2CA06D}"/>
+            <ac:spMk id="2" creationId="{943D411C-9E0F-4A87-A680-65E35F7328A9}"/>
+          </ac:spMkLst>
+        </pc:spChg>
+        <pc:spChg chg="add mod">
+          <ac:chgData name="Wang Jian-Sheng" userId="7d25d710-0931-49a3-acef-49192cec40f2" providerId="ADAL" clId="{66572D02-9A0D-4195-ADB6-5DBDF78AF6B3}" dt="2026-09-19T03:02:09.667" v="1752" actId="1076"/>
+          <ac:spMkLst>
+            <pc:docMk/>
+            <pc:sldMk cId="2997646525" sldId="312"/>
+            <ac:spMk id="4" creationId="{6495F8F1-0289-C2A6-52AD-3ADBF952F635}"/>
+          </ac:spMkLst>
+        </pc:spChg>
+        <pc:spChg chg="add mod">
+          <ac:chgData name="Wang Jian-Sheng" userId="7d25d710-0931-49a3-acef-49192cec40f2" providerId="ADAL" clId="{66572D02-9A0D-4195-ADB6-5DBDF78AF6B3}" dt="2026-09-19T03:15:03.961" v="1957" actId="1076"/>
+          <ac:spMkLst>
+            <pc:docMk/>
+            <pc:sldMk cId="2997646525" sldId="312"/>
+            <ac:spMk id="6" creationId="{16E5981F-9187-F894-5C9C-5E4B5BF0791F}"/>
           </ac:spMkLst>
         </pc:spChg>
       </pc:sldChg>
-      <pc:sldChg chg="addSp modSp mod">
-        <pc:chgData name="Wang Jian-Sheng" userId="7d25d710-0931-49a3-acef-49192cec40f2" providerId="ADAL" clId="{66572D02-9A0D-4195-ADB6-5DBDF78AF6B3}" dt="2026-03-21T07:30:47.502" v="474" actId="16959"/>
+      <pc:sldChg chg="modSp mod">
+        <pc:chgData name="Wang Jian-Sheng" userId="7d25d710-0931-49a3-acef-49192cec40f2" providerId="ADAL" clId="{66572D02-9A0D-4195-ADB6-5DBDF78AF6B3}" dt="2026-09-19T02:53:06.207" v="1462" actId="14100"/>
         <pc:sldMkLst>
           <pc:docMk/>
           <pc:sldMk cId="831894424" sldId="313"/>
         </pc:sldMkLst>
         <pc:spChg chg="mod">
-          <ac:chgData name="Wang Jian-Sheng" userId="7d25d710-0931-49a3-acef-49192cec40f2" providerId="ADAL" clId="{66572D02-9A0D-4195-ADB6-5DBDF78AF6B3}" dt="2026-03-21T07:30:47.502" v="474" actId="16959"/>
+          <ac:chgData name="Wang Jian-Sheng" userId="7d25d710-0931-49a3-acef-49192cec40f2" providerId="ADAL" clId="{66572D02-9A0D-4195-ADB6-5DBDF78AF6B3}" dt="2026-09-19T02:44:45.906" v="1413" actId="16959"/>
           <ac:spMkLst>
             <pc:docMk/>
             <pc:sldMk cId="831894424" sldId="313"/>
             <ac:spMk id="3" creationId="{13E986C4-66D6-4E08-9A48-C557E43FB45B}"/>
           </ac:spMkLst>
         </pc:spChg>
-        <pc:spChg chg="add mod">
-          <ac:chgData name="Wang Jian-Sheng" userId="7d25d710-0931-49a3-acef-49192cec40f2" providerId="ADAL" clId="{66572D02-9A0D-4195-ADB6-5DBDF78AF6B3}" dt="2026-03-21T07:30:32.153" v="470" actId="16959"/>
+        <pc:spChg chg="mod">
+          <ac:chgData name="Wang Jian-Sheng" userId="7d25d710-0931-49a3-acef-49192cec40f2" providerId="ADAL" clId="{66572D02-9A0D-4195-ADB6-5DBDF78AF6B3}" dt="2026-09-19T02:53:06.207" v="1462" actId="14100"/>
           <ac:spMkLst>
             <pc:docMk/>
             <pc:sldMk cId="831894424" sldId="313"/>
             <ac:spMk id="4" creationId="{628ADA7C-914B-9246-A0D9-428D30678460}"/>
+          </ac:spMkLst>
+        </pc:spChg>
+      </pc:sldChg>
+      <pc:sldChg chg="modSp mod">
+        <pc:chgData name="Wang Jian-Sheng" userId="7d25d710-0931-49a3-acef-49192cec40f2" providerId="ADAL" clId="{66572D02-9A0D-4195-ADB6-5DBDF78AF6B3}" dt="2026-09-19T02:34:12.305" v="1317" actId="20577"/>
+        <pc:sldMkLst>
+          <pc:docMk/>
+          <pc:sldMk cId="1875225173" sldId="314"/>
+        </pc:sldMkLst>
+        <pc:spChg chg="mod">
+          <ac:chgData name="Wang Jian-Sheng" userId="7d25d710-0931-49a3-acef-49192cec40f2" providerId="ADAL" clId="{66572D02-9A0D-4195-ADB6-5DBDF78AF6B3}" dt="2026-09-19T02:33:46.365" v="1316" actId="27636"/>
+          <ac:spMkLst>
+            <pc:docMk/>
+            <pc:sldMk cId="1875225173" sldId="314"/>
+            <ac:spMk id="2" creationId="{EA2C1B18-6EF7-43D4-8119-89388B460CC2}"/>
+          </ac:spMkLst>
+        </pc:spChg>
+        <pc:spChg chg="mod">
+          <ac:chgData name="Wang Jian-Sheng" userId="7d25d710-0931-49a3-acef-49192cec40f2" providerId="ADAL" clId="{66572D02-9A0D-4195-ADB6-5DBDF78AF6B3}" dt="2026-09-19T02:34:12.305" v="1317" actId="20577"/>
+          <ac:spMkLst>
+            <pc:docMk/>
+            <pc:sldMk cId="1875225173" sldId="314"/>
+            <ac:spMk id="5" creationId="{8FE3A315-B45E-48BF-B009-A934AF3EE65D}"/>
+          </ac:spMkLst>
+        </pc:spChg>
+      </pc:sldChg>
+      <pc:sldChg chg="modSp">
+        <pc:chgData name="Wang Jian-Sheng" userId="7d25d710-0931-49a3-acef-49192cec40f2" providerId="ADAL" clId="{66572D02-9A0D-4195-ADB6-5DBDF78AF6B3}" dt="2026-09-19T02:35:20.169" v="1373" actId="20577"/>
+        <pc:sldMkLst>
+          <pc:docMk/>
+          <pc:sldMk cId="1676436862" sldId="315"/>
+        </pc:sldMkLst>
+        <pc:spChg chg="mod">
+          <ac:chgData name="Wang Jian-Sheng" userId="7d25d710-0931-49a3-acef-49192cec40f2" providerId="ADAL" clId="{66572D02-9A0D-4195-ADB6-5DBDF78AF6B3}" dt="2026-09-19T02:35:20.169" v="1373" actId="20577"/>
+          <ac:spMkLst>
+            <pc:docMk/>
+            <pc:sldMk cId="1676436862" sldId="315"/>
+            <ac:spMk id="5" creationId="{FF6C227D-5395-4659-90FA-F298FCAF9668}"/>
+          </ac:spMkLst>
+        </pc:spChg>
+      </pc:sldChg>
+      <pc:sldChg chg="addSp modSp new mod">
+        <pc:chgData name="Wang Jian-Sheng" userId="7d25d710-0931-49a3-acef-49192cec40f2" providerId="ADAL" clId="{66572D02-9A0D-4195-ADB6-5DBDF78AF6B3}" dt="2026-09-19T03:38:44.701" v="2429" actId="1076"/>
+        <pc:sldMkLst>
+          <pc:docMk/>
+          <pc:sldMk cId="2840551416" sldId="316"/>
+        </pc:sldMkLst>
+        <pc:spChg chg="mod">
+          <ac:chgData name="Wang Jian-Sheng" userId="7d25d710-0931-49a3-acef-49192cec40f2" providerId="ADAL" clId="{66572D02-9A0D-4195-ADB6-5DBDF78AF6B3}" dt="2026-09-19T03:23:06.121" v="1989" actId="20577"/>
+          <ac:spMkLst>
+            <pc:docMk/>
+            <pc:sldMk cId="2840551416" sldId="316"/>
+            <ac:spMk id="2" creationId="{50562389-204A-8E8B-0193-44E614561343}"/>
+          </ac:spMkLst>
+        </pc:spChg>
+        <pc:spChg chg="mod">
+          <ac:chgData name="Wang Jian-Sheng" userId="7d25d710-0931-49a3-acef-49192cec40f2" providerId="ADAL" clId="{66572D02-9A0D-4195-ADB6-5DBDF78AF6B3}" dt="2026-09-19T03:34:03.560" v="2334" actId="1076"/>
+          <ac:spMkLst>
+            <pc:docMk/>
+            <pc:sldMk cId="2840551416" sldId="316"/>
+            <ac:spMk id="3" creationId="{72C50A9B-4516-D5A2-6B37-2FAD31EC41E7}"/>
+          </ac:spMkLst>
+        </pc:spChg>
+        <pc:spChg chg="add mod">
+          <ac:chgData name="Wang Jian-Sheng" userId="7d25d710-0931-49a3-acef-49192cec40f2" providerId="ADAL" clId="{66572D02-9A0D-4195-ADB6-5DBDF78AF6B3}" dt="2026-09-19T03:34:11.715" v="2335" actId="1076"/>
+          <ac:spMkLst>
+            <pc:docMk/>
+            <pc:sldMk cId="2840551416" sldId="316"/>
+            <ac:spMk id="4" creationId="{CBE6DC94-7D26-C5B1-29AD-7AFF5A3D8D57}"/>
+          </ac:spMkLst>
+        </pc:spChg>
+        <pc:spChg chg="add mod">
+          <ac:chgData name="Wang Jian-Sheng" userId="7d25d710-0931-49a3-acef-49192cec40f2" providerId="ADAL" clId="{66572D02-9A0D-4195-ADB6-5DBDF78AF6B3}" dt="2026-09-19T03:38:44.701" v="2429" actId="1076"/>
+          <ac:spMkLst>
+            <pc:docMk/>
+            <pc:sldMk cId="2840551416" sldId="316"/>
+            <ac:spMk id="5" creationId="{54A95B21-1D66-C578-9FD8-CCE6C6109649}"/>
+          </ac:spMkLst>
+        </pc:spChg>
+        <pc:spChg chg="add mod">
+          <ac:chgData name="Wang Jian-Sheng" userId="7d25d710-0931-49a3-acef-49192cec40f2" providerId="ADAL" clId="{66572D02-9A0D-4195-ADB6-5DBDF78AF6B3}" dt="2026-09-19T03:36:19.151" v="2391" actId="1076"/>
+          <ac:spMkLst>
+            <pc:docMk/>
+            <pc:sldMk cId="2840551416" sldId="316"/>
+            <ac:spMk id="6" creationId="{5D7E0FD0-FDEF-734B-CB9C-059954C21C3B}"/>
+          </ac:spMkLst>
+        </pc:spChg>
+      </pc:sldChg>
+      <pc:sldChg chg="addSp delSp modSp new mod">
+        <pc:chgData name="Wang Jian-Sheng" userId="7d25d710-0931-49a3-acef-49192cec40f2" providerId="ADAL" clId="{66572D02-9A0D-4195-ADB6-5DBDF78AF6B3}" dt="2026-09-26T03:32:05.488" v="3874" actId="20577"/>
+        <pc:sldMkLst>
+          <pc:docMk/>
+          <pc:sldMk cId="1800611406" sldId="317"/>
+        </pc:sldMkLst>
+        <pc:spChg chg="mod">
+          <ac:chgData name="Wang Jian-Sheng" userId="7d25d710-0931-49a3-acef-49192cec40f2" providerId="ADAL" clId="{66572D02-9A0D-4195-ADB6-5DBDF78AF6B3}" dt="2026-09-26T03:11:10.701" v="3802" actId="20577"/>
+          <ac:spMkLst>
+            <pc:docMk/>
+            <pc:sldMk cId="1800611406" sldId="317"/>
+            <ac:spMk id="2" creationId="{35F92F96-B088-8AA4-92E9-FA9A0C910C2E}"/>
+          </ac:spMkLst>
+        </pc:spChg>
+        <pc:spChg chg="add mod">
+          <ac:chgData name="Wang Jian-Sheng" userId="7d25d710-0931-49a3-acef-49192cec40f2" providerId="ADAL" clId="{66572D02-9A0D-4195-ADB6-5DBDF78AF6B3}" dt="2026-09-26T03:32:05.488" v="3874" actId="20577"/>
+          <ac:spMkLst>
+            <pc:docMk/>
+            <pc:sldMk cId="1800611406" sldId="317"/>
+            <ac:spMk id="3" creationId="{5AAF6C0F-15B3-B591-09A3-9BB34EA68BAD}"/>
+          </ac:spMkLst>
+        </pc:spChg>
+        <pc:spChg chg="add mod">
+          <ac:chgData name="Wang Jian-Sheng" userId="7d25d710-0931-49a3-acef-49192cec40f2" providerId="ADAL" clId="{66572D02-9A0D-4195-ADB6-5DBDF78AF6B3}" dt="2026-09-19T03:52:57.666" v="2527" actId="1076"/>
+          <ac:spMkLst>
+            <pc:docMk/>
+            <pc:sldMk cId="1800611406" sldId="317"/>
+            <ac:spMk id="4" creationId="{0EB2B38A-582C-3260-5626-BE5C32B786C1}"/>
+          </ac:spMkLst>
+        </pc:spChg>
+      </pc:sldChg>
+      <pc:sldChg chg="modSp new mod">
+        <pc:chgData name="Wang Jian-Sheng" userId="7d25d710-0931-49a3-acef-49192cec40f2" providerId="ADAL" clId="{66572D02-9A0D-4195-ADB6-5DBDF78AF6B3}" dt="2026-09-26T03:06:03.385" v="3760" actId="20577"/>
+        <pc:sldMkLst>
+          <pc:docMk/>
+          <pc:sldMk cId="1991156545" sldId="318"/>
+        </pc:sldMkLst>
+        <pc:spChg chg="mod">
+          <ac:chgData name="Wang Jian-Sheng" userId="7d25d710-0931-49a3-acef-49192cec40f2" providerId="ADAL" clId="{66572D02-9A0D-4195-ADB6-5DBDF78AF6B3}" dt="2026-09-26T02:30:11.262" v="2535" actId="20577"/>
+          <ac:spMkLst>
+            <pc:docMk/>
+            <pc:sldMk cId="1991156545" sldId="318"/>
+            <ac:spMk id="2" creationId="{606129A6-CAC0-1143-8F18-E12A72408B4C}"/>
+          </ac:spMkLst>
+        </pc:spChg>
+        <pc:spChg chg="mod">
+          <ac:chgData name="Wang Jian-Sheng" userId="7d25d710-0931-49a3-acef-49192cec40f2" providerId="ADAL" clId="{66572D02-9A0D-4195-ADB6-5DBDF78AF6B3}" dt="2026-09-26T03:06:03.385" v="3760" actId="20577"/>
+          <ac:spMkLst>
+            <pc:docMk/>
+            <pc:sldMk cId="1991156545" sldId="318"/>
+            <ac:spMk id="3" creationId="{1B34D2CF-F38C-0974-BCA0-BE81FEE215F8}"/>
+          </ac:spMkLst>
+        </pc:spChg>
+      </pc:sldChg>
+      <pc:sldChg chg="modSp new mod">
+        <pc:chgData name="Wang Jian-Sheng" userId="7d25d710-0931-49a3-acef-49192cec40f2" providerId="ADAL" clId="{66572D02-9A0D-4195-ADB6-5DBDF78AF6B3}" dt="2026-09-26T03:14:29.791" v="3819" actId="20577"/>
+        <pc:sldMkLst>
+          <pc:docMk/>
+          <pc:sldMk cId="1531545693" sldId="319"/>
+        </pc:sldMkLst>
+        <pc:spChg chg="mod">
+          <ac:chgData name="Wang Jian-Sheng" userId="7d25d710-0931-49a3-acef-49192cec40f2" providerId="ADAL" clId="{66572D02-9A0D-4195-ADB6-5DBDF78AF6B3}" dt="2026-09-26T02:42:46.061" v="2876" actId="20577"/>
+          <ac:spMkLst>
+            <pc:docMk/>
+            <pc:sldMk cId="1531545693" sldId="319"/>
+            <ac:spMk id="2" creationId="{79F5382D-4A72-0542-9F3C-E6417F9CCAB6}"/>
+          </ac:spMkLst>
+        </pc:spChg>
+        <pc:spChg chg="mod">
+          <ac:chgData name="Wang Jian-Sheng" userId="7d25d710-0931-49a3-acef-49192cec40f2" providerId="ADAL" clId="{66572D02-9A0D-4195-ADB6-5DBDF78AF6B3}" dt="2026-09-26T03:14:29.791" v="3819" actId="20577"/>
+          <ac:spMkLst>
+            <pc:docMk/>
+            <pc:sldMk cId="1531545693" sldId="319"/>
+            <ac:spMk id="3" creationId="{2EEA4FC6-1A5F-F958-C8FD-112364FE36C1}"/>
+          </ac:spMkLst>
+        </pc:spChg>
+      </pc:sldChg>
+      <pc:sldChg chg="modSp new mod">
+        <pc:chgData name="Wang Jian-Sheng" userId="7d25d710-0931-49a3-acef-49192cec40f2" providerId="ADAL" clId="{66572D02-9A0D-4195-ADB6-5DBDF78AF6B3}" dt="2026-09-26T03:10:29.153" v="3782" actId="20577"/>
+        <pc:sldMkLst>
+          <pc:docMk/>
+          <pc:sldMk cId="3737468761" sldId="320"/>
+        </pc:sldMkLst>
+        <pc:spChg chg="mod">
+          <ac:chgData name="Wang Jian-Sheng" userId="7d25d710-0931-49a3-acef-49192cec40f2" providerId="ADAL" clId="{66572D02-9A0D-4195-ADB6-5DBDF78AF6B3}" dt="2026-09-26T02:53:14.573" v="3279" actId="20577"/>
+          <ac:spMkLst>
+            <pc:docMk/>
+            <pc:sldMk cId="3737468761" sldId="320"/>
+            <ac:spMk id="2" creationId="{EFBC6B3B-1007-4B5E-CA95-F6320D6734B6}"/>
+          </ac:spMkLst>
+        </pc:spChg>
+        <pc:spChg chg="mod">
+          <ac:chgData name="Wang Jian-Sheng" userId="7d25d710-0931-49a3-acef-49192cec40f2" providerId="ADAL" clId="{66572D02-9A0D-4195-ADB6-5DBDF78AF6B3}" dt="2026-09-26T03:10:29.153" v="3782" actId="20577"/>
+          <ac:spMkLst>
+            <pc:docMk/>
+            <pc:sldMk cId="3737468761" sldId="320"/>
+            <ac:spMk id="3" creationId="{D49FDB62-6861-296D-8F9C-035BDB58DF28}"/>
           </ac:spMkLst>
         </pc:spChg>
       </pc:sldChg>
@@ -284,7 +723,7 @@
           <a:p>
             <a:fld id="{B1C5323C-DA4A-438F-B55F-27209206FB23}" type="datetimeFigureOut">
               <a:rPr lang="en-SG" smtClean="0"/>
-              <a:t>21/3/2026</a:t>
+              <a:t>26/9/2026</a:t>
             </a:fld>
             <a:endParaRPr lang="en-SG"/>
           </a:p>
@@ -581,6 +1020,190 @@
         </p:nvSpPr>
         <p:spPr/>
       </p:sp>
+      <mc:AlternateContent xmlns:mc="http://schemas.openxmlformats.org/markup-compatibility/2006" xmlns:a14="http://schemas.microsoft.com/office/drawing/2010/main">
+        <mc:Choice Requires="a14">
+          <p:sp>
+            <p:nvSpPr>
+              <p:cNvPr id="3" name="Notes Placeholder 2"/>
+              <p:cNvSpPr>
+                <a:spLocks noGrp="1"/>
+              </p:cNvSpPr>
+              <p:nvPr>
+                <p:ph type="body" idx="1"/>
+              </p:nvPr>
+            </p:nvSpPr>
+            <p:spPr/>
+            <p:txBody>
+              <a:bodyPr/>
+              <a:lstStyle/>
+              <a:p>
+                <a:r>
+                  <a:rPr lang="en-US" dirty="0"/>
+                  <a:t>We assume </a:t>
+                </a:r>
+                <a14:m>
+                  <m:oMath xmlns:m="http://schemas.openxmlformats.org/officeDocument/2006/math">
+                    <m:r>
+                      <a:rPr lang="en-US" b="0" i="1" smtClean="0">
+                        <a:latin typeface="Cambria Math" panose="02040503050406030204" pitchFamily="18" charset="0"/>
+                      </a:rPr>
+                      <m:t>𝑊</m:t>
+                    </m:r>
+                    <m:r>
+                      <a:rPr lang="en-US" b="0" i="1" smtClean="0">
+                        <a:latin typeface="Cambria Math" panose="02040503050406030204" pitchFamily="18" charset="0"/>
+                      </a:rPr>
+                      <m:t>=</m:t>
+                    </m:r>
+                    <m:sSup>
+                      <m:sSupPr>
+                        <m:ctrlPr>
+                          <a:rPr lang="en-US" b="0" i="1" smtClean="0">
+                            <a:latin typeface="Cambria Math" panose="02040503050406030204" pitchFamily="18" charset="0"/>
+                          </a:rPr>
+                        </m:ctrlPr>
+                      </m:sSupPr>
+                      <m:e>
+                        <m:r>
+                          <a:rPr lang="en-US" b="0" i="1" smtClean="0">
+                            <a:latin typeface="Cambria Math" panose="02040503050406030204" pitchFamily="18" charset="0"/>
+                          </a:rPr>
+                          <m:t>𝑊</m:t>
+                        </m:r>
+                      </m:e>
+                      <m:sup>
+                        <m:r>
+                          <a:rPr lang="en-US" b="0" i="1" smtClean="0">
+                            <a:latin typeface="Cambria Math" panose="02040503050406030204" pitchFamily="18" charset="0"/>
+                          </a:rPr>
+                          <m:t>𝑇</m:t>
+                        </m:r>
+                      </m:sup>
+                    </m:sSup>
+                  </m:oMath>
+                </a14:m>
+                <a:r>
+                  <a:rPr lang="en-SG" dirty="0"/>
+                  <a:t> for simplicity.</a:t>
+                </a:r>
+                <a:r>
+                  <a:rPr lang="en-SG" baseline="0" dirty="0"/>
+                  <a:t>   \partial h^(t)/\partial h^(0) appears the gradient.</a:t>
+                </a:r>
+                <a:endParaRPr lang="en-SG" dirty="0"/>
+              </a:p>
+            </p:txBody>
+          </p:sp>
+        </mc:Choice>
+        <mc:Fallback xmlns="">
+          <p:sp>
+            <p:nvSpPr>
+              <p:cNvPr id="3" name="Notes Placeholder 2"/>
+              <p:cNvSpPr>
+                <a:spLocks noGrp="1"/>
+              </p:cNvSpPr>
+              <p:nvPr>
+                <p:ph type="body" idx="1"/>
+              </p:nvPr>
+            </p:nvSpPr>
+            <p:spPr/>
+            <p:txBody>
+              <a:bodyPr/>
+              <a:lstStyle/>
+              <a:p>
+                <a:r>
+                  <a:rPr lang="en-US" dirty="0"/>
+                  <a:t>We assume </a:t>
+                </a:r>
+                <a:r>
+                  <a:rPr lang="en-US" b="0" i="0">
+                    <a:latin typeface="Cambria Math" panose="02040503050406030204" pitchFamily="18" charset="0"/>
+                  </a:rPr>
+                  <a:t>𝑊=𝑊^𝑇</a:t>
+                </a:r>
+                <a:r>
+                  <a:rPr lang="en-SG" dirty="0"/>
+                  <a:t> for simplicity.</a:t>
+                </a:r>
+                <a:r>
+                  <a:rPr lang="en-SG" baseline="0" dirty="0"/>
+                  <a:t>   For general matrix, we can use singular </a:t>
+                </a:r>
+                <a:r>
+                  <a:rPr lang="en-SG" baseline="0"/>
+                  <a:t>value decomposition.  </a:t>
+                </a:r>
+                <a:endParaRPr lang="en-SG" dirty="0"/>
+              </a:p>
+            </p:txBody>
+          </p:sp>
+        </mc:Fallback>
+      </mc:AlternateContent>
+      <p:sp>
+        <p:nvSpPr>
+          <p:cNvPr id="4" name="Slide Number Placeholder 3"/>
+          <p:cNvSpPr>
+            <a:spLocks noGrp="1"/>
+          </p:cNvSpPr>
+          <p:nvPr>
+            <p:ph type="sldNum" sz="quarter" idx="5"/>
+          </p:nvPr>
+        </p:nvSpPr>
+        <p:spPr/>
+        <p:txBody>
+          <a:bodyPr/>
+          <a:lstStyle/>
+          <a:p>
+            <a:fld id="{1B96A136-CBA9-41BE-B678-BB635CF2BB08}" type="slidenum">
+              <a:rPr lang="en-SG" smtClean="0"/>
+              <a:t>13</a:t>
+            </a:fld>
+            <a:endParaRPr lang="en-SG"/>
+          </a:p>
+        </p:txBody>
+      </p:sp>
+    </p:spTree>
+    <p:extLst>
+      <p:ext uri="{BB962C8B-B14F-4D97-AF65-F5344CB8AC3E}">
+        <p14:creationId xmlns:p14="http://schemas.microsoft.com/office/powerpoint/2010/main" val="2036983478"/>
+      </p:ext>
+    </p:extLst>
+  </p:cSld>
+  <p:clrMapOvr>
+    <a:masterClrMapping/>
+  </p:clrMapOvr>
+</p:notes>
+</file>
+
+<file path=ppt/notesSlides/notesSlide2.xml><?xml version="1.0" encoding="utf-8"?>
+<p:notes xmlns:a="http://schemas.openxmlformats.org/drawingml/2006/main" xmlns:r="http://schemas.openxmlformats.org/officeDocument/2006/relationships" xmlns:p="http://schemas.openxmlformats.org/presentationml/2006/main">
+  <p:cSld>
+    <p:spTree>
+      <p:nvGrpSpPr>
+        <p:cNvPr id="1" name=""/>
+        <p:cNvGrpSpPr/>
+        <p:nvPr/>
+      </p:nvGrpSpPr>
+      <p:grpSpPr>
+        <a:xfrm>
+          <a:off x="0" y="0"/>
+          <a:ext cx="0" cy="0"/>
+          <a:chOff x="0" y="0"/>
+          <a:chExt cx="0" cy="0"/>
+        </a:xfrm>
+      </p:grpSpPr>
+      <p:sp>
+        <p:nvSpPr>
+          <p:cNvPr id="2" name="Slide Image Placeholder 1"/>
+          <p:cNvSpPr>
+            <a:spLocks noGrp="1" noRot="1" noChangeAspect="1"/>
+          </p:cNvSpPr>
+          <p:nvPr>
+            <p:ph type="sldImg"/>
+          </p:nvPr>
+        </p:nvSpPr>
+        <p:spPr/>
+      </p:sp>
       <p:sp>
         <p:nvSpPr>
           <p:cNvPr id="3" name="Notes Placeholder 2"/>
@@ -625,7 +1248,7 @@
           <a:p>
             <a:fld id="{1B96A136-CBA9-41BE-B678-BB635CF2BB08}" type="slidenum">
               <a:rPr lang="en-SG" smtClean="0"/>
-              <a:t>12</a:t>
+              <a:t>14</a:t>
             </a:fld>
             <a:endParaRPr lang="en-SG"/>
           </a:p>
@@ -779,7 +1402,7 @@
           <a:p>
             <a:fld id="{A489F94C-8A6A-45FE-82A9-DD9AF81D1AD4}" type="datetimeFigureOut">
               <a:rPr lang="en-US" smtClean="0"/>
-              <a:t>3/21/2026</a:t>
+              <a:t>9/26/2026</a:t>
             </a:fld>
             <a:endParaRPr lang="en-US"/>
           </a:p>
@@ -949,7 +1572,7 @@
           <a:p>
             <a:fld id="{A489F94C-8A6A-45FE-82A9-DD9AF81D1AD4}" type="datetimeFigureOut">
               <a:rPr lang="en-US" smtClean="0"/>
-              <a:t>3/21/2026</a:t>
+              <a:t>9/26/2026</a:t>
             </a:fld>
             <a:endParaRPr lang="en-US"/>
           </a:p>
@@ -1129,7 +1752,7 @@
           <a:p>
             <a:fld id="{A489F94C-8A6A-45FE-82A9-DD9AF81D1AD4}" type="datetimeFigureOut">
               <a:rPr lang="en-US" smtClean="0"/>
-              <a:t>3/21/2026</a:t>
+              <a:t>9/26/2026</a:t>
             </a:fld>
             <a:endParaRPr lang="en-US"/>
           </a:p>
@@ -1335,7 +1958,7 @@
           <a:p>
             <a:fld id="{A489F94C-8A6A-45FE-82A9-DD9AF81D1AD4}" type="datetimeFigureOut">
               <a:rPr lang="en-US" smtClean="0"/>
-              <a:t>3/21/2026</a:t>
+              <a:t>9/26/2026</a:t>
             </a:fld>
             <a:endParaRPr lang="en-US"/>
           </a:p>
@@ -1579,7 +2202,7 @@
           <a:p>
             <a:fld id="{A489F94C-8A6A-45FE-82A9-DD9AF81D1AD4}" type="datetimeFigureOut">
               <a:rPr lang="en-US" smtClean="0"/>
-              <a:t>3/21/2026</a:t>
+              <a:t>9/26/2026</a:t>
             </a:fld>
             <a:endParaRPr lang="en-US"/>
           </a:p>
@@ -1811,7 +2434,7 @@
           <a:p>
             <a:fld id="{A489F94C-8A6A-45FE-82A9-DD9AF81D1AD4}" type="datetimeFigureOut">
               <a:rPr lang="en-US" smtClean="0"/>
-              <a:t>3/21/2026</a:t>
+              <a:t>9/26/2026</a:t>
             </a:fld>
             <a:endParaRPr lang="en-US"/>
           </a:p>
@@ -2178,7 +2801,7 @@
           <a:p>
             <a:fld id="{A489F94C-8A6A-45FE-82A9-DD9AF81D1AD4}" type="datetimeFigureOut">
               <a:rPr lang="en-US" smtClean="0"/>
-              <a:t>3/21/2026</a:t>
+              <a:t>9/26/2026</a:t>
             </a:fld>
             <a:endParaRPr lang="en-US"/>
           </a:p>
@@ -2296,7 +2919,7 @@
           <a:p>
             <a:fld id="{A489F94C-8A6A-45FE-82A9-DD9AF81D1AD4}" type="datetimeFigureOut">
               <a:rPr lang="en-US" smtClean="0"/>
-              <a:t>3/21/2026</a:t>
+              <a:t>9/26/2026</a:t>
             </a:fld>
             <a:endParaRPr lang="en-US"/>
           </a:p>
@@ -2391,7 +3014,7 @@
           <a:p>
             <a:fld id="{A489F94C-8A6A-45FE-82A9-DD9AF81D1AD4}" type="datetimeFigureOut">
               <a:rPr lang="en-US" smtClean="0"/>
-              <a:t>3/21/2026</a:t>
+              <a:t>9/26/2026</a:t>
             </a:fld>
             <a:endParaRPr lang="en-US"/>
           </a:p>
@@ -2668,7 +3291,7 @@
           <a:p>
             <a:fld id="{A489F94C-8A6A-45FE-82A9-DD9AF81D1AD4}" type="datetimeFigureOut">
               <a:rPr lang="en-US" smtClean="0"/>
-              <a:t>3/21/2026</a:t>
+              <a:t>9/26/2026</a:t>
             </a:fld>
             <a:endParaRPr lang="en-US"/>
           </a:p>
@@ -2925,7 +3548,7 @@
           <a:p>
             <a:fld id="{A489F94C-8A6A-45FE-82A9-DD9AF81D1AD4}" type="datetimeFigureOut">
               <a:rPr lang="en-US" smtClean="0"/>
-              <a:t>3/21/2026</a:t>
+              <a:t>9/26/2026</a:t>
             </a:fld>
             <a:endParaRPr lang="en-US"/>
           </a:p>
@@ -3138,7 +3761,7 @@
           <a:p>
             <a:fld id="{A489F94C-8A6A-45FE-82A9-DD9AF81D1AD4}" type="datetimeFigureOut">
               <a:rPr lang="en-US" smtClean="0"/>
-              <a:t>3/21/2026</a:t>
+              <a:t>9/26/2026</a:t>
             </a:fld>
             <a:endParaRPr lang="en-US"/>
           </a:p>
@@ -3583,7 +4206,7 @@
             </a:br>
             <a:r>
               <a:rPr lang="en-US" dirty="0"/>
-              <a:t>Recurrent Neural Network</a:t>
+              <a:t>Recurrent Neural Networks</a:t>
             </a:r>
           </a:p>
         </p:txBody>
@@ -3602,6 +4225,582 @@
 </file>
 
 <file path=ppt/slides/slide10.xml><?xml version="1.0" encoding="utf-8"?>
+<p:sld xmlns:a="http://schemas.openxmlformats.org/drawingml/2006/main" xmlns:r="http://schemas.openxmlformats.org/officeDocument/2006/relationships" xmlns:p="http://schemas.openxmlformats.org/presentationml/2006/main">
+  <p:cSld>
+    <p:spTree>
+      <p:nvGrpSpPr>
+        <p:cNvPr id="1" name=""/>
+        <p:cNvGrpSpPr/>
+        <p:nvPr/>
+      </p:nvGrpSpPr>
+      <p:grpSpPr>
+        <a:xfrm>
+          <a:off x="0" y="0"/>
+          <a:ext cx="0" cy="0"/>
+          <a:chOff x="0" y="0"/>
+          <a:chExt cx="0" cy="0"/>
+        </a:xfrm>
+      </p:grpSpPr>
+      <p:sp>
+        <p:nvSpPr>
+          <p:cNvPr id="2" name="Title 1">
+            <a:extLst>
+              <a:ext uri="{FF2B5EF4-FFF2-40B4-BE49-F238E27FC236}">
+                <a16:creationId xmlns:a16="http://schemas.microsoft.com/office/drawing/2014/main" id="{12E07596-A587-4579-BE78-4105E81366C4}"/>
+              </a:ext>
+            </a:extLst>
+          </p:cNvPr>
+          <p:cNvSpPr>
+            <a:spLocks noGrp="1"/>
+          </p:cNvSpPr>
+          <p:nvPr>
+            <p:ph type="title"/>
+          </p:nvPr>
+        </p:nvSpPr>
+        <p:spPr/>
+        <p:txBody>
+          <a:bodyPr/>
+          <a:lstStyle/>
+          <a:p>
+            <a:r>
+              <a:rPr lang="en-US" dirty="0"/>
+              <a:t>Compute gradient in RNN</a:t>
+            </a:r>
+            <a:endParaRPr lang="en-SG" dirty="0"/>
+          </a:p>
+        </p:txBody>
+      </p:sp>
+      <p:sp>
+        <p:nvSpPr>
+          <p:cNvPr id="3" name="Content Placeholder 2">
+            <a:extLst>
+              <a:ext uri="{FF2B5EF4-FFF2-40B4-BE49-F238E27FC236}">
+                <a16:creationId xmlns:a16="http://schemas.microsoft.com/office/drawing/2014/main" id="{32B29F24-D127-497D-A2F7-01136AC46F6A}"/>
+              </a:ext>
+            </a:extLst>
+          </p:cNvPr>
+          <p:cNvSpPr>
+            <a:spLocks noGrp="1"/>
+          </p:cNvSpPr>
+          <p:nvPr>
+            <p:ph idx="1"/>
+          </p:nvPr>
+        </p:nvSpPr>
+        <p:spPr/>
+        <p:txBody>
+          <a:bodyPr/>
+          <a:lstStyle/>
+          <a:p>
+            <a:endParaRPr lang="en-SG"/>
+          </a:p>
+        </p:txBody>
+      </p:sp>
+    </p:spTree>
+    <p:extLst>
+      <p:ext uri="{BB962C8B-B14F-4D97-AF65-F5344CB8AC3E}">
+        <p14:creationId xmlns:p14="http://schemas.microsoft.com/office/powerpoint/2010/main" val="1229292703"/>
+      </p:ext>
+    </p:extLst>
+  </p:cSld>
+  <p:clrMapOvr>
+    <a:masterClrMapping/>
+  </p:clrMapOvr>
+</p:sld>
+</file>
+
+<file path=ppt/slides/slide11.xml><?xml version="1.0" encoding="utf-8"?>
+<p:sld xmlns:a="http://schemas.openxmlformats.org/drawingml/2006/main" xmlns:r="http://schemas.openxmlformats.org/officeDocument/2006/relationships" xmlns:p="http://schemas.openxmlformats.org/presentationml/2006/main">
+  <p:cSld>
+    <p:spTree>
+      <p:nvGrpSpPr>
+        <p:cNvPr id="1" name=""/>
+        <p:cNvGrpSpPr/>
+        <p:nvPr/>
+      </p:nvGrpSpPr>
+      <p:grpSpPr>
+        <a:xfrm>
+          <a:off x="0" y="0"/>
+          <a:ext cx="0" cy="0"/>
+          <a:chOff x="0" y="0"/>
+          <a:chExt cx="0" cy="0"/>
+        </a:xfrm>
+      </p:grpSpPr>
+      <p:sp>
+        <p:nvSpPr>
+          <p:cNvPr id="2" name="Title 1">
+            <a:extLst>
+              <a:ext uri="{FF2B5EF4-FFF2-40B4-BE49-F238E27FC236}">
+                <a16:creationId xmlns:a16="http://schemas.microsoft.com/office/drawing/2014/main" id="{EA2C1B18-6EF7-43D4-8119-89388B460CC2}"/>
+              </a:ext>
+            </a:extLst>
+          </p:cNvPr>
+          <p:cNvSpPr>
+            <a:spLocks noGrp="1"/>
+          </p:cNvSpPr>
+          <p:nvPr>
+            <p:ph type="title"/>
+          </p:nvPr>
+        </p:nvSpPr>
+        <p:spPr/>
+        <p:txBody>
+          <a:bodyPr>
+            <a:normAutofit fontScale="90000"/>
+          </a:bodyPr>
+          <a:lstStyle/>
+          <a:p>
+            <a:r>
+              <a:rPr lang="en-US" dirty="0"/>
+              <a:t>Encoder-decoder sequence-to-sequence architecture</a:t>
+            </a:r>
+            <a:endParaRPr lang="en-SG" dirty="0"/>
+          </a:p>
+        </p:txBody>
+      </p:sp>
+      <p:pic>
+        <p:nvPicPr>
+          <p:cNvPr id="4" name="Picture 3">
+            <a:extLst>
+              <a:ext uri="{FF2B5EF4-FFF2-40B4-BE49-F238E27FC236}">
+                <a16:creationId xmlns:a16="http://schemas.microsoft.com/office/drawing/2014/main" id="{1264084C-B0F0-43C3-A6C5-8096672CC8DC}"/>
+              </a:ext>
+            </a:extLst>
+          </p:cNvPr>
+          <p:cNvPicPr>
+            <a:picLocks noChangeAspect="1"/>
+          </p:cNvPicPr>
+          <p:nvPr/>
+        </p:nvPicPr>
+        <p:blipFill>
+          <a:blip r:embed="rId2"/>
+          <a:stretch>
+            <a:fillRect/>
+          </a:stretch>
+        </p:blipFill>
+        <p:spPr>
+          <a:xfrm>
+            <a:off x="994441" y="2031011"/>
+            <a:ext cx="4034760" cy="4461863"/>
+          </a:xfrm>
+          <a:prstGeom prst="rect">
+            <a:avLst/>
+          </a:prstGeom>
+        </p:spPr>
+      </p:pic>
+      <mc:AlternateContent xmlns:mc="http://schemas.openxmlformats.org/markup-compatibility/2006" xmlns:a14="http://schemas.microsoft.com/office/drawing/2010/main">
+        <mc:Choice Requires="a14">
+          <p:sp>
+            <p:nvSpPr>
+              <p:cNvPr id="5" name="TextBox 4">
+                <a:extLst>
+                  <a:ext uri="{FF2B5EF4-FFF2-40B4-BE49-F238E27FC236}">
+                    <a16:creationId xmlns:a16="http://schemas.microsoft.com/office/drawing/2014/main" id="{8FE3A315-B45E-48BF-B009-A934AF3EE65D}"/>
+                  </a:ext>
+                </a:extLst>
+              </p:cNvPr>
+              <p:cNvSpPr txBox="1"/>
+              <p:nvPr/>
+            </p:nvSpPr>
+            <p:spPr>
+              <a:xfrm>
+                <a:off x="5839097" y="2893423"/>
+                <a:ext cx="2181497" cy="2633606"/>
+              </a:xfrm>
+              <a:prstGeom prst="rect">
+                <a:avLst/>
+              </a:prstGeom>
+              <a:noFill/>
+            </p:spPr>
+            <p:txBody>
+              <a:bodyPr wrap="square" rtlCol="0">
+                <a:spAutoFit/>
+              </a:bodyPr>
+              <a:lstStyle/>
+              <a:p>
+                <a:r>
+                  <a:rPr lang="en-US" dirty="0"/>
+                  <a:t>Figure 10.12 on page 386 in Goodfellow.   This architecture generates the conditional probability </a:t>
+                </a:r>
+                <a14:m>
+                  <m:oMath xmlns:m="http://schemas.openxmlformats.org/officeDocument/2006/math">
+                    <m:r>
+                      <a:rPr lang="en-US" b="0" i="1" smtClean="0">
+                        <a:latin typeface="Cambria Math" panose="02040503050406030204" pitchFamily="18" charset="0"/>
+                      </a:rPr>
+                      <m:t>𝑃</m:t>
+                    </m:r>
+                    <m:r>
+                      <a:rPr lang="en-US" b="0" i="1" smtClean="0">
+                        <a:latin typeface="Cambria Math" panose="02040503050406030204" pitchFamily="18" charset="0"/>
+                      </a:rPr>
+                      <m:t>(</m:t>
+                    </m:r>
+                    <m:sSup>
+                      <m:sSupPr>
+                        <m:ctrlPr>
+                          <a:rPr lang="en-US" b="0" i="1" smtClean="0">
+                            <a:latin typeface="Cambria Math" panose="02040503050406030204" pitchFamily="18" charset="0"/>
+                          </a:rPr>
+                        </m:ctrlPr>
+                      </m:sSupPr>
+                      <m:e>
+                        <m:r>
+                          <a:rPr lang="en-US" b="0" i="1" smtClean="0">
+                            <a:latin typeface="Cambria Math" panose="02040503050406030204" pitchFamily="18" charset="0"/>
+                          </a:rPr>
+                          <m:t>𝑦</m:t>
+                        </m:r>
+                      </m:e>
+                      <m:sup>
+                        <m:d>
+                          <m:dPr>
+                            <m:ctrlPr>
+                              <a:rPr lang="en-US" b="0" i="1" smtClean="0">
+                                <a:latin typeface="Cambria Math" panose="02040503050406030204" pitchFamily="18" charset="0"/>
+                              </a:rPr>
+                            </m:ctrlPr>
+                          </m:dPr>
+                          <m:e>
+                            <m:r>
+                              <a:rPr lang="en-US" b="0" i="1" smtClean="0">
+                                <a:latin typeface="Cambria Math" panose="02040503050406030204" pitchFamily="18" charset="0"/>
+                              </a:rPr>
+                              <m:t>1</m:t>
+                            </m:r>
+                          </m:e>
+                        </m:d>
+                      </m:sup>
+                    </m:sSup>
+                    <m:r>
+                      <a:rPr lang="en-US" b="0" i="1" smtClean="0">
+                        <a:latin typeface="Cambria Math" panose="02040503050406030204" pitchFamily="18" charset="0"/>
+                      </a:rPr>
+                      <m:t>,</m:t>
+                    </m:r>
+                    <m:sSup>
+                      <m:sSupPr>
+                        <m:ctrlPr>
+                          <a:rPr lang="en-US" b="0" i="1" smtClean="0">
+                            <a:latin typeface="Cambria Math" panose="02040503050406030204" pitchFamily="18" charset="0"/>
+                          </a:rPr>
+                        </m:ctrlPr>
+                      </m:sSupPr>
+                      <m:e>
+                        <m:r>
+                          <a:rPr lang="en-US" b="0" i="1" smtClean="0">
+                            <a:latin typeface="Cambria Math" panose="02040503050406030204" pitchFamily="18" charset="0"/>
+                          </a:rPr>
+                          <m:t>𝑦</m:t>
+                        </m:r>
+                      </m:e>
+                      <m:sup>
+                        <m:d>
+                          <m:dPr>
+                            <m:ctrlPr>
+                              <a:rPr lang="en-US" b="0" i="1" smtClean="0">
+                                <a:latin typeface="Cambria Math" panose="02040503050406030204" pitchFamily="18" charset="0"/>
+                              </a:rPr>
+                            </m:ctrlPr>
+                          </m:dPr>
+                          <m:e>
+                            <m:r>
+                              <a:rPr lang="en-US" b="0" i="1" smtClean="0">
+                                <a:latin typeface="Cambria Math" panose="02040503050406030204" pitchFamily="18" charset="0"/>
+                              </a:rPr>
+                              <m:t>2</m:t>
+                            </m:r>
+                          </m:e>
+                        </m:d>
+                      </m:sup>
+                    </m:sSup>
+                    <m:r>
+                      <a:rPr lang="en-US" b="0" i="1" smtClean="0">
+                        <a:latin typeface="Cambria Math" panose="02040503050406030204" pitchFamily="18" charset="0"/>
+                      </a:rPr>
+                      <m:t>,⋯,</m:t>
+                    </m:r>
+                    <m:sSup>
+                      <m:sSupPr>
+                        <m:ctrlPr>
+                          <a:rPr lang="en-US" b="0" i="1" smtClean="0">
+                            <a:latin typeface="Cambria Math" panose="02040503050406030204" pitchFamily="18" charset="0"/>
+                          </a:rPr>
+                        </m:ctrlPr>
+                      </m:sSupPr>
+                      <m:e>
+                        <m:r>
+                          <a:rPr lang="en-US" b="0" i="1" smtClean="0">
+                            <a:latin typeface="Cambria Math" panose="02040503050406030204" pitchFamily="18" charset="0"/>
+                          </a:rPr>
+                          <m:t>𝑦</m:t>
+                        </m:r>
+                      </m:e>
+                      <m:sup>
+                        <m:d>
+                          <m:dPr>
+                            <m:ctrlPr>
+                              <a:rPr lang="en-US" b="0" i="1" smtClean="0">
+                                <a:latin typeface="Cambria Math" panose="02040503050406030204" pitchFamily="18" charset="0"/>
+                              </a:rPr>
+                            </m:ctrlPr>
+                          </m:dPr>
+                          <m:e>
+                            <m:sSub>
+                              <m:sSubPr>
+                                <m:ctrlPr>
+                                  <a:rPr lang="en-US" b="0" i="1" smtClean="0">
+                                    <a:latin typeface="Cambria Math" panose="02040503050406030204" pitchFamily="18" charset="0"/>
+                                  </a:rPr>
+                                </m:ctrlPr>
+                              </m:sSubPr>
+                              <m:e>
+                                <m:r>
+                                  <a:rPr lang="en-US" b="0" i="1" smtClean="0">
+                                    <a:latin typeface="Cambria Math" panose="02040503050406030204" pitchFamily="18" charset="0"/>
+                                  </a:rPr>
+                                  <m:t>𝑛</m:t>
+                                </m:r>
+                              </m:e>
+                              <m:sub>
+                                <m:r>
+                                  <a:rPr lang="en-US" b="0" i="1" smtClean="0">
+                                    <a:latin typeface="Cambria Math" panose="02040503050406030204" pitchFamily="18" charset="0"/>
+                                  </a:rPr>
+                                  <m:t>𝑦</m:t>
+                                </m:r>
+                              </m:sub>
+                            </m:sSub>
+                          </m:e>
+                        </m:d>
+                      </m:sup>
+                    </m:sSup>
+                    <m:r>
+                      <a:rPr lang="en-US" b="0" i="1" smtClean="0">
+                        <a:latin typeface="Cambria Math" panose="02040503050406030204" pitchFamily="18" charset="0"/>
+                      </a:rPr>
+                      <m:t> |</m:t>
+                    </m:r>
+                  </m:oMath>
+                </a14:m>
+                <a:endParaRPr lang="en-US" b="0" dirty="0"/>
+              </a:p>
+              <a:p>
+                <a:pPr/>
+                <a14:m>
+                  <m:oMathPara xmlns:m="http://schemas.openxmlformats.org/officeDocument/2006/math">
+                    <m:oMath>
+                      <m:sSup>
+                        <m:sSupPr>
+                          <m:ctrlPr>
+                            <a:rPr lang="en-US" b="0" i="1" smtClean="0">
+                              <a:latin typeface="Cambria Math" panose="02040503050406030204" pitchFamily="18" charset="0"/>
+                            </a:rPr>
+                          </m:ctrlPr>
+                        </m:sSupPr>
+                        <m:e>
+                          <m:r>
+                            <a:rPr lang="en-US" b="0" i="1" smtClean="0">
+                              <a:latin typeface="Cambria Math" panose="02040503050406030204" pitchFamily="18" charset="0"/>
+                            </a:rPr>
+                            <m:t>𝑥</m:t>
+                          </m:r>
+                        </m:e>
+                        <m:sup>
+                          <m:d>
+                            <m:dPr>
+                              <m:ctrlPr>
+                                <a:rPr lang="en-US" b="0" i="1" smtClean="0">
+                                  <a:latin typeface="Cambria Math" panose="02040503050406030204" pitchFamily="18" charset="0"/>
+                                </a:rPr>
+                              </m:ctrlPr>
+                            </m:dPr>
+                            <m:e>
+                              <m:r>
+                                <a:rPr lang="en-US" b="0" i="1" smtClean="0">
+                                  <a:latin typeface="Cambria Math" panose="02040503050406030204" pitchFamily="18" charset="0"/>
+                                </a:rPr>
+                                <m:t>1</m:t>
+                              </m:r>
+                            </m:e>
+                          </m:d>
+                        </m:sup>
+                      </m:sSup>
+                      <m:r>
+                        <a:rPr lang="en-US" b="0" i="1" smtClean="0">
+                          <a:latin typeface="Cambria Math" panose="02040503050406030204" pitchFamily="18" charset="0"/>
+                        </a:rPr>
+                        <m:t>,</m:t>
+                      </m:r>
+                      <m:sSup>
+                        <m:sSupPr>
+                          <m:ctrlPr>
+                            <a:rPr lang="en-US" b="0" i="1" smtClean="0">
+                              <a:latin typeface="Cambria Math" panose="02040503050406030204" pitchFamily="18" charset="0"/>
+                            </a:rPr>
+                          </m:ctrlPr>
+                        </m:sSupPr>
+                        <m:e>
+                          <m:r>
+                            <a:rPr lang="en-US" b="0" i="1" smtClean="0">
+                              <a:latin typeface="Cambria Math" panose="02040503050406030204" pitchFamily="18" charset="0"/>
+                            </a:rPr>
+                            <m:t>𝑥</m:t>
+                          </m:r>
+                        </m:e>
+                        <m:sup>
+                          <m:r>
+                            <a:rPr lang="en-US" b="0" i="1" smtClean="0">
+                              <a:latin typeface="Cambria Math" panose="02040503050406030204" pitchFamily="18" charset="0"/>
+                            </a:rPr>
+                            <m:t>(2)</m:t>
+                          </m:r>
+                        </m:sup>
+                      </m:sSup>
+                      <m:r>
+                        <a:rPr lang="en-US" b="0" i="1" smtClean="0">
+                          <a:latin typeface="Cambria Math" panose="02040503050406030204" pitchFamily="18" charset="0"/>
+                        </a:rPr>
+                        <m:t>,</m:t>
+                      </m:r>
+                      <m:r>
+                        <a:rPr lang="en-US" b="0" i="1" smtClean="0">
+                          <a:latin typeface="Cambria Math" panose="02040503050406030204" pitchFamily="18" charset="0"/>
+                        </a:rPr>
+                        <m:t>𝑐</m:t>
+                      </m:r>
+                      <m:r>
+                        <a:rPr lang="en-US" b="0" i="1" smtClean="0">
+                          <a:latin typeface="Cambria Math" panose="02040503050406030204" pitchFamily="18" charset="0"/>
+                        </a:rPr>
+                        <m:t>…, </m:t>
+                      </m:r>
+                      <m:sSup>
+                        <m:sSupPr>
+                          <m:ctrlPr>
+                            <a:rPr lang="en-US" b="0" i="1" smtClean="0">
+                              <a:latin typeface="Cambria Math" panose="02040503050406030204" pitchFamily="18" charset="0"/>
+                            </a:rPr>
+                          </m:ctrlPr>
+                        </m:sSupPr>
+                        <m:e>
+                          <m:r>
+                            <a:rPr lang="en-US" b="0" i="1" smtClean="0">
+                              <a:latin typeface="Cambria Math" panose="02040503050406030204" pitchFamily="18" charset="0"/>
+                            </a:rPr>
+                            <m:t>𝑥</m:t>
+                          </m:r>
+                        </m:e>
+                        <m:sup>
+                          <m:d>
+                            <m:dPr>
+                              <m:ctrlPr>
+                                <a:rPr lang="en-US" b="0" i="1" smtClean="0">
+                                  <a:latin typeface="Cambria Math" panose="02040503050406030204" pitchFamily="18" charset="0"/>
+                                </a:rPr>
+                              </m:ctrlPr>
+                            </m:dPr>
+                            <m:e>
+                              <m:sSub>
+                                <m:sSubPr>
+                                  <m:ctrlPr>
+                                    <a:rPr lang="en-US" b="0" i="1" smtClean="0">
+                                      <a:latin typeface="Cambria Math" panose="02040503050406030204" pitchFamily="18" charset="0"/>
+                                    </a:rPr>
+                                  </m:ctrlPr>
+                                </m:sSubPr>
+                                <m:e>
+                                  <m:r>
+                                    <a:rPr lang="en-US" b="0" i="1" smtClean="0">
+                                      <a:latin typeface="Cambria Math" panose="02040503050406030204" pitchFamily="18" charset="0"/>
+                                    </a:rPr>
+                                    <m:t>𝑛</m:t>
+                                  </m:r>
+                                </m:e>
+                                <m:sub>
+                                  <m:r>
+                                    <a:rPr lang="en-US" b="0" i="1" smtClean="0">
+                                      <a:latin typeface="Cambria Math" panose="02040503050406030204" pitchFamily="18" charset="0"/>
+                                    </a:rPr>
+                                    <m:t>𝑥</m:t>
+                                  </m:r>
+                                </m:sub>
+                              </m:sSub>
+                            </m:e>
+                          </m:d>
+                        </m:sup>
+                      </m:sSup>
+                      <m:r>
+                        <a:rPr lang="en-US" b="0" i="1" smtClean="0">
+                          <a:latin typeface="Cambria Math" panose="02040503050406030204" pitchFamily="18" charset="0"/>
+                        </a:rPr>
+                        <m:t>)</m:t>
+                      </m:r>
+                    </m:oMath>
+                  </m:oMathPara>
+                </a14:m>
+                <a:endParaRPr lang="en-US" b="0" dirty="0"/>
+              </a:p>
+            </p:txBody>
+          </p:sp>
+        </mc:Choice>
+        <mc:Fallback xmlns="">
+          <p:sp>
+            <p:nvSpPr>
+              <p:cNvPr id="5" name="TextBox 4">
+                <a:extLst>
+                  <a:ext uri="{FF2B5EF4-FFF2-40B4-BE49-F238E27FC236}">
+                    <a16:creationId xmlns:a16="http://schemas.microsoft.com/office/drawing/2014/main" id="{8FE3A315-B45E-48BF-B009-A934AF3EE65D}"/>
+                  </a:ext>
+                </a:extLst>
+              </p:cNvPr>
+              <p:cNvSpPr txBox="1">
+                <a:spLocks noRot="1" noChangeAspect="1" noMove="1" noResize="1" noEditPoints="1" noAdjustHandles="1" noChangeArrowheads="1" noChangeShapeType="1" noTextEdit="1"/>
+              </p:cNvSpPr>
+              <p:nvPr/>
+            </p:nvSpPr>
+            <p:spPr>
+              <a:xfrm>
+                <a:off x="5839097" y="2893423"/>
+                <a:ext cx="2181497" cy="2633606"/>
+              </a:xfrm>
+              <a:prstGeom prst="rect">
+                <a:avLst/>
+              </a:prstGeom>
+              <a:blipFill>
+                <a:blip r:embed="rId3"/>
+                <a:stretch>
+                  <a:fillRect l="-2514" t="-1389" r="-7263" b="-2083"/>
+                </a:stretch>
+              </a:blipFill>
+            </p:spPr>
+            <p:txBody>
+              <a:bodyPr/>
+              <a:lstStyle/>
+              <a:p>
+                <a:r>
+                  <a:rPr lang="en-SG">
+                    <a:noFill/>
+                  </a:rPr>
+                  <a:t> </a:t>
+                </a:r>
+              </a:p>
+            </p:txBody>
+          </p:sp>
+        </mc:Fallback>
+      </mc:AlternateContent>
+    </p:spTree>
+    <p:extLst>
+      <p:ext uri="{BB962C8B-B14F-4D97-AF65-F5344CB8AC3E}">
+        <p14:creationId xmlns:p14="http://schemas.microsoft.com/office/powerpoint/2010/main" val="1875225173"/>
+      </p:ext>
+    </p:extLst>
+  </p:cSld>
+  <p:clrMapOvr>
+    <a:masterClrMapping/>
+  </p:clrMapOvr>
+</p:sld>
+</file>
+
+<file path=ppt/slides/slide12.xml><?xml version="1.0" encoding="utf-8"?>
 <p:sld xmlns:a="http://schemas.openxmlformats.org/drawingml/2006/main" xmlns:r="http://schemas.openxmlformats.org/officeDocument/2006/relationships" xmlns:p="http://schemas.openxmlformats.org/presentationml/2006/main">
   <p:cSld>
     <p:spTree>
@@ -3709,7 +4908,7 @@
               <a:p>
                 <a:r>
                   <a:rPr lang="en-US" dirty="0"/>
-                  <a:t>The neural network </a:t>
+                  <a:t>The network parameters </a:t>
                 </a:r>
                 <a14:m>
                   <m:oMath xmlns:m="http://schemas.openxmlformats.org/officeDocument/2006/math">
@@ -3723,7 +4922,7 @@
                 </a14:m>
                 <a:r>
                   <a:rPr lang="en-US" dirty="0"/>
-                  <a:t> is shared between different time steps.</a:t>
+                  <a:t> are shared across time steps.</a:t>
                 </a:r>
                 <a:endParaRPr lang="en-SG" dirty="0"/>
               </a:p>
@@ -3824,7 +5023,7 @@
 </p:sld>
 </file>
 
-<file path=ppt/slides/slide11.xml><?xml version="1.0" encoding="utf-8"?>
+<file path=ppt/slides/slide13.xml><?xml version="1.0" encoding="utf-8"?>
 <p:sld xmlns:a="http://schemas.openxmlformats.org/drawingml/2006/main" xmlns:r="http://schemas.openxmlformats.org/officeDocument/2006/relationships" xmlns:p="http://schemas.openxmlformats.org/presentationml/2006/main">
   <p:cSld>
     <p:spTree>
@@ -3864,7 +5063,7 @@
           <a:p>
             <a:r>
               <a:rPr lang="en-US" dirty="0"/>
-              <a:t>Vanishing or diverging gradient problem in RNN</a:t>
+              <a:t>Vanishing or exploding gradients in RNNs</a:t>
             </a:r>
             <a:endParaRPr lang="en-SG" dirty="0"/>
           </a:p>
@@ -3897,7 +5096,7 @@
               <a:p>
                 <a:r>
                   <a:rPr lang="en-US" dirty="0"/>
-                  <a:t>Ignore the input and consider only the evolution of hidden state and nonlinearity</a:t>
+                  <a:t>Ignoring the input and nonlinearity, consider only the hidden states</a:t>
                 </a:r>
               </a:p>
               <a:p>
@@ -3906,10 +5105,7 @@
                 </a:pPr>
                 <a14:m>
                   <m:oMathPara xmlns:m="http://schemas.openxmlformats.org/officeDocument/2006/math">
-                    <m:oMathParaPr>
-                      <m:jc m:val="centerGroup"/>
-                    </m:oMathParaPr>
-                    <m:oMath xmlns:m="http://schemas.openxmlformats.org/officeDocument/2006/math">
+                    <m:oMath>
                       <m:sSup>
                         <m:sSupPr>
                           <m:ctrlPr>
@@ -3923,7 +5119,7 @@
                             <a:rPr lang="en-US" b="0" i="1" smtClean="0">
                               <a:latin typeface="Cambria Math" panose="02040503050406030204" pitchFamily="18" charset="0"/>
                             </a:rPr>
-                            <m:t>h</m:t>
+                            <m:t>ℎ</m:t>
                           </m:r>
                         </m:e>
                         <m:sup>
@@ -3991,7 +5187,7 @@
                             <a:rPr lang="en-US" b="0" i="1" smtClean="0">
                               <a:latin typeface="Cambria Math" panose="02040503050406030204" pitchFamily="18" charset="0"/>
                             </a:rPr>
-                            <m:t>h</m:t>
+                            <m:t>ℎ</m:t>
                           </m:r>
                         </m:e>
                         <m:sup>
@@ -4023,7 +5219,7 @@
               <a:p>
                 <a:r>
                   <a:rPr lang="en-US" dirty="0"/>
-                  <a:t>Iterate we get </a:t>
+                  <a:t>Iterate, we get </a:t>
                 </a:r>
               </a:p>
               <a:p>
@@ -4032,10 +5228,7 @@
                 </a:pPr>
                 <a14:m>
                   <m:oMathPara xmlns:m="http://schemas.openxmlformats.org/officeDocument/2006/math">
-                    <m:oMathParaPr>
-                      <m:jc m:val="centerGroup"/>
-                    </m:oMathParaPr>
-                    <m:oMath xmlns:m="http://schemas.openxmlformats.org/officeDocument/2006/math">
+                    <m:oMath>
                       <m:sSup>
                         <m:sSupPr>
                           <m:ctrlPr>
@@ -4049,7 +5242,7 @@
                             <a:rPr lang="en-US" b="0" i="1" smtClean="0">
                               <a:latin typeface="Cambria Math" panose="02040503050406030204" pitchFamily="18" charset="0"/>
                             </a:rPr>
-                            <m:t>h</m:t>
+                            <m:t>ℎ</m:t>
                           </m:r>
                         </m:e>
                         <m:sup>
@@ -4147,7 +5340,7 @@
                             <a:rPr lang="en-US" b="0" i="1" smtClean="0">
                               <a:latin typeface="Cambria Math" panose="02040503050406030204" pitchFamily="18" charset="0"/>
                             </a:rPr>
-                            <m:t>h</m:t>
+                            <m:t>ℎ</m:t>
                           </m:r>
                         </m:e>
                         <m:sup>
@@ -4167,7 +5360,7 @@
               <a:p>
                 <a:r>
                   <a:rPr lang="en-US" dirty="0"/>
-                  <a:t>Using eigen spectrum decomposition</a:t>
+                  <a:t>Using spectral decomposition</a:t>
                 </a:r>
               </a:p>
               <a:p>
@@ -4292,10 +5485,7 @@
                 </a:pPr>
                 <a14:m>
                   <m:oMathPara xmlns:m="http://schemas.openxmlformats.org/officeDocument/2006/math">
-                    <m:oMathParaPr>
-                      <m:jc m:val="centerGroup"/>
-                    </m:oMathParaPr>
-                    <m:oMath xmlns:m="http://schemas.openxmlformats.org/officeDocument/2006/math">
+                    <m:oMath>
                       <m:sSup>
                         <m:sSupPr>
                           <m:ctrlPr>
@@ -4309,7 +5499,7 @@
                             <a:rPr lang="en-US" b="0" i="1" smtClean="0">
                               <a:latin typeface="Cambria Math" panose="02040503050406030204" pitchFamily="18" charset="0"/>
                             </a:rPr>
-                            <m:t>h</m:t>
+                            <m:t>ℎ</m:t>
                           </m:r>
                         </m:e>
                         <m:sup>
@@ -4367,7 +5557,7 @@
                       <m:sSup>
                         <m:sSupPr>
                           <m:ctrlPr>
-                            <a:rPr lang="en-US" b="0" i="1" smtClean="0">
+                            <a:rPr lang="en-US" b="0" i="0" smtClean="0">
                               <a:latin typeface="Cambria Math" panose="02040503050406030204" pitchFamily="18" charset="0"/>
                             </a:rPr>
                           </m:ctrlPr>
@@ -4398,6 +5588,12 @@
                         </a:rPr>
                         <m:t>𝑄</m:t>
                       </m:r>
+                      <m:r>
+                        <a:rPr lang="en-US" b="0" i="1" smtClean="0">
+                          <a:latin typeface="Cambria Math" panose="02040503050406030204" pitchFamily="18" charset="0"/>
+                        </a:rPr>
+                        <m:t> </m:t>
+                      </m:r>
                       <m:sSup>
                         <m:sSupPr>
                           <m:ctrlPr>
@@ -4411,7 +5607,7 @@
                             <a:rPr lang="en-US" b="0" i="1" smtClean="0">
                               <a:latin typeface="Cambria Math" panose="02040503050406030204" pitchFamily="18" charset="0"/>
                             </a:rPr>
-                            <m:t>h</m:t>
+                            <m:t>ℎ</m:t>
                           </m:r>
                         </m:e>
                         <m:sup>
@@ -4450,9 +5646,502 @@
             </p:nvSpPr>
             <p:spPr>
               <a:blipFill>
-                <a:blip r:embed="rId2"/>
+                <a:blip r:embed="rId3"/>
                 <a:stretch>
-                  <a:fillRect l="-1391" t="-2381" r="-1314"/>
+                  <a:fillRect l="-1391" t="-2381"/>
+                </a:stretch>
+              </a:blipFill>
+            </p:spPr>
+            <p:txBody>
+              <a:bodyPr/>
+              <a:lstStyle/>
+              <a:p>
+                <a:r>
+                  <a:rPr lang="en-SG">
+                    <a:noFill/>
+                  </a:rPr>
+                  <a:t> </a:t>
+                </a:r>
+              </a:p>
+            </p:txBody>
+          </p:sp>
+        </mc:Fallback>
+      </mc:AlternateContent>
+      <mc:AlternateContent xmlns:mc="http://schemas.openxmlformats.org/markup-compatibility/2006" xmlns:a14="http://schemas.microsoft.com/office/drawing/2010/main">
+        <mc:Choice Requires="a14">
+          <p:sp>
+            <p:nvSpPr>
+              <p:cNvPr id="4" name="TextBox 3">
+                <a:extLst>
+                  <a:ext uri="{FF2B5EF4-FFF2-40B4-BE49-F238E27FC236}">
+                    <a16:creationId xmlns:a16="http://schemas.microsoft.com/office/drawing/2014/main" id="{2BDA37CE-1E60-6903-CF77-C689113EEDC4}"/>
+                  </a:ext>
+                </a:extLst>
+              </p:cNvPr>
+              <p:cNvSpPr txBox="1"/>
+              <p:nvPr/>
+            </p:nvSpPr>
+            <p:spPr>
+              <a:xfrm>
+                <a:off x="6809362" y="5282287"/>
+                <a:ext cx="1809344" cy="1423403"/>
+              </a:xfrm>
+              <a:prstGeom prst="rect">
+                <a:avLst/>
+              </a:prstGeom>
+              <a:noFill/>
+            </p:spPr>
+            <p:txBody>
+              <a:bodyPr wrap="square" rtlCol="0">
+                <a:spAutoFit/>
+              </a:bodyPr>
+              <a:lstStyle/>
+              <a:p>
+                <a:pPr/>
+                <a14:m>
+                  <m:oMathPara xmlns:m="http://schemas.openxmlformats.org/officeDocument/2006/math">
+                    <m:oMath>
+                      <m:r>
+                        <m:rPr>
+                          <m:sty m:val="p"/>
+                        </m:rPr>
+                        <a:rPr lang="en-US" sz="1400" b="0" i="0" smtClean="0">
+                          <a:latin typeface="Cambria Math" panose="02040503050406030204" pitchFamily="18" charset="0"/>
+                        </a:rPr>
+                        <m:t>Λ</m:t>
+                      </m:r>
+                      <m:r>
+                        <a:rPr lang="en-US" sz="1400" b="0" i="1" smtClean="0">
+                          <a:latin typeface="Cambria Math" panose="02040503050406030204" pitchFamily="18" charset="0"/>
+                        </a:rPr>
+                        <m:t>=</m:t>
+                      </m:r>
+                      <m:d>
+                        <m:dPr>
+                          <m:begChr m:val="["/>
+                          <m:endChr m:val="]"/>
+                          <m:ctrlPr>
+                            <a:rPr lang="en-SG" sz="1400" b="0" i="1" smtClean="0">
+                              <a:latin typeface="Cambria Math" panose="02040503050406030204" pitchFamily="18" charset="0"/>
+                            </a:rPr>
+                          </m:ctrlPr>
+                        </m:dPr>
+                        <m:e>
+                          <m:m>
+                            <m:mPr>
+                              <m:mcs>
+                                <m:mc>
+                                  <m:mcPr>
+                                    <m:count m:val="3"/>
+                                    <m:mcJc m:val="center"/>
+                                  </m:mcPr>
+                                </m:mc>
+                              </m:mcs>
+                              <m:ctrlPr>
+                                <a:rPr lang="en-SG" sz="1400" b="0" i="1" smtClean="0">
+                                  <a:latin typeface="Cambria Math" panose="02040503050406030204" pitchFamily="18" charset="0"/>
+                                </a:rPr>
+                              </m:ctrlPr>
+                            </m:mPr>
+                            <m:mr>
+                              <m:e>
+                                <m:sSub>
+                                  <m:sSubPr>
+                                    <m:ctrlPr>
+                                      <a:rPr lang="en-US" sz="1400" b="0" i="1" smtClean="0">
+                                        <a:latin typeface="Cambria Math" panose="02040503050406030204" pitchFamily="18" charset="0"/>
+                                      </a:rPr>
+                                    </m:ctrlPr>
+                                  </m:sSubPr>
+                                  <m:e>
+                                    <m:r>
+                                      <a:rPr lang="en-US" sz="1400" b="0" i="1" smtClean="0">
+                                        <a:latin typeface="Cambria Math" panose="02040503050406030204" pitchFamily="18" charset="0"/>
+                                      </a:rPr>
+                                      <m:t>𝜆</m:t>
+                                    </m:r>
+                                  </m:e>
+                                  <m:sub>
+                                    <m:r>
+                                      <a:rPr lang="en-US" sz="1400" b="0" i="1" smtClean="0">
+                                        <a:latin typeface="Cambria Math" panose="02040503050406030204" pitchFamily="18" charset="0"/>
+                                      </a:rPr>
+                                      <m:t>1</m:t>
+                                    </m:r>
+                                  </m:sub>
+                                </m:sSub>
+                              </m:e>
+                              <m:e>
+                                <m:r>
+                                  <a:rPr lang="en-US" sz="1400" b="0" i="1" smtClean="0">
+                                    <a:latin typeface="Cambria Math" panose="02040503050406030204" pitchFamily="18" charset="0"/>
+                                  </a:rPr>
+                                  <m:t>0</m:t>
+                                </m:r>
+                              </m:e>
+                              <m:e>
+                                <m:r>
+                                  <a:rPr lang="en-US" sz="1400" b="0" i="1" smtClean="0">
+                                    <a:latin typeface="Cambria Math" panose="02040503050406030204" pitchFamily="18" charset="0"/>
+                                  </a:rPr>
+                                  <m:t>⋯</m:t>
+                                </m:r>
+                              </m:e>
+                            </m:mr>
+                            <m:mr>
+                              <m:e>
+                                <m:r>
+                                  <a:rPr lang="en-US" sz="1400" b="0" i="1" smtClean="0">
+                                    <a:latin typeface="Cambria Math" panose="02040503050406030204" pitchFamily="18" charset="0"/>
+                                  </a:rPr>
+                                  <m:t>0</m:t>
+                                </m:r>
+                              </m:e>
+                              <m:e>
+                                <m:sSub>
+                                  <m:sSubPr>
+                                    <m:ctrlPr>
+                                      <a:rPr lang="en-US" sz="1400" b="0" i="1" smtClean="0">
+                                        <a:latin typeface="Cambria Math" panose="02040503050406030204" pitchFamily="18" charset="0"/>
+                                      </a:rPr>
+                                    </m:ctrlPr>
+                                  </m:sSubPr>
+                                  <m:e>
+                                    <m:r>
+                                      <a:rPr lang="en-US" sz="1400" b="0" i="1" smtClean="0">
+                                        <a:latin typeface="Cambria Math" panose="02040503050406030204" pitchFamily="18" charset="0"/>
+                                      </a:rPr>
+                                      <m:t>𝜆</m:t>
+                                    </m:r>
+                                  </m:e>
+                                  <m:sub>
+                                    <m:r>
+                                      <a:rPr lang="en-US" sz="1400" b="0" i="1" smtClean="0">
+                                        <a:latin typeface="Cambria Math" panose="02040503050406030204" pitchFamily="18" charset="0"/>
+                                      </a:rPr>
+                                      <m:t>2</m:t>
+                                    </m:r>
+                                  </m:sub>
+                                </m:sSub>
+                              </m:e>
+                              <m:e>
+                                <m:r>
+                                  <a:rPr lang="en-US" sz="1400" b="0" i="1" smtClean="0">
+                                    <a:latin typeface="Cambria Math" panose="02040503050406030204" pitchFamily="18" charset="0"/>
+                                  </a:rPr>
+                                  <m:t>0</m:t>
+                                </m:r>
+                              </m:e>
+                            </m:mr>
+                            <m:mr>
+                              <m:e>
+                                <m:r>
+                                  <a:rPr lang="en-US" sz="1400" b="0" i="1" smtClean="0">
+                                    <a:latin typeface="Cambria Math" panose="02040503050406030204" pitchFamily="18" charset="0"/>
+                                  </a:rPr>
+                                  <m:t>⋮</m:t>
+                                </m:r>
+                              </m:e>
+                              <m:e/>
+                              <m:e>
+                                <m:r>
+                                  <a:rPr lang="en-US" sz="1400" b="0" i="1" smtClean="0">
+                                    <a:latin typeface="Cambria Math" panose="02040503050406030204" pitchFamily="18" charset="0"/>
+                                  </a:rPr>
+                                  <m:t>⋱</m:t>
+                                </m:r>
+                              </m:e>
+                            </m:mr>
+                          </m:m>
+                        </m:e>
+                      </m:d>
+                    </m:oMath>
+                  </m:oMathPara>
+                </a14:m>
+                <a:endParaRPr lang="en-SG" sz="1400" dirty="0"/>
+              </a:p>
+              <a:p>
+                <a:endParaRPr lang="en-SG" sz="1400" dirty="0"/>
+              </a:p>
+              <a:p>
+                <a14:m>
+                  <m:oMath xmlns:m="http://schemas.openxmlformats.org/officeDocument/2006/math">
+                    <m:sSup>
+                      <m:sSupPr>
+                        <m:ctrlPr>
+                          <a:rPr lang="en-US" sz="1400" b="0" i="1" smtClean="0">
+                            <a:latin typeface="Cambria Math" panose="02040503050406030204" pitchFamily="18" charset="0"/>
+                          </a:rPr>
+                        </m:ctrlPr>
+                      </m:sSupPr>
+                      <m:e>
+                        <m:d>
+                          <m:dPr>
+                            <m:ctrlPr>
+                              <a:rPr lang="en-US" sz="1400" b="0" i="1" smtClean="0">
+                                <a:latin typeface="Cambria Math" panose="02040503050406030204" pitchFamily="18" charset="0"/>
+                              </a:rPr>
+                            </m:ctrlPr>
+                          </m:dPr>
+                          <m:e>
+                            <m:sSub>
+                              <m:sSubPr>
+                                <m:ctrlPr>
+                                  <a:rPr lang="en-US" sz="1400" b="0" i="1" smtClean="0">
+                                    <a:latin typeface="Cambria Math" panose="02040503050406030204" pitchFamily="18" charset="0"/>
+                                  </a:rPr>
+                                </m:ctrlPr>
+                              </m:sSubPr>
+                              <m:e>
+                                <m:r>
+                                  <a:rPr lang="en-US" sz="1400" b="0" i="1" smtClean="0">
+                                    <a:latin typeface="Cambria Math" panose="02040503050406030204" pitchFamily="18" charset="0"/>
+                                  </a:rPr>
+                                  <m:t>𝜆</m:t>
+                                </m:r>
+                              </m:e>
+                              <m:sub>
+                                <m:r>
+                                  <a:rPr lang="en-US" sz="1400" b="0" i="1" smtClean="0">
+                                    <a:latin typeface="Cambria Math" panose="02040503050406030204" pitchFamily="18" charset="0"/>
+                                  </a:rPr>
+                                  <m:t>𝑖</m:t>
+                                </m:r>
+                              </m:sub>
+                            </m:sSub>
+                          </m:e>
+                        </m:d>
+                      </m:e>
+                      <m:sup>
+                        <m:r>
+                          <a:rPr lang="en-US" sz="1400" b="0" i="1" smtClean="0">
+                            <a:latin typeface="Cambria Math" panose="02040503050406030204" pitchFamily="18" charset="0"/>
+                          </a:rPr>
+                          <m:t>𝑡</m:t>
+                        </m:r>
+                      </m:sup>
+                    </m:sSup>
+                    <m:r>
+                      <a:rPr lang="en-US" sz="1400" b="0" i="1" smtClean="0">
+                        <a:latin typeface="Cambria Math" panose="02040503050406030204" pitchFamily="18" charset="0"/>
+                      </a:rPr>
+                      <m:t>→0</m:t>
+                    </m:r>
+                  </m:oMath>
+                </a14:m>
+                <a:r>
+                  <a:rPr lang="en-SG" sz="1400" dirty="0"/>
+                  <a:t> if </a:t>
+                </a:r>
+                <a14:m>
+                  <m:oMath xmlns:m="http://schemas.openxmlformats.org/officeDocument/2006/math">
+                    <m:d>
+                      <m:dPr>
+                        <m:begChr m:val="|"/>
+                        <m:endChr m:val="|"/>
+                        <m:ctrlPr>
+                          <a:rPr lang="en-US" sz="1400" b="0" i="1" smtClean="0">
+                            <a:latin typeface="Cambria Math" panose="02040503050406030204" pitchFamily="18" charset="0"/>
+                          </a:rPr>
+                        </m:ctrlPr>
+                      </m:dPr>
+                      <m:e>
+                        <m:sSub>
+                          <m:sSubPr>
+                            <m:ctrlPr>
+                              <a:rPr lang="en-US" sz="1400" b="0" i="1" smtClean="0">
+                                <a:latin typeface="Cambria Math" panose="02040503050406030204" pitchFamily="18" charset="0"/>
+                              </a:rPr>
+                            </m:ctrlPr>
+                          </m:sSubPr>
+                          <m:e>
+                            <m:r>
+                              <a:rPr lang="en-US" sz="1400" b="0" i="1" smtClean="0">
+                                <a:latin typeface="Cambria Math" panose="02040503050406030204" pitchFamily="18" charset="0"/>
+                              </a:rPr>
+                              <m:t>𝜆</m:t>
+                            </m:r>
+                          </m:e>
+                          <m:sub>
+                            <m:r>
+                              <a:rPr lang="en-US" sz="1400" b="0" i="1" smtClean="0">
+                                <a:latin typeface="Cambria Math" panose="02040503050406030204" pitchFamily="18" charset="0"/>
+                              </a:rPr>
+                              <m:t>𝑖</m:t>
+                            </m:r>
+                          </m:sub>
+                        </m:sSub>
+                      </m:e>
+                    </m:d>
+                    <m:r>
+                      <a:rPr lang="en-US" sz="1400" b="0" i="1" smtClean="0">
+                        <a:latin typeface="Cambria Math" panose="02040503050406030204" pitchFamily="18" charset="0"/>
+                      </a:rPr>
+                      <m:t>&lt;1</m:t>
+                    </m:r>
+                  </m:oMath>
+                </a14:m>
+                <a:r>
+                  <a:rPr lang="en-SG" sz="1400" dirty="0"/>
+                  <a:t>,</a:t>
+                </a:r>
+              </a:p>
+              <a:p>
+                <a14:m>
+                  <m:oMath xmlns:m="http://schemas.openxmlformats.org/officeDocument/2006/math">
+                    <m:sSup>
+                      <m:sSupPr>
+                        <m:ctrlPr>
+                          <a:rPr lang="en-US" sz="1400" i="1">
+                            <a:latin typeface="Cambria Math" panose="02040503050406030204" pitchFamily="18" charset="0"/>
+                          </a:rPr>
+                        </m:ctrlPr>
+                      </m:sSupPr>
+                      <m:e>
+                        <m:d>
+                          <m:dPr>
+                            <m:ctrlPr>
+                              <a:rPr lang="en-US" sz="1400" i="1">
+                                <a:latin typeface="Cambria Math" panose="02040503050406030204" pitchFamily="18" charset="0"/>
+                              </a:rPr>
+                            </m:ctrlPr>
+                          </m:dPr>
+                          <m:e>
+                            <m:sSub>
+                              <m:sSubPr>
+                                <m:ctrlPr>
+                                  <a:rPr lang="en-US" sz="1400" i="1">
+                                    <a:latin typeface="Cambria Math" panose="02040503050406030204" pitchFamily="18" charset="0"/>
+                                  </a:rPr>
+                                </m:ctrlPr>
+                              </m:sSubPr>
+                              <m:e>
+                                <m:r>
+                                  <a:rPr lang="en-US" sz="1400" i="1">
+                                    <a:latin typeface="Cambria Math" panose="02040503050406030204" pitchFamily="18" charset="0"/>
+                                  </a:rPr>
+                                  <m:t>𝜆</m:t>
+                                </m:r>
+                              </m:e>
+                              <m:sub>
+                                <m:r>
+                                  <a:rPr lang="en-US" sz="1400" i="1">
+                                    <a:latin typeface="Cambria Math" panose="02040503050406030204" pitchFamily="18" charset="0"/>
+                                  </a:rPr>
+                                  <m:t>𝑖</m:t>
+                                </m:r>
+                              </m:sub>
+                            </m:sSub>
+                          </m:e>
+                        </m:d>
+                      </m:e>
+                      <m:sup>
+                        <m:r>
+                          <a:rPr lang="en-US" sz="1400" i="1">
+                            <a:latin typeface="Cambria Math" panose="02040503050406030204" pitchFamily="18" charset="0"/>
+                          </a:rPr>
+                          <m:t>𝑡</m:t>
+                        </m:r>
+                      </m:sup>
+                    </m:sSup>
+                    <m:r>
+                      <a:rPr lang="en-US" sz="1400" i="1">
+                        <a:latin typeface="Cambria Math" panose="02040503050406030204" pitchFamily="18" charset="0"/>
+                      </a:rPr>
+                      <m:t>→</m:t>
+                    </m:r>
+                    <m:r>
+                      <a:rPr lang="en-US" sz="1400" b="0" i="1" smtClean="0">
+                        <a:latin typeface="Cambria Math" panose="02040503050406030204" pitchFamily="18" charset="0"/>
+                      </a:rPr>
+                      <m:t>∞</m:t>
+                    </m:r>
+                  </m:oMath>
+                </a14:m>
+                <a:r>
+                  <a:rPr lang="en-SG" sz="1400" dirty="0"/>
+                  <a:t> if </a:t>
+                </a:r>
+                <a14:m>
+                  <m:oMath xmlns:m="http://schemas.openxmlformats.org/officeDocument/2006/math">
+                    <m:d>
+                      <m:dPr>
+                        <m:begChr m:val="|"/>
+                        <m:endChr m:val="|"/>
+                        <m:ctrlPr>
+                          <a:rPr lang="en-US" sz="1400" i="1">
+                            <a:latin typeface="Cambria Math" panose="02040503050406030204" pitchFamily="18" charset="0"/>
+                          </a:rPr>
+                        </m:ctrlPr>
+                      </m:dPr>
+                      <m:e>
+                        <m:sSub>
+                          <m:sSubPr>
+                            <m:ctrlPr>
+                              <a:rPr lang="en-US" sz="1400" i="1">
+                                <a:latin typeface="Cambria Math" panose="02040503050406030204" pitchFamily="18" charset="0"/>
+                              </a:rPr>
+                            </m:ctrlPr>
+                          </m:sSubPr>
+                          <m:e>
+                            <m:r>
+                              <a:rPr lang="en-US" sz="1400" i="1">
+                                <a:latin typeface="Cambria Math" panose="02040503050406030204" pitchFamily="18" charset="0"/>
+                              </a:rPr>
+                              <m:t>𝜆</m:t>
+                            </m:r>
+                          </m:e>
+                          <m:sub>
+                            <m:r>
+                              <a:rPr lang="en-US" sz="1400" i="1">
+                                <a:latin typeface="Cambria Math" panose="02040503050406030204" pitchFamily="18" charset="0"/>
+                              </a:rPr>
+                              <m:t>𝑖</m:t>
+                            </m:r>
+                          </m:sub>
+                        </m:sSub>
+                      </m:e>
+                    </m:d>
+                    <m:r>
+                      <a:rPr lang="en-US" sz="1400" b="0" i="1" smtClean="0">
+                        <a:latin typeface="Cambria Math" panose="02040503050406030204" pitchFamily="18" charset="0"/>
+                      </a:rPr>
+                      <m:t>&gt;1</m:t>
+                    </m:r>
+                  </m:oMath>
+                </a14:m>
+                <a:endParaRPr lang="en-SG" sz="1400" dirty="0"/>
+              </a:p>
+            </p:txBody>
+          </p:sp>
+        </mc:Choice>
+        <mc:Fallback xmlns="">
+          <p:sp>
+            <p:nvSpPr>
+              <p:cNvPr id="4" name="TextBox 3">
+                <a:extLst>
+                  <a:ext uri="{FF2B5EF4-FFF2-40B4-BE49-F238E27FC236}">
+                    <a16:creationId xmlns:a16="http://schemas.microsoft.com/office/drawing/2014/main" id="{2BDA37CE-1E60-6903-CF77-C689113EEDC4}"/>
+                  </a:ext>
+                </a:extLst>
+              </p:cNvPr>
+              <p:cNvSpPr txBox="1">
+                <a:spLocks noRot="1" noChangeAspect="1" noMove="1" noResize="1" noEditPoints="1" noAdjustHandles="1" noChangeArrowheads="1" noChangeShapeType="1" noTextEdit="1"/>
+              </p:cNvSpPr>
+              <p:nvPr/>
+            </p:nvSpPr>
+            <p:spPr>
+              <a:xfrm>
+                <a:off x="6809362" y="5282287"/>
+                <a:ext cx="1809344" cy="1423403"/>
+              </a:xfrm>
+              <a:prstGeom prst="rect">
+                <a:avLst/>
+              </a:prstGeom>
+              <a:blipFill>
+                <a:blip r:embed="rId4"/>
+                <a:stretch>
+                  <a:fillRect b="-3433"/>
                 </a:stretch>
               </a:blipFill>
             </p:spPr>
@@ -4484,7 +6173,7 @@
 </p:sld>
 </file>
 
-<file path=ppt/slides/slide12.xml><?xml version="1.0" encoding="utf-8"?>
+<file path=ppt/slides/slide14.xml><?xml version="1.0" encoding="utf-8"?>
 <p:sld xmlns:a="http://schemas.openxmlformats.org/drawingml/2006/main" xmlns:r="http://schemas.openxmlformats.org/officeDocument/2006/relationships" xmlns:p="http://schemas.openxmlformats.org/presentationml/2006/main">
   <p:cSld>
     <p:spTree>
@@ -4524,7 +6213,7 @@
           <a:p>
             <a:r>
               <a:rPr lang="en-US" dirty="0"/>
-              <a:t>Long-short-term memory (LSTM)</a:t>
+              <a:t>Long short-term memory (LSTM)</a:t>
             </a:r>
             <a:endParaRPr lang="en-SG" dirty="0"/>
           </a:p>
@@ -4814,10 +6503,7 @@
                 <a:pPr algn="ctr"/>
                 <a14:m>
                   <m:oMathPara xmlns:m="http://schemas.openxmlformats.org/officeDocument/2006/math">
-                    <m:oMathParaPr>
-                      <m:jc m:val="centerGroup"/>
-                    </m:oMathParaPr>
-                    <m:oMath xmlns:m="http://schemas.openxmlformats.org/officeDocument/2006/math">
+                    <m:oMath>
                       <m:r>
                         <a:rPr lang="en-US" b="0" i="1" smtClean="0">
                           <a:latin typeface="Cambria Math" panose="02040503050406030204" pitchFamily="18" charset="0"/>
@@ -4929,10 +6615,7 @@
                 <a:pPr algn="ctr"/>
                 <a14:m>
                   <m:oMathPara xmlns:m="http://schemas.openxmlformats.org/officeDocument/2006/math">
-                    <m:oMathParaPr>
-                      <m:jc m:val="centerGroup"/>
-                    </m:oMathParaPr>
-                    <m:oMath xmlns:m="http://schemas.openxmlformats.org/officeDocument/2006/math">
+                    <m:oMath>
                       <m:r>
                         <a:rPr lang="en-US" b="0" i="1" smtClean="0">
                           <a:latin typeface="Cambria Math" panose="02040503050406030204" pitchFamily="18" charset="0"/>
@@ -5044,10 +6727,7 @@
                 <a:pPr algn="ctr"/>
                 <a14:m>
                   <m:oMathPara xmlns:m="http://schemas.openxmlformats.org/officeDocument/2006/math">
-                    <m:oMathParaPr>
-                      <m:jc m:val="centerGroup"/>
-                    </m:oMathParaPr>
-                    <m:oMath xmlns:m="http://schemas.openxmlformats.org/officeDocument/2006/math">
+                    <m:oMath>
                       <m:r>
                         <a:rPr lang="en-US" b="0" i="1" smtClean="0">
                           <a:latin typeface="Cambria Math" panose="02040503050406030204" pitchFamily="18" charset="0"/>
@@ -5408,10 +7088,7 @@
                 <a:pPr algn="ctr"/>
                 <a14:m>
                   <m:oMathPara xmlns:m="http://schemas.openxmlformats.org/officeDocument/2006/math">
-                    <m:oMathParaPr>
-                      <m:jc m:val="centerGroup"/>
-                    </m:oMathParaPr>
-                    <m:oMath xmlns:m="http://schemas.openxmlformats.org/officeDocument/2006/math">
+                    <m:oMath>
                       <m:r>
                         <a:rPr lang="en-US" b="0" i="1" smtClean="0">
                           <a:latin typeface="Cambria Math" panose="02040503050406030204" pitchFamily="18" charset="0"/>
@@ -5712,10 +7389,7 @@
                 <a:pPr algn="ctr"/>
                 <a14:m>
                   <m:oMathPara xmlns:m="http://schemas.openxmlformats.org/officeDocument/2006/math">
-                    <m:oMathParaPr>
-                      <m:jc m:val="centerGroup"/>
-                    </m:oMathParaPr>
-                    <m:oMath xmlns:m="http://schemas.openxmlformats.org/officeDocument/2006/math">
+                    <m:oMath>
                       <m:r>
                         <a:rPr lang="en-US" b="0" i="1" smtClean="0">
                           <a:latin typeface="Cambria Math" panose="02040503050406030204" pitchFamily="18" charset="0"/>
@@ -6615,10 +8289,7 @@
                 <a:pPr/>
                 <a14:m>
                   <m:oMathPara xmlns:m="http://schemas.openxmlformats.org/officeDocument/2006/math">
-                    <m:oMathParaPr>
-                      <m:jc m:val="centerGroup"/>
-                    </m:oMathParaPr>
-                    <m:oMath xmlns:m="http://schemas.openxmlformats.org/officeDocument/2006/math">
+                    <m:oMath>
                       <m:r>
                         <a:rPr lang="en-US" b="0" i="1" smtClean="0">
                           <a:latin typeface="Cambria Math" panose="02040503050406030204" pitchFamily="18" charset="0"/>
@@ -7096,8 +8767,8 @@
           </p:sp>
         </mc:Fallback>
       </mc:AlternateContent>
-      <mc:AlternateContent xmlns:mc="http://schemas.openxmlformats.org/markup-compatibility/2006">
-        <mc:Choice xmlns:a14="http://schemas.microsoft.com/office/drawing/2010/main" Requires="a14">
+      <mc:AlternateContent xmlns:mc="http://schemas.openxmlformats.org/markup-compatibility/2006" xmlns:a14="http://schemas.microsoft.com/office/drawing/2010/main">
+        <mc:Choice Requires="a14">
           <p:sp>
             <p:nvSpPr>
               <p:cNvPr id="3" name="TextBox 2">
@@ -7126,17 +8797,15 @@
               </a:bodyPr>
               <a:lstStyle/>
               <a:p>
+                <a:pPr/>
                 <a14:m>
                   <m:oMathPara xmlns:m="http://schemas.openxmlformats.org/officeDocument/2006/math">
-                    <m:oMathParaPr>
-                      <m:jc m:val="centerGroup"/>
-                    </m:oMathParaPr>
-                    <m:oMath xmlns:m="http://schemas.openxmlformats.org/officeDocument/2006/math">
+                    <m:oMath>
                       <m:acc>
                         <m:accPr>
                           <m:chr m:val="̃"/>
                           <m:ctrlPr>
-                            <a:rPr lang="en-SG" i="1" smtClean="0">
+                            <a:rPr lang="en-US" b="0" i="1" smtClean="0">
                               <a:latin typeface="Cambria Math" panose="02040503050406030204" pitchFamily="18" charset="0"/>
                             </a:rPr>
                           </m:ctrlPr>
@@ -7177,7 +8846,7 @@
             </p:txBody>
           </p:sp>
         </mc:Choice>
-        <mc:Fallback>
+        <mc:Fallback xmlns="">
           <p:sp>
             <p:nvSpPr>
               <p:cNvPr id="3" name="TextBox 2">
@@ -7222,6 +8891,467 @@
           </p:sp>
         </mc:Fallback>
       </mc:AlternateContent>
+      <mc:AlternateContent xmlns:mc="http://schemas.openxmlformats.org/markup-compatibility/2006" xmlns:a14="http://schemas.microsoft.com/office/drawing/2010/main">
+        <mc:Choice Requires="a14">
+          <p:sp>
+            <p:nvSpPr>
+              <p:cNvPr id="4" name="TextBox 3">
+                <a:extLst>
+                  <a:ext uri="{FF2B5EF4-FFF2-40B4-BE49-F238E27FC236}">
+                    <a16:creationId xmlns:a16="http://schemas.microsoft.com/office/drawing/2014/main" id="{6495F8F1-0289-C2A6-52AD-3ADBF952F635}"/>
+                  </a:ext>
+                </a:extLst>
+              </p:cNvPr>
+              <p:cNvSpPr txBox="1"/>
+              <p:nvPr/>
+            </p:nvSpPr>
+            <p:spPr>
+              <a:xfrm>
+                <a:off x="3294011" y="1928084"/>
+                <a:ext cx="3398619" cy="375039"/>
+              </a:xfrm>
+              <a:prstGeom prst="rect">
+                <a:avLst/>
+              </a:prstGeom>
+              <a:noFill/>
+            </p:spPr>
+            <p:txBody>
+              <a:bodyPr wrap="square" rtlCol="0">
+                <a:spAutoFit/>
+              </a:bodyPr>
+              <a:lstStyle/>
+              <a:p>
+                <a:pPr/>
+                <a14:m>
+                  <m:oMathPara xmlns:m="http://schemas.openxmlformats.org/officeDocument/2006/math">
+                    <m:oMath>
+                      <m:sSub>
+                        <m:sSubPr>
+                          <m:ctrlPr>
+                            <a:rPr lang="en-US" i="1">
+                              <a:latin typeface="Cambria Math" panose="02040503050406030204" pitchFamily="18" charset="0"/>
+                            </a:rPr>
+                          </m:ctrlPr>
+                        </m:sSubPr>
+                        <m:e>
+                          <m:r>
+                            <a:rPr lang="en-US" i="1">
+                              <a:latin typeface="Cambria Math" panose="02040503050406030204" pitchFamily="18" charset="0"/>
+                            </a:rPr>
+                            <m:t>𝐶</m:t>
+                          </m:r>
+                        </m:e>
+                        <m:sub>
+                          <m:r>
+                            <a:rPr lang="en-US" i="1">
+                              <a:latin typeface="Cambria Math" panose="02040503050406030204" pitchFamily="18" charset="0"/>
+                            </a:rPr>
+                            <m:t>𝑖</m:t>
+                          </m:r>
+                        </m:sub>
+                      </m:sSub>
+                      <m:r>
+                        <a:rPr lang="en-US" i="1">
+                          <a:latin typeface="Cambria Math" panose="02040503050406030204" pitchFamily="18" charset="0"/>
+                        </a:rPr>
+                        <m:t>=</m:t>
+                      </m:r>
+                      <m:sSub>
+                        <m:sSubPr>
+                          <m:ctrlPr>
+                            <a:rPr lang="en-US" i="1">
+                              <a:latin typeface="Cambria Math" panose="02040503050406030204" pitchFamily="18" charset="0"/>
+                            </a:rPr>
+                          </m:ctrlPr>
+                        </m:sSubPr>
+                        <m:e>
+                          <m:r>
+                            <a:rPr lang="en-US" i="1">
+                              <a:latin typeface="Cambria Math" panose="02040503050406030204" pitchFamily="18" charset="0"/>
+                            </a:rPr>
+                            <m:t>𝐹</m:t>
+                          </m:r>
+                        </m:e>
+                        <m:sub>
+                          <m:r>
+                            <a:rPr lang="en-US" i="1">
+                              <a:latin typeface="Cambria Math" panose="02040503050406030204" pitchFamily="18" charset="0"/>
+                            </a:rPr>
+                            <m:t>𝑖</m:t>
+                          </m:r>
+                        </m:sub>
+                      </m:sSub>
+                      <m:r>
+                        <a:rPr lang="en-US" i="1">
+                          <a:latin typeface="Cambria Math" panose="02040503050406030204" pitchFamily="18" charset="0"/>
+                          <a:ea typeface="Cambria Math" panose="02040503050406030204" pitchFamily="18" charset="0"/>
+                        </a:rPr>
+                        <m:t>⨀</m:t>
+                      </m:r>
+                      <m:sSub>
+                        <m:sSubPr>
+                          <m:ctrlPr>
+                            <a:rPr lang="en-US" i="1">
+                              <a:latin typeface="Cambria Math" panose="02040503050406030204" pitchFamily="18" charset="0"/>
+                              <a:ea typeface="Cambria Math" panose="02040503050406030204" pitchFamily="18" charset="0"/>
+                            </a:rPr>
+                          </m:ctrlPr>
+                        </m:sSubPr>
+                        <m:e>
+                          <m:r>
+                            <a:rPr lang="en-US" i="1">
+                              <a:latin typeface="Cambria Math" panose="02040503050406030204" pitchFamily="18" charset="0"/>
+                              <a:ea typeface="Cambria Math" panose="02040503050406030204" pitchFamily="18" charset="0"/>
+                            </a:rPr>
+                            <m:t>𝐶</m:t>
+                          </m:r>
+                        </m:e>
+                        <m:sub>
+                          <m:r>
+                            <a:rPr lang="en-US" i="1">
+                              <a:latin typeface="Cambria Math" panose="02040503050406030204" pitchFamily="18" charset="0"/>
+                              <a:ea typeface="Cambria Math" panose="02040503050406030204" pitchFamily="18" charset="0"/>
+                            </a:rPr>
+                            <m:t>𝑖</m:t>
+                          </m:r>
+                          <m:r>
+                            <a:rPr lang="en-US" i="1">
+                              <a:latin typeface="Cambria Math" panose="02040503050406030204" pitchFamily="18" charset="0"/>
+                              <a:ea typeface="Cambria Math" panose="02040503050406030204" pitchFamily="18" charset="0"/>
+                            </a:rPr>
+                            <m:t>−1</m:t>
+                          </m:r>
+                        </m:sub>
+                      </m:sSub>
+                      <m:r>
+                        <a:rPr lang="en-US" i="1">
+                          <a:latin typeface="Cambria Math" panose="02040503050406030204" pitchFamily="18" charset="0"/>
+                          <a:ea typeface="Cambria Math" panose="02040503050406030204" pitchFamily="18" charset="0"/>
+                        </a:rPr>
+                        <m:t>+</m:t>
+                      </m:r>
+                      <m:sSub>
+                        <m:sSubPr>
+                          <m:ctrlPr>
+                            <a:rPr lang="en-US" i="1">
+                              <a:latin typeface="Cambria Math" panose="02040503050406030204" pitchFamily="18" charset="0"/>
+                              <a:ea typeface="Cambria Math" panose="02040503050406030204" pitchFamily="18" charset="0"/>
+                            </a:rPr>
+                          </m:ctrlPr>
+                        </m:sSubPr>
+                        <m:e>
+                          <m:r>
+                            <a:rPr lang="en-US" i="1">
+                              <a:latin typeface="Cambria Math" panose="02040503050406030204" pitchFamily="18" charset="0"/>
+                              <a:ea typeface="Cambria Math" panose="02040503050406030204" pitchFamily="18" charset="0"/>
+                            </a:rPr>
+                            <m:t>𝐼</m:t>
+                          </m:r>
+                        </m:e>
+                        <m:sub>
+                          <m:r>
+                            <a:rPr lang="en-US" i="1">
+                              <a:latin typeface="Cambria Math" panose="02040503050406030204" pitchFamily="18" charset="0"/>
+                              <a:ea typeface="Cambria Math" panose="02040503050406030204" pitchFamily="18" charset="0"/>
+                            </a:rPr>
+                            <m:t>𝑖</m:t>
+                          </m:r>
+                        </m:sub>
+                      </m:sSub>
+                      <m:r>
+                        <a:rPr lang="en-US" i="1">
+                          <a:latin typeface="Cambria Math" panose="02040503050406030204" pitchFamily="18" charset="0"/>
+                          <a:ea typeface="Cambria Math" panose="02040503050406030204" pitchFamily="18" charset="0"/>
+                        </a:rPr>
+                        <m:t>⨀</m:t>
+                      </m:r>
+                      <m:sSub>
+                        <m:sSubPr>
+                          <m:ctrlPr>
+                            <a:rPr lang="en-US" i="1">
+                              <a:latin typeface="Cambria Math" panose="02040503050406030204" pitchFamily="18" charset="0"/>
+                              <a:ea typeface="Cambria Math" panose="02040503050406030204" pitchFamily="18" charset="0"/>
+                            </a:rPr>
+                          </m:ctrlPr>
+                        </m:sSubPr>
+                        <m:e>
+                          <m:acc>
+                            <m:accPr>
+                              <m:chr m:val="̃"/>
+                              <m:ctrlPr>
+                                <a:rPr lang="en-US" i="1">
+                                  <a:latin typeface="Cambria Math" panose="02040503050406030204" pitchFamily="18" charset="0"/>
+                                  <a:ea typeface="Cambria Math" panose="02040503050406030204" pitchFamily="18" charset="0"/>
+                                </a:rPr>
+                              </m:ctrlPr>
+                            </m:accPr>
+                            <m:e>
+                              <m:r>
+                                <a:rPr lang="en-US" i="1">
+                                  <a:latin typeface="Cambria Math" panose="02040503050406030204" pitchFamily="18" charset="0"/>
+                                  <a:ea typeface="Cambria Math" panose="02040503050406030204" pitchFamily="18" charset="0"/>
+                                </a:rPr>
+                                <m:t>𝐶</m:t>
+                              </m:r>
+                            </m:e>
+                          </m:acc>
+                        </m:e>
+                        <m:sub>
+                          <m:r>
+                            <a:rPr lang="en-US" i="1">
+                              <a:latin typeface="Cambria Math" panose="02040503050406030204" pitchFamily="18" charset="0"/>
+                            </a:rPr>
+                            <m:t>𝑖</m:t>
+                          </m:r>
+                        </m:sub>
+                      </m:sSub>
+                    </m:oMath>
+                  </m:oMathPara>
+                </a14:m>
+                <a:endParaRPr lang="en-SG" dirty="0"/>
+              </a:p>
+            </p:txBody>
+          </p:sp>
+        </mc:Choice>
+        <mc:Fallback xmlns="">
+          <p:sp>
+            <p:nvSpPr>
+              <p:cNvPr id="4" name="TextBox 3">
+                <a:extLst>
+                  <a:ext uri="{FF2B5EF4-FFF2-40B4-BE49-F238E27FC236}">
+                    <a16:creationId xmlns:a16="http://schemas.microsoft.com/office/drawing/2014/main" id="{6495F8F1-0289-C2A6-52AD-3ADBF952F635}"/>
+                  </a:ext>
+                </a:extLst>
+              </p:cNvPr>
+              <p:cNvSpPr txBox="1">
+                <a:spLocks noRot="1" noChangeAspect="1" noMove="1" noResize="1" noEditPoints="1" noAdjustHandles="1" noChangeArrowheads="1" noChangeShapeType="1" noTextEdit="1"/>
+              </p:cNvSpPr>
+              <p:nvPr/>
+            </p:nvSpPr>
+            <p:spPr>
+              <a:xfrm>
+                <a:off x="3294011" y="1928084"/>
+                <a:ext cx="3398619" cy="375039"/>
+              </a:xfrm>
+              <a:prstGeom prst="rect">
+                <a:avLst/>
+              </a:prstGeom>
+              <a:blipFill>
+                <a:blip r:embed="rId18"/>
+                <a:stretch>
+                  <a:fillRect t="-1613" b="-4839"/>
+                </a:stretch>
+              </a:blipFill>
+            </p:spPr>
+            <p:txBody>
+              <a:bodyPr/>
+              <a:lstStyle/>
+              <a:p>
+                <a:r>
+                  <a:rPr lang="en-SG">
+                    <a:noFill/>
+                  </a:rPr>
+                  <a:t> </a:t>
+                </a:r>
+              </a:p>
+            </p:txBody>
+          </p:sp>
+        </mc:Fallback>
+      </mc:AlternateContent>
+      <mc:AlternateContent xmlns:mc="http://schemas.openxmlformats.org/markup-compatibility/2006" xmlns:a14="http://schemas.microsoft.com/office/drawing/2010/main">
+        <mc:Choice Requires="a14">
+          <p:sp>
+            <p:nvSpPr>
+              <p:cNvPr id="6" name="TextBox 5">
+                <a:extLst>
+                  <a:ext uri="{FF2B5EF4-FFF2-40B4-BE49-F238E27FC236}">
+                    <a16:creationId xmlns:a16="http://schemas.microsoft.com/office/drawing/2014/main" id="{16E5981F-9187-F894-5C9C-5E4B5BF0791F}"/>
+                  </a:ext>
+                </a:extLst>
+              </p:cNvPr>
+              <p:cNvSpPr txBox="1"/>
+              <p:nvPr/>
+            </p:nvSpPr>
+            <p:spPr>
+              <a:xfrm>
+                <a:off x="6645847" y="1811759"/>
+                <a:ext cx="2498153" cy="650114"/>
+              </a:xfrm>
+              <a:prstGeom prst="rect">
+                <a:avLst/>
+              </a:prstGeom>
+              <a:noFill/>
+            </p:spPr>
+            <p:txBody>
+              <a:bodyPr wrap="square" rtlCol="0">
+                <a:spAutoFit/>
+              </a:bodyPr>
+              <a:lstStyle/>
+              <a:p>
+                <a14:m>
+                  <m:oMath xmlns:m="http://schemas.openxmlformats.org/officeDocument/2006/math">
+                    <m:sSub>
+                      <m:sSubPr>
+                        <m:ctrlPr>
+                          <a:rPr lang="en-US" sz="1200" b="0" i="1" smtClean="0">
+                            <a:latin typeface="Cambria Math" panose="02040503050406030204" pitchFamily="18" charset="0"/>
+                          </a:rPr>
+                        </m:ctrlPr>
+                      </m:sSubPr>
+                      <m:e>
+                        <m:r>
+                          <a:rPr lang="en-US" sz="1200" b="0" i="1" smtClean="0">
+                            <a:latin typeface="Cambria Math" panose="02040503050406030204" pitchFamily="18" charset="0"/>
+                          </a:rPr>
+                          <m:t>𝐹</m:t>
+                        </m:r>
+                      </m:e>
+                      <m:sub>
+                        <m:r>
+                          <a:rPr lang="en-US" sz="1200" b="0" i="1" smtClean="0">
+                            <a:latin typeface="Cambria Math" panose="02040503050406030204" pitchFamily="18" charset="0"/>
+                          </a:rPr>
+                          <m:t>𝑖</m:t>
+                        </m:r>
+                      </m:sub>
+                    </m:sSub>
+                  </m:oMath>
+                </a14:m>
+                <a:r>
+                  <a:rPr lang="en-SG" sz="1200" dirty="0"/>
+                  <a:t>: old memory to keep</a:t>
+                </a:r>
+              </a:p>
+              <a:p>
+                <a14:m>
+                  <m:oMath xmlns:m="http://schemas.openxmlformats.org/officeDocument/2006/math">
+                    <m:sSub>
+                      <m:sSubPr>
+                        <m:ctrlPr>
+                          <a:rPr lang="en-US" sz="1200" b="0" i="1" smtClean="0">
+                            <a:latin typeface="Cambria Math" panose="02040503050406030204" pitchFamily="18" charset="0"/>
+                          </a:rPr>
+                        </m:ctrlPr>
+                      </m:sSubPr>
+                      <m:e>
+                        <m:acc>
+                          <m:accPr>
+                            <m:chr m:val="̃"/>
+                            <m:ctrlPr>
+                              <a:rPr lang="en-US" sz="1200" b="0" i="1" smtClean="0">
+                                <a:latin typeface="Cambria Math" panose="02040503050406030204" pitchFamily="18" charset="0"/>
+                              </a:rPr>
+                            </m:ctrlPr>
+                          </m:accPr>
+                          <m:e>
+                            <m:r>
+                              <a:rPr lang="en-US" sz="1200" b="0" i="1" smtClean="0">
+                                <a:latin typeface="Cambria Math" panose="02040503050406030204" pitchFamily="18" charset="0"/>
+                              </a:rPr>
+                              <m:t>𝐶</m:t>
+                            </m:r>
+                          </m:e>
+                        </m:acc>
+                      </m:e>
+                      <m:sub>
+                        <m:r>
+                          <a:rPr lang="en-US" sz="1200" b="0" i="1" smtClean="0">
+                            <a:latin typeface="Cambria Math" panose="02040503050406030204" pitchFamily="18" charset="0"/>
+                          </a:rPr>
+                          <m:t>𝑖</m:t>
+                        </m:r>
+                      </m:sub>
+                    </m:sSub>
+                  </m:oMath>
+                </a14:m>
+                <a:r>
+                  <a:rPr lang="en-SG" sz="1200" dirty="0"/>
+                  <a:t>: candidate new memory</a:t>
+                </a:r>
+              </a:p>
+              <a:p>
+                <a14:m>
+                  <m:oMath xmlns:m="http://schemas.openxmlformats.org/officeDocument/2006/math">
+                    <m:sSub>
+                      <m:sSubPr>
+                        <m:ctrlPr>
+                          <a:rPr lang="en-US" sz="1200" b="0" i="1" smtClean="0">
+                            <a:latin typeface="Cambria Math" panose="02040503050406030204" pitchFamily="18" charset="0"/>
+                          </a:rPr>
+                        </m:ctrlPr>
+                      </m:sSubPr>
+                      <m:e>
+                        <m:r>
+                          <a:rPr lang="en-US" sz="1200" b="0" i="1" smtClean="0">
+                            <a:latin typeface="Cambria Math" panose="02040503050406030204" pitchFamily="18" charset="0"/>
+                          </a:rPr>
+                          <m:t>𝐼</m:t>
+                        </m:r>
+                      </m:e>
+                      <m:sub>
+                        <m:r>
+                          <a:rPr lang="en-US" sz="1200" b="0" i="1" smtClean="0">
+                            <a:latin typeface="Cambria Math" panose="02040503050406030204" pitchFamily="18" charset="0"/>
+                          </a:rPr>
+                          <m:t>𝑖</m:t>
+                        </m:r>
+                      </m:sub>
+                    </m:sSub>
+                  </m:oMath>
+                </a14:m>
+                <a:r>
+                  <a:rPr lang="en-SG" sz="1200" dirty="0"/>
+                  <a:t>: new memory to write</a:t>
+                </a:r>
+              </a:p>
+            </p:txBody>
+          </p:sp>
+        </mc:Choice>
+        <mc:Fallback xmlns="">
+          <p:sp>
+            <p:nvSpPr>
+              <p:cNvPr id="6" name="TextBox 5">
+                <a:extLst>
+                  <a:ext uri="{FF2B5EF4-FFF2-40B4-BE49-F238E27FC236}">
+                    <a16:creationId xmlns:a16="http://schemas.microsoft.com/office/drawing/2014/main" id="{16E5981F-9187-F894-5C9C-5E4B5BF0791F}"/>
+                  </a:ext>
+                </a:extLst>
+              </p:cNvPr>
+              <p:cNvSpPr txBox="1">
+                <a:spLocks noRot="1" noChangeAspect="1" noMove="1" noResize="1" noEditPoints="1" noAdjustHandles="1" noChangeArrowheads="1" noChangeShapeType="1" noTextEdit="1"/>
+              </p:cNvSpPr>
+              <p:nvPr/>
+            </p:nvSpPr>
+            <p:spPr>
+              <a:xfrm>
+                <a:off x="6645847" y="1811759"/>
+                <a:ext cx="2498153" cy="650114"/>
+              </a:xfrm>
+              <a:prstGeom prst="rect">
+                <a:avLst/>
+              </a:prstGeom>
+              <a:blipFill>
+                <a:blip r:embed="rId19"/>
+                <a:stretch>
+                  <a:fillRect b="-5607"/>
+                </a:stretch>
+              </a:blipFill>
+            </p:spPr>
+            <p:txBody>
+              <a:bodyPr/>
+              <a:lstStyle/>
+              <a:p>
+                <a:r>
+                  <a:rPr lang="en-SG">
+                    <a:noFill/>
+                  </a:rPr>
+                  <a:t> </a:t>
+                </a:r>
+              </a:p>
+            </p:txBody>
+          </p:sp>
+        </mc:Fallback>
+      </mc:AlternateContent>
     </p:spTree>
     <p:extLst>
       <p:ext uri="{BB962C8B-B14F-4D97-AF65-F5344CB8AC3E}">
@@ -7235,7 +9365,7 @@
 </p:sld>
 </file>
 
-<file path=ppt/slides/slide13.xml><?xml version="1.0" encoding="utf-8"?>
+<file path=ppt/slides/slide15.xml><?xml version="1.0" encoding="utf-8"?>
 <p:sld xmlns:a="http://schemas.openxmlformats.org/drawingml/2006/main" xmlns:r="http://schemas.openxmlformats.org/officeDocument/2006/relationships" xmlns:p="http://schemas.openxmlformats.org/presentationml/2006/main">
   <p:cSld>
     <p:spTree>
@@ -7281,8 +9411,8 @@
           </a:p>
         </p:txBody>
       </p:sp>
-      <mc:AlternateContent xmlns:mc="http://schemas.openxmlformats.org/markup-compatibility/2006">
-        <mc:Choice xmlns:a14="http://schemas.microsoft.com/office/drawing/2010/main" Requires="a14">
+      <mc:AlternateContent xmlns:mc="http://schemas.openxmlformats.org/markup-compatibility/2006" xmlns:a14="http://schemas.microsoft.com/office/drawing/2010/main">
+        <mc:Choice Requires="a14">
           <p:sp>
             <p:nvSpPr>
               <p:cNvPr id="3" name="Content Placeholder 2">
@@ -7314,10 +9444,7 @@
                 </a:pPr>
                 <a14:m>
                   <m:oMathPara xmlns:m="http://schemas.openxmlformats.org/officeDocument/2006/math">
-                    <m:oMathParaPr>
-                      <m:jc m:val="centerGroup"/>
-                    </m:oMathParaPr>
-                    <m:oMath xmlns:m="http://schemas.openxmlformats.org/officeDocument/2006/math">
+                    <m:oMath>
                       <m:sSub>
                         <m:sSubPr>
                           <m:ctrlPr>
@@ -7520,14 +9647,11 @@
                 </a:pPr>
                 <a14:m>
                   <m:oMathPara xmlns:m="http://schemas.openxmlformats.org/officeDocument/2006/math">
-                    <m:oMathParaPr>
-                      <m:jc m:val="centerGroup"/>
-                    </m:oMathParaPr>
-                    <m:oMath xmlns:m="http://schemas.openxmlformats.org/officeDocument/2006/math">
+                    <m:oMath>
                       <m:sSub>
                         <m:sSubPr>
                           <m:ctrlPr>
-                            <a:rPr lang="en-US" i="1">
+                            <a:rPr lang="en-US" b="0" i="1" smtClean="0">
                               <a:latin typeface="Cambria Math" panose="02040503050406030204" pitchFamily="18" charset="0"/>
                             </a:rPr>
                           </m:ctrlPr>
@@ -7726,10 +9850,7 @@
                 </a:pPr>
                 <a14:m>
                   <m:oMathPara xmlns:m="http://schemas.openxmlformats.org/officeDocument/2006/math">
-                    <m:oMathParaPr>
-                      <m:jc m:val="centerGroup"/>
-                    </m:oMathParaPr>
-                    <m:oMath xmlns:m="http://schemas.openxmlformats.org/officeDocument/2006/math">
+                    <m:oMath>
                       <m:sSub>
                         <m:sSubPr>
                           <m:ctrlPr>
@@ -7743,7 +9864,7 @@
                             <m:accPr>
                               <m:chr m:val="̃"/>
                               <m:ctrlPr>
-                                <a:rPr lang="en-US" i="1" smtClean="0">
+                                <a:rPr lang="en-US" b="0" i="1" smtClean="0">
                                   <a:latin typeface="Cambria Math" panose="02040503050406030204" pitchFamily="18" charset="0"/>
                                 </a:rPr>
                               </m:ctrlPr>
@@ -7776,7 +9897,7 @@
                       <m:func>
                         <m:funcPr>
                           <m:ctrlPr>
-                            <a:rPr lang="en-US" b="0" i="1" smtClean="0">
+                            <a:rPr lang="en-US" b="0" i="0" smtClean="0">
                               <a:latin typeface="Cambria Math" panose="02040503050406030204" pitchFamily="18" charset="0"/>
                             </a:rPr>
                           </m:ctrlPr>
@@ -7796,7 +9917,7 @@
                           <m:d>
                             <m:dPr>
                               <m:ctrlPr>
-                                <a:rPr lang="en-US" b="0" i="1" smtClean="0">
+                                <a:rPr lang="en-US" i="1">
                                   <a:latin typeface="Cambria Math" panose="02040503050406030204" pitchFamily="18" charset="0"/>
                                 </a:rPr>
                               </m:ctrlPr>
@@ -7960,10 +10081,7 @@
                 </a:pPr>
                 <a14:m>
                   <m:oMathPara xmlns:m="http://schemas.openxmlformats.org/officeDocument/2006/math">
-                    <m:oMathParaPr>
-                      <m:jc m:val="centerGroup"/>
-                    </m:oMathParaPr>
-                    <m:oMath xmlns:m="http://schemas.openxmlformats.org/officeDocument/2006/math">
+                    <m:oMath>
                       <m:sSub>
                         <m:sSubPr>
                           <m:ctrlPr>
@@ -8176,10 +10294,7 @@
                 </a:pPr>
                 <a14:m>
                   <m:oMathPara xmlns:m="http://schemas.openxmlformats.org/officeDocument/2006/math">
-                    <m:oMathParaPr>
-                      <m:jc m:val="centerGroup"/>
-                    </m:oMathParaPr>
-                    <m:oMath xmlns:m="http://schemas.openxmlformats.org/officeDocument/2006/math">
+                    <m:oMath>
                       <m:sSub>
                         <m:sSubPr>
                           <m:ctrlPr>
@@ -8237,11 +10352,11 @@
                         </m:sub>
                       </m:sSub>
                       <m:r>
-                        <a:rPr lang="en-US" i="1">
+                        <a:rPr lang="en-US" b="0" i="1" smtClean="0">
                           <a:latin typeface="Cambria Math" panose="02040503050406030204" pitchFamily="18" charset="0"/>
                           <a:ea typeface="Cambria Math" panose="02040503050406030204" pitchFamily="18" charset="0"/>
                         </a:rPr>
-                        <m:t>⊛</m:t>
+                        <m:t>⨀</m:t>
                       </m:r>
                       <m:sSub>
                         <m:sSubPr>
@@ -8318,7 +10433,7 @@
                           <a:latin typeface="Cambria Math" panose="02040503050406030204" pitchFamily="18" charset="0"/>
                           <a:ea typeface="Cambria Math" panose="02040503050406030204" pitchFamily="18" charset="0"/>
                         </a:rPr>
-                        <m:t>⊛</m:t>
+                        <m:t>⨀</m:t>
                       </m:r>
                       <m:sSub>
                         <m:sSubPr>
@@ -8371,10 +10486,7 @@
                 </a:pPr>
                 <a14:m>
                   <m:oMathPara xmlns:m="http://schemas.openxmlformats.org/officeDocument/2006/math">
-                    <m:oMathParaPr>
-                      <m:jc m:val="centerGroup"/>
-                    </m:oMathParaPr>
-                    <m:oMath xmlns:m="http://schemas.openxmlformats.org/officeDocument/2006/math">
+                    <m:oMath>
                       <m:sSub>
                         <m:sSubPr>
                           <m:ctrlPr>
@@ -8432,16 +10544,16 @@
                         </m:sub>
                       </m:sSub>
                       <m:r>
-                        <a:rPr lang="en-US" b="0" i="1" smtClean="0">
+                        <a:rPr lang="en-US" i="1">
                           <a:latin typeface="Cambria Math" panose="02040503050406030204" pitchFamily="18" charset="0"/>
                           <a:ea typeface="Cambria Math" panose="02040503050406030204" pitchFamily="18" charset="0"/>
                         </a:rPr>
-                        <m:t>⊛</m:t>
+                        <m:t>⨀</m:t>
                       </m:r>
                       <m:func>
                         <m:funcPr>
                           <m:ctrlPr>
-                            <a:rPr lang="en-US" b="0" i="1" smtClean="0">
+                            <a:rPr lang="en-US" b="0" i="0" smtClean="0">
                               <a:latin typeface="Cambria Math" panose="02040503050406030204" pitchFamily="18" charset="0"/>
                               <a:ea typeface="Cambria Math" panose="02040503050406030204" pitchFamily="18" charset="0"/>
                             </a:rPr>
@@ -8522,7 +10634,7 @@
             </p:txBody>
           </p:sp>
         </mc:Choice>
-        <mc:Fallback>
+        <mc:Fallback xmlns="">
           <p:sp>
             <p:nvSpPr>
               <p:cNvPr id="3" name="Content Placeholder 2">
@@ -8566,8 +10678,8 @@
           </p:sp>
         </mc:Fallback>
       </mc:AlternateContent>
-      <mc:AlternateContent xmlns:mc="http://schemas.openxmlformats.org/markup-compatibility/2006">
-        <mc:Choice xmlns:a14="http://schemas.microsoft.com/office/drawing/2010/main" Requires="a14">
+      <mc:AlternateContent xmlns:mc="http://schemas.openxmlformats.org/markup-compatibility/2006" xmlns:a14="http://schemas.microsoft.com/office/drawing/2010/main">
+        <mc:Choice Requires="a14">
           <p:sp>
             <p:nvSpPr>
               <p:cNvPr id="4" name="TextBox 3">
@@ -8582,8 +10694,8 @@
             </p:nvSpPr>
             <p:spPr>
               <a:xfrm>
-                <a:off x="6809362" y="5642043"/>
-                <a:ext cx="1755842" cy="584775"/>
+                <a:off x="6809361" y="5642043"/>
+                <a:ext cx="1857983" cy="584775"/>
               </a:xfrm>
               <a:prstGeom prst="rect">
                 <a:avLst/>
@@ -8603,7 +10715,7 @@
                         <a:latin typeface="Cambria Math" panose="02040503050406030204" pitchFamily="18" charset="0"/>
                         <a:ea typeface="Cambria Math" panose="02040503050406030204" pitchFamily="18" charset="0"/>
                       </a:rPr>
-                      <m:t>⊛</m:t>
+                      <m:t>⨀</m:t>
                     </m:r>
                   </m:oMath>
                 </a14:m>
@@ -8613,13 +10725,13 @@
                 </a:r>
                 <a:r>
                   <a:rPr lang="en-SG" sz="1400" dirty="0"/>
-                  <a:t>elementwise multiplication</a:t>
+                  <a:t>element-wise multiplication</a:t>
                 </a:r>
               </a:p>
             </p:txBody>
           </p:sp>
         </mc:Choice>
-        <mc:Fallback>
+        <mc:Fallback xmlns="">
           <p:sp>
             <p:nvSpPr>
               <p:cNvPr id="4" name="TextBox 3">
@@ -8636,8 +10748,8 @@
             </p:nvSpPr>
             <p:spPr>
               <a:xfrm>
-                <a:off x="6809362" y="5642043"/>
-                <a:ext cx="1755842" cy="584775"/>
+                <a:off x="6809361" y="5642043"/>
+                <a:ext cx="1857983" cy="584775"/>
               </a:xfrm>
               <a:prstGeom prst="rect">
                 <a:avLst/>
@@ -8645,7 +10757,7 @@
               <a:blipFill>
                 <a:blip r:embed="rId3"/>
                 <a:stretch>
-                  <a:fillRect l="-1042" t="-6316" r="-2083" b="-10526"/>
+                  <a:fillRect l="-984" t="-6316" b="-10526"/>
                 </a:stretch>
               </a:blipFill>
             </p:spPr>
@@ -8677,7 +10789,1305 @@
 </p:sld>
 </file>
 
+<file path=ppt/slides/slide16.xml><?xml version="1.0" encoding="utf-8"?>
+<p:sld xmlns:a="http://schemas.openxmlformats.org/drawingml/2006/main" xmlns:r="http://schemas.openxmlformats.org/officeDocument/2006/relationships" xmlns:p="http://schemas.openxmlformats.org/presentationml/2006/main">
+  <p:cSld>
+    <p:spTree>
+      <p:nvGrpSpPr>
+        <p:cNvPr id="1" name=""/>
+        <p:cNvGrpSpPr/>
+        <p:nvPr/>
+      </p:nvGrpSpPr>
+      <p:grpSpPr>
+        <a:xfrm>
+          <a:off x="0" y="0"/>
+          <a:ext cx="0" cy="0"/>
+          <a:chOff x="0" y="0"/>
+          <a:chExt cx="0" cy="0"/>
+        </a:xfrm>
+      </p:grpSpPr>
+      <p:sp>
+        <p:nvSpPr>
+          <p:cNvPr id="2" name="Title 1">
+            <a:extLst>
+              <a:ext uri="{FF2B5EF4-FFF2-40B4-BE49-F238E27FC236}">
+                <a16:creationId xmlns:a16="http://schemas.microsoft.com/office/drawing/2014/main" id="{EFBC6B3B-1007-4B5E-CA95-F6320D6734B6}"/>
+              </a:ext>
+            </a:extLst>
+          </p:cNvPr>
+          <p:cNvSpPr>
+            <a:spLocks noGrp="1"/>
+          </p:cNvSpPr>
+          <p:nvPr>
+            <p:ph type="title"/>
+          </p:nvPr>
+        </p:nvSpPr>
+        <p:spPr/>
+        <p:txBody>
+          <a:bodyPr/>
+          <a:lstStyle/>
+          <a:p>
+            <a:r>
+              <a:rPr lang="en-US" dirty="0"/>
+              <a:t>Examples using LSTM</a:t>
+            </a:r>
+            <a:endParaRPr lang="en-SG" dirty="0"/>
+          </a:p>
+        </p:txBody>
+      </p:sp>
+      <mc:AlternateContent xmlns:mc="http://schemas.openxmlformats.org/markup-compatibility/2006">
+        <mc:Choice xmlns:a14="http://schemas.microsoft.com/office/drawing/2010/main" Requires="a14">
+          <p:sp>
+            <p:nvSpPr>
+              <p:cNvPr id="3" name="Content Placeholder 2">
+                <a:extLst>
+                  <a:ext uri="{FF2B5EF4-FFF2-40B4-BE49-F238E27FC236}">
+                    <a16:creationId xmlns:a16="http://schemas.microsoft.com/office/drawing/2014/main" id="{D49FDB62-6861-296D-8F9C-035BDB58DF28}"/>
+                  </a:ext>
+                </a:extLst>
+              </p:cNvPr>
+              <p:cNvSpPr>
+                <a:spLocks noGrp="1"/>
+              </p:cNvSpPr>
+              <p:nvPr>
+                <p:ph idx="1"/>
+              </p:nvPr>
+            </p:nvSpPr>
+            <p:spPr/>
+            <p:txBody>
+              <a:bodyPr>
+                <a:normAutofit lnSpcReduction="10000"/>
+              </a:bodyPr>
+              <a:lstStyle/>
+              <a:p>
+                <a:r>
+                  <a:rPr lang="en-US" dirty="0"/>
+                  <a:t>1) Damped oscillation – predicting the next value </a:t>
+                </a:r>
+                <a14:m>
+                  <m:oMath xmlns:m="http://schemas.openxmlformats.org/officeDocument/2006/math">
+                    <m:sSub>
+                      <m:sSubPr>
+                        <m:ctrlPr>
+                          <a:rPr lang="en-US" b="0" i="1" smtClean="0">
+                            <a:latin typeface="Cambria Math" panose="02040503050406030204" pitchFamily="18" charset="0"/>
+                          </a:rPr>
+                        </m:ctrlPr>
+                      </m:sSubPr>
+                      <m:e>
+                        <m:r>
+                          <a:rPr lang="en-US" b="0" i="1" smtClean="0">
+                            <a:latin typeface="Cambria Math" panose="02040503050406030204" pitchFamily="18" charset="0"/>
+                          </a:rPr>
+                          <m:t>𝑥</m:t>
+                        </m:r>
+                      </m:e>
+                      <m:sub>
+                        <m:r>
+                          <a:rPr lang="en-US" b="0" i="1" smtClean="0">
+                            <a:latin typeface="Cambria Math" panose="02040503050406030204" pitchFamily="18" charset="0"/>
+                          </a:rPr>
+                          <m:t>𝑖</m:t>
+                        </m:r>
+                        <m:r>
+                          <a:rPr lang="en-US" b="0" i="1" smtClean="0">
+                            <a:latin typeface="Cambria Math" panose="02040503050406030204" pitchFamily="18" charset="0"/>
+                          </a:rPr>
+                          <m:t>+1</m:t>
+                        </m:r>
+                      </m:sub>
+                    </m:sSub>
+                  </m:oMath>
+                </a14:m>
+                <a:r>
+                  <a:rPr lang="en-US" dirty="0"/>
+                  <a:t> given </a:t>
+                </a:r>
+                <a14:m>
+                  <m:oMath xmlns:m="http://schemas.openxmlformats.org/officeDocument/2006/math">
+                    <m:r>
+                      <a:rPr lang="en-US" b="0" i="1" smtClean="0">
+                        <a:latin typeface="Cambria Math" panose="02040503050406030204" pitchFamily="18" charset="0"/>
+                      </a:rPr>
+                      <m:t>[</m:t>
+                    </m:r>
+                    <m:sSub>
+                      <m:sSubPr>
+                        <m:ctrlPr>
+                          <a:rPr lang="en-US" b="0" i="1" smtClean="0">
+                            <a:latin typeface="Cambria Math" panose="02040503050406030204" pitchFamily="18" charset="0"/>
+                          </a:rPr>
+                        </m:ctrlPr>
+                      </m:sSubPr>
+                      <m:e>
+                        <m:r>
+                          <a:rPr lang="en-US" b="0" i="1" smtClean="0">
+                            <a:latin typeface="Cambria Math" panose="02040503050406030204" pitchFamily="18" charset="0"/>
+                          </a:rPr>
+                          <m:t>𝑥</m:t>
+                        </m:r>
+                      </m:e>
+                      <m:sub>
+                        <m:r>
+                          <a:rPr lang="en-US" b="0" i="1" smtClean="0">
+                            <a:latin typeface="Cambria Math" panose="02040503050406030204" pitchFamily="18" charset="0"/>
+                          </a:rPr>
+                          <m:t>𝑖</m:t>
+                        </m:r>
+                        <m:r>
+                          <a:rPr lang="en-US" b="0" i="1" smtClean="0">
+                            <a:latin typeface="Cambria Math" panose="02040503050406030204" pitchFamily="18" charset="0"/>
+                          </a:rPr>
+                          <m:t>−</m:t>
+                        </m:r>
+                        <m:r>
+                          <a:rPr lang="en-US" b="0" i="1" smtClean="0">
+                            <a:latin typeface="Cambria Math" panose="02040503050406030204" pitchFamily="18" charset="0"/>
+                          </a:rPr>
+                          <m:t>𝐿</m:t>
+                        </m:r>
+                        <m:r>
+                          <a:rPr lang="en-US" b="0" i="1" smtClean="0">
+                            <a:latin typeface="Cambria Math" panose="02040503050406030204" pitchFamily="18" charset="0"/>
+                          </a:rPr>
+                          <m:t>+1,⋯, </m:t>
+                        </m:r>
+                      </m:sub>
+                    </m:sSub>
+                    <m:sSub>
+                      <m:sSubPr>
+                        <m:ctrlPr>
+                          <a:rPr lang="en-US" b="0" i="1" smtClean="0">
+                            <a:latin typeface="Cambria Math" panose="02040503050406030204" pitchFamily="18" charset="0"/>
+                          </a:rPr>
+                        </m:ctrlPr>
+                      </m:sSubPr>
+                      <m:e>
+                        <m:r>
+                          <a:rPr lang="en-US" b="0" i="1" smtClean="0">
+                            <a:latin typeface="Cambria Math" panose="02040503050406030204" pitchFamily="18" charset="0"/>
+                          </a:rPr>
+                          <m:t>𝑥</m:t>
+                        </m:r>
+                      </m:e>
+                      <m:sub>
+                        <m:r>
+                          <a:rPr lang="en-US" b="0" i="1" smtClean="0">
+                            <a:latin typeface="Cambria Math" panose="02040503050406030204" pitchFamily="18" charset="0"/>
+                          </a:rPr>
+                          <m:t>𝑖</m:t>
+                        </m:r>
+                      </m:sub>
+                    </m:sSub>
+                    <m:r>
+                      <a:rPr lang="en-US" b="0" i="1" smtClean="0">
+                        <a:latin typeface="Cambria Math" panose="02040503050406030204" pitchFamily="18" charset="0"/>
+                      </a:rPr>
+                      <m:t>]</m:t>
+                    </m:r>
+                  </m:oMath>
+                </a14:m>
+                <a:r>
+                  <a:rPr lang="en-SG" dirty="0"/>
+                  <a:t>, assuming a signal from </a:t>
+                </a:r>
+                <a14:m>
+                  <m:oMath xmlns:m="http://schemas.openxmlformats.org/officeDocument/2006/math">
+                    <m:r>
+                      <a:rPr lang="en-US" b="0" i="1" smtClean="0">
+                        <a:latin typeface="Cambria Math" panose="02040503050406030204" pitchFamily="18" charset="0"/>
+                      </a:rPr>
+                      <m:t>𝑥</m:t>
+                    </m:r>
+                    <m:d>
+                      <m:dPr>
+                        <m:ctrlPr>
+                          <a:rPr lang="en-US" b="0" i="1" smtClean="0">
+                            <a:latin typeface="Cambria Math" panose="02040503050406030204" pitchFamily="18" charset="0"/>
+                          </a:rPr>
+                        </m:ctrlPr>
+                      </m:dPr>
+                      <m:e>
+                        <m:r>
+                          <a:rPr lang="en-US" b="0" i="1" smtClean="0">
+                            <a:latin typeface="Cambria Math" panose="02040503050406030204" pitchFamily="18" charset="0"/>
+                          </a:rPr>
+                          <m:t>𝑡</m:t>
+                        </m:r>
+                      </m:e>
+                    </m:d>
+                    <m:r>
+                      <a:rPr lang="en-US" b="0" i="1" smtClean="0">
+                        <a:latin typeface="Cambria Math" panose="02040503050406030204" pitchFamily="18" charset="0"/>
+                      </a:rPr>
+                      <m:t>=</m:t>
+                    </m:r>
+                    <m:sSup>
+                      <m:sSupPr>
+                        <m:ctrlPr>
+                          <a:rPr lang="en-US" b="0" i="1" smtClean="0">
+                            <a:latin typeface="Cambria Math" panose="02040503050406030204" pitchFamily="18" charset="0"/>
+                          </a:rPr>
+                        </m:ctrlPr>
+                      </m:sSupPr>
+                      <m:e>
+                        <m:r>
+                          <a:rPr lang="en-US" b="0" i="1" smtClean="0">
+                            <a:latin typeface="Cambria Math" panose="02040503050406030204" pitchFamily="18" charset="0"/>
+                          </a:rPr>
+                          <m:t>𝑒</m:t>
+                        </m:r>
+                      </m:e>
+                      <m:sup>
+                        <m:r>
+                          <a:rPr lang="en-US" b="0" i="1" smtClean="0">
+                            <a:latin typeface="Cambria Math" panose="02040503050406030204" pitchFamily="18" charset="0"/>
+                          </a:rPr>
+                          <m:t>−</m:t>
+                        </m:r>
+                        <m:r>
+                          <a:rPr lang="en-US" b="0" i="1" smtClean="0">
+                            <a:latin typeface="Cambria Math" panose="02040503050406030204" pitchFamily="18" charset="0"/>
+                          </a:rPr>
+                          <m:t>𝛾</m:t>
+                        </m:r>
+                        <m:r>
+                          <a:rPr lang="en-US" b="0" i="1" smtClean="0">
+                            <a:latin typeface="Cambria Math" panose="02040503050406030204" pitchFamily="18" charset="0"/>
+                          </a:rPr>
+                          <m:t>𝑡</m:t>
+                        </m:r>
+                      </m:sup>
+                    </m:sSup>
+                    <m:func>
+                      <m:funcPr>
+                        <m:ctrlPr>
+                          <a:rPr lang="en-US" b="0" i="0" smtClean="0">
+                            <a:latin typeface="Cambria Math" panose="02040503050406030204" pitchFamily="18" charset="0"/>
+                          </a:rPr>
+                        </m:ctrlPr>
+                      </m:funcPr>
+                      <m:fName>
+                        <m:r>
+                          <m:rPr>
+                            <m:sty m:val="p"/>
+                          </m:rPr>
+                          <a:rPr lang="en-US" b="0" i="0" smtClean="0">
+                            <a:latin typeface="Cambria Math" panose="02040503050406030204" pitchFamily="18" charset="0"/>
+                          </a:rPr>
+                          <m:t>cos</m:t>
+                        </m:r>
+                      </m:fName>
+                      <m:e>
+                        <m:r>
+                          <a:rPr lang="en-US" b="0" i="1" smtClean="0">
+                            <a:latin typeface="Cambria Math" panose="02040503050406030204" pitchFamily="18" charset="0"/>
+                          </a:rPr>
+                          <m:t>(</m:t>
+                        </m:r>
+                        <m:r>
+                          <a:rPr lang="en-US" b="0" i="1" smtClean="0">
+                            <a:latin typeface="Cambria Math" panose="02040503050406030204" pitchFamily="18" charset="0"/>
+                          </a:rPr>
+                          <m:t>𝜔</m:t>
+                        </m:r>
+                        <m:r>
+                          <a:rPr lang="en-US" b="0" i="1" smtClean="0">
+                            <a:latin typeface="Cambria Math" panose="02040503050406030204" pitchFamily="18" charset="0"/>
+                          </a:rPr>
+                          <m:t>𝑡</m:t>
+                        </m:r>
+                        <m:r>
+                          <a:rPr lang="en-US" b="0" i="1" smtClean="0">
+                            <a:latin typeface="Cambria Math" panose="02040503050406030204" pitchFamily="18" charset="0"/>
+                          </a:rPr>
+                          <m:t>)</m:t>
+                        </m:r>
+                      </m:e>
+                    </m:func>
+                  </m:oMath>
+                </a14:m>
+                <a:endParaRPr lang="en-SG" dirty="0"/>
+              </a:p>
+              <a:p>
+                <a:endParaRPr lang="en-SG" dirty="0"/>
+              </a:p>
+              <a:p>
+                <a:r>
+                  <a:rPr lang="en-SG" dirty="0"/>
+                  <a:t>2) Lorenz-system time series:</a:t>
+                </a:r>
+              </a:p>
+              <a:p>
+                <a:pPr marL="0" indent="0">
+                  <a:buNone/>
+                </a:pPr>
+                <a:r>
+                  <a:rPr lang="en-SG" dirty="0"/>
+                  <a:t>	 </a:t>
+                </a:r>
+                <a14:m>
+                  <m:oMath xmlns:m="http://schemas.openxmlformats.org/officeDocument/2006/math">
+                    <m:acc>
+                      <m:accPr>
+                        <m:chr m:val="̇"/>
+                        <m:ctrlPr>
+                          <a:rPr lang="en-US" b="0" i="1" smtClean="0">
+                            <a:latin typeface="Cambria Math" panose="02040503050406030204" pitchFamily="18" charset="0"/>
+                          </a:rPr>
+                        </m:ctrlPr>
+                      </m:accPr>
+                      <m:e>
+                        <m:r>
+                          <a:rPr lang="en-US" b="0" i="1" smtClean="0">
+                            <a:latin typeface="Cambria Math" panose="02040503050406030204" pitchFamily="18" charset="0"/>
+                          </a:rPr>
+                          <m:t>𝑥</m:t>
+                        </m:r>
+                      </m:e>
+                    </m:acc>
+                    <m:r>
+                      <a:rPr lang="en-US" b="0" i="1" dirty="0" smtClean="0">
+                        <a:latin typeface="Cambria Math" panose="02040503050406030204" pitchFamily="18" charset="0"/>
+                      </a:rPr>
+                      <m:t>=</m:t>
+                    </m:r>
+                    <m:d>
+                      <m:dPr>
+                        <m:ctrlPr>
+                          <a:rPr lang="en-US" b="0" i="1" dirty="0" smtClean="0">
+                            <a:latin typeface="Cambria Math" panose="02040503050406030204" pitchFamily="18" charset="0"/>
+                          </a:rPr>
+                        </m:ctrlPr>
+                      </m:dPr>
+                      <m:e>
+                        <m:r>
+                          <a:rPr lang="en-US" b="0" i="1" dirty="0" smtClean="0">
+                            <a:latin typeface="Cambria Math" panose="02040503050406030204" pitchFamily="18" charset="0"/>
+                          </a:rPr>
+                          <m:t>𝑦</m:t>
+                        </m:r>
+                        <m:r>
+                          <a:rPr lang="en-US" b="0" i="1" dirty="0" smtClean="0">
+                            <a:latin typeface="Cambria Math" panose="02040503050406030204" pitchFamily="18" charset="0"/>
+                          </a:rPr>
+                          <m:t>−</m:t>
+                        </m:r>
+                        <m:r>
+                          <a:rPr lang="en-US" b="0" i="1" dirty="0" smtClean="0">
+                            <a:latin typeface="Cambria Math" panose="02040503050406030204" pitchFamily="18" charset="0"/>
+                          </a:rPr>
+                          <m:t>𝑥</m:t>
+                        </m:r>
+                      </m:e>
+                    </m:d>
+                    <m:r>
+                      <a:rPr lang="en-US" b="0" i="1" dirty="0" smtClean="0">
+                        <a:latin typeface="Cambria Math" panose="02040503050406030204" pitchFamily="18" charset="0"/>
+                      </a:rPr>
+                      <m:t>𝜎</m:t>
+                    </m:r>
+                    <m:r>
+                      <a:rPr lang="en-US" b="0" i="1" dirty="0" smtClean="0">
+                        <a:latin typeface="Cambria Math" panose="02040503050406030204" pitchFamily="18" charset="0"/>
+                      </a:rPr>
+                      <m:t>,</m:t>
+                    </m:r>
+                  </m:oMath>
+                </a14:m>
+                <a:r>
+                  <a:rPr lang="en-SG" dirty="0"/>
+                  <a:t> </a:t>
+                </a:r>
+              </a:p>
+              <a:p>
+                <a:pPr marL="0" indent="0">
+                  <a:buNone/>
+                </a:pPr>
+                <a:r>
+                  <a:rPr lang="en-US" b="0" dirty="0"/>
+                  <a:t>	</a:t>
+                </a:r>
+                <a14:m>
+                  <m:oMath xmlns:m="http://schemas.openxmlformats.org/officeDocument/2006/math">
+                    <m:r>
+                      <a:rPr lang="en-US" b="0" i="1" dirty="0" smtClean="0">
+                        <a:latin typeface="Cambria Math" panose="02040503050406030204" pitchFamily="18" charset="0"/>
+                      </a:rPr>
+                      <m:t> </m:t>
+                    </m:r>
+                    <m:acc>
+                      <m:accPr>
+                        <m:chr m:val="̇"/>
+                        <m:ctrlPr>
+                          <a:rPr lang="en-US" b="0" i="1" dirty="0" smtClean="0">
+                            <a:latin typeface="Cambria Math" panose="02040503050406030204" pitchFamily="18" charset="0"/>
+                          </a:rPr>
+                        </m:ctrlPr>
+                      </m:accPr>
+                      <m:e>
+                        <m:r>
+                          <a:rPr lang="en-US" b="0" i="1" dirty="0" smtClean="0">
+                            <a:latin typeface="Cambria Math" panose="02040503050406030204" pitchFamily="18" charset="0"/>
+                          </a:rPr>
+                          <m:t>𝑦</m:t>
+                        </m:r>
+                      </m:e>
+                    </m:acc>
+                    <m:r>
+                      <a:rPr lang="en-US" b="0" i="1" dirty="0" smtClean="0">
+                        <a:latin typeface="Cambria Math" panose="02040503050406030204" pitchFamily="18" charset="0"/>
+                      </a:rPr>
+                      <m:t>=</m:t>
+                    </m:r>
+                    <m:r>
+                      <a:rPr lang="en-US" b="0" i="1" dirty="0" smtClean="0">
+                        <a:latin typeface="Cambria Math" panose="02040503050406030204" pitchFamily="18" charset="0"/>
+                      </a:rPr>
+                      <m:t>𝑥</m:t>
+                    </m:r>
+                    <m:d>
+                      <m:dPr>
+                        <m:ctrlPr>
+                          <a:rPr lang="en-US" b="0" i="1" dirty="0" smtClean="0">
+                            <a:latin typeface="Cambria Math" panose="02040503050406030204" pitchFamily="18" charset="0"/>
+                          </a:rPr>
+                        </m:ctrlPr>
+                      </m:dPr>
+                      <m:e>
+                        <m:r>
+                          <a:rPr lang="en-US" b="0" i="1" dirty="0" smtClean="0">
+                            <a:latin typeface="Cambria Math" panose="02040503050406030204" pitchFamily="18" charset="0"/>
+                          </a:rPr>
+                          <m:t>𝜌</m:t>
+                        </m:r>
+                        <m:r>
+                          <a:rPr lang="en-US" b="0" i="1" dirty="0" smtClean="0">
+                            <a:latin typeface="Cambria Math" panose="02040503050406030204" pitchFamily="18" charset="0"/>
+                          </a:rPr>
+                          <m:t>−</m:t>
+                        </m:r>
+                        <m:r>
+                          <a:rPr lang="en-US" b="0" i="1" dirty="0" smtClean="0">
+                            <a:latin typeface="Cambria Math" panose="02040503050406030204" pitchFamily="18" charset="0"/>
+                          </a:rPr>
+                          <m:t>𝑧</m:t>
+                        </m:r>
+                      </m:e>
+                    </m:d>
+                    <m:r>
+                      <a:rPr lang="en-US" b="0" i="1" dirty="0" smtClean="0">
+                        <a:latin typeface="Cambria Math" panose="02040503050406030204" pitchFamily="18" charset="0"/>
+                      </a:rPr>
+                      <m:t>−</m:t>
+                    </m:r>
+                    <m:r>
+                      <a:rPr lang="en-US" b="0" i="1" dirty="0" smtClean="0">
+                        <a:latin typeface="Cambria Math" panose="02040503050406030204" pitchFamily="18" charset="0"/>
+                      </a:rPr>
+                      <m:t>𝑦</m:t>
+                    </m:r>
+                    <m:r>
+                      <a:rPr lang="en-US" b="0" i="1" dirty="0" smtClean="0">
+                        <a:latin typeface="Cambria Math" panose="02040503050406030204" pitchFamily="18" charset="0"/>
+                      </a:rPr>
+                      <m:t>,</m:t>
+                    </m:r>
+                  </m:oMath>
+                </a14:m>
+                <a:r>
+                  <a:rPr lang="en-SG" dirty="0"/>
+                  <a:t> </a:t>
+                </a:r>
+              </a:p>
+              <a:p>
+                <a:pPr marL="0" indent="0">
+                  <a:buNone/>
+                </a:pPr>
+                <a:r>
+                  <a:rPr lang="en-SG" dirty="0"/>
+                  <a:t>	 </a:t>
+                </a:r>
+                <a14:m>
+                  <m:oMath xmlns:m="http://schemas.openxmlformats.org/officeDocument/2006/math">
+                    <m:acc>
+                      <m:accPr>
+                        <m:chr m:val="̇"/>
+                        <m:ctrlPr>
+                          <a:rPr lang="en-US" b="0" i="1" smtClean="0">
+                            <a:latin typeface="Cambria Math" panose="02040503050406030204" pitchFamily="18" charset="0"/>
+                          </a:rPr>
+                        </m:ctrlPr>
+                      </m:accPr>
+                      <m:e>
+                        <m:r>
+                          <a:rPr lang="en-US" b="0" i="1" smtClean="0">
+                            <a:latin typeface="Cambria Math" panose="02040503050406030204" pitchFamily="18" charset="0"/>
+                          </a:rPr>
+                          <m:t>𝑧</m:t>
+                        </m:r>
+                      </m:e>
+                    </m:acc>
+                    <m:r>
+                      <a:rPr lang="en-US" b="0" i="1" smtClean="0">
+                        <a:latin typeface="Cambria Math" panose="02040503050406030204" pitchFamily="18" charset="0"/>
+                      </a:rPr>
+                      <m:t>=</m:t>
+                    </m:r>
+                    <m:r>
+                      <a:rPr lang="en-US" b="0" i="1" smtClean="0">
+                        <a:latin typeface="Cambria Math" panose="02040503050406030204" pitchFamily="18" charset="0"/>
+                      </a:rPr>
+                      <m:t>𝑥𝑦</m:t>
+                    </m:r>
+                    <m:r>
+                      <a:rPr lang="en-US" b="0" i="1" smtClean="0">
+                        <a:latin typeface="Cambria Math" panose="02040503050406030204" pitchFamily="18" charset="0"/>
+                      </a:rPr>
+                      <m:t>−</m:t>
+                    </m:r>
+                    <m:r>
+                      <a:rPr lang="en-US" b="0" i="1" smtClean="0">
+                        <a:latin typeface="Cambria Math" panose="02040503050406030204" pitchFamily="18" charset="0"/>
+                      </a:rPr>
+                      <m:t>𝛽</m:t>
+                    </m:r>
+                    <m:r>
+                      <a:rPr lang="en-US" b="0" i="1" smtClean="0">
+                        <a:latin typeface="Cambria Math" panose="02040503050406030204" pitchFamily="18" charset="0"/>
+                      </a:rPr>
+                      <m:t>𝑦</m:t>
+                    </m:r>
+                    <m:r>
+                      <a:rPr lang="en-US" b="0" i="1" smtClean="0">
+                        <a:latin typeface="Cambria Math" panose="02040503050406030204" pitchFamily="18" charset="0"/>
+                      </a:rPr>
+                      <m:t>,</m:t>
+                    </m:r>
+                  </m:oMath>
+                </a14:m>
+                <a:r>
+                  <a:rPr lang="en-SG" dirty="0"/>
+                  <a:t> </a:t>
+                </a:r>
+              </a:p>
+              <a:p>
+                <a:pPr marL="0" indent="0">
+                  <a:buNone/>
+                </a:pPr>
+                <a:r>
+                  <a:rPr lang="en-SG" dirty="0"/>
+                  <a:t>use previous states to predict the next </a:t>
+                </a:r>
+                <a14:m>
+                  <m:oMath xmlns:m="http://schemas.openxmlformats.org/officeDocument/2006/math">
+                    <m:r>
+                      <a:rPr lang="en-US" b="0" i="1" smtClean="0">
+                        <a:latin typeface="Cambria Math" panose="02040503050406030204" pitchFamily="18" charset="0"/>
+                      </a:rPr>
+                      <m:t>(</m:t>
+                    </m:r>
+                    <m:r>
+                      <a:rPr lang="en-US" b="0" i="1" smtClean="0">
+                        <a:latin typeface="Cambria Math" panose="02040503050406030204" pitchFamily="18" charset="0"/>
+                      </a:rPr>
+                      <m:t>𝑥</m:t>
+                    </m:r>
+                    <m:r>
+                      <a:rPr lang="en-US" b="0" i="1" smtClean="0">
+                        <a:latin typeface="Cambria Math" panose="02040503050406030204" pitchFamily="18" charset="0"/>
+                      </a:rPr>
+                      <m:t>,</m:t>
+                    </m:r>
+                    <m:r>
+                      <a:rPr lang="en-US" b="0" i="1" smtClean="0">
+                        <a:latin typeface="Cambria Math" panose="02040503050406030204" pitchFamily="18" charset="0"/>
+                      </a:rPr>
+                      <m:t>𝑦</m:t>
+                    </m:r>
+                    <m:r>
+                      <a:rPr lang="en-US" b="0" i="1" smtClean="0">
+                        <a:latin typeface="Cambria Math" panose="02040503050406030204" pitchFamily="18" charset="0"/>
+                      </a:rPr>
+                      <m:t>,</m:t>
+                    </m:r>
+                    <m:r>
+                      <a:rPr lang="en-US" b="0" i="1" smtClean="0">
+                        <a:latin typeface="Cambria Math" panose="02040503050406030204" pitchFamily="18" charset="0"/>
+                      </a:rPr>
+                      <m:t>𝑧</m:t>
+                    </m:r>
+                    <m:r>
+                      <a:rPr lang="en-US" b="0" i="1" smtClean="0">
+                        <a:latin typeface="Cambria Math" panose="02040503050406030204" pitchFamily="18" charset="0"/>
+                      </a:rPr>
+                      <m:t>)</m:t>
+                    </m:r>
+                  </m:oMath>
+                </a14:m>
+                <a:endParaRPr lang="en-SG" dirty="0"/>
+              </a:p>
+            </p:txBody>
+          </p:sp>
+        </mc:Choice>
+        <mc:Fallback>
+          <p:sp>
+            <p:nvSpPr>
+              <p:cNvPr id="3" name="Content Placeholder 2">
+                <a:extLst>
+                  <a:ext uri="{FF2B5EF4-FFF2-40B4-BE49-F238E27FC236}">
+                    <a16:creationId xmlns:a16="http://schemas.microsoft.com/office/drawing/2014/main" id="{D49FDB62-6861-296D-8F9C-035BDB58DF28}"/>
+                  </a:ext>
+                </a:extLst>
+              </p:cNvPr>
+              <p:cNvSpPr>
+                <a:spLocks noGrp="1" noRot="1" noChangeAspect="1" noMove="1" noResize="1" noEditPoints="1" noAdjustHandles="1" noChangeArrowheads="1" noChangeShapeType="1" noTextEdit="1"/>
+              </p:cNvSpPr>
+              <p:nvPr>
+                <p:ph idx="1"/>
+              </p:nvPr>
+            </p:nvSpPr>
+            <p:spPr>
+              <a:blipFill>
+                <a:blip r:embed="rId2"/>
+                <a:stretch>
+                  <a:fillRect l="-1546" t="-3361"/>
+                </a:stretch>
+              </a:blipFill>
+            </p:spPr>
+            <p:txBody>
+              <a:bodyPr/>
+              <a:lstStyle/>
+              <a:p>
+                <a:r>
+                  <a:rPr lang="en-SG">
+                    <a:noFill/>
+                  </a:rPr>
+                  <a:t> </a:t>
+                </a:r>
+              </a:p>
+            </p:txBody>
+          </p:sp>
+        </mc:Fallback>
+      </mc:AlternateContent>
+    </p:spTree>
+    <p:extLst>
+      <p:ext uri="{BB962C8B-B14F-4D97-AF65-F5344CB8AC3E}">
+        <p14:creationId xmlns:p14="http://schemas.microsoft.com/office/powerpoint/2010/main" val="3737468761"/>
+      </p:ext>
+    </p:extLst>
+  </p:cSld>
+  <p:clrMapOvr>
+    <a:masterClrMapping/>
+  </p:clrMapOvr>
+</p:sld>
+</file>
+
+<file path=ppt/slides/slide17.xml><?xml version="1.0" encoding="utf-8"?>
+<p:sld xmlns:a="http://schemas.openxmlformats.org/drawingml/2006/main" xmlns:r="http://schemas.openxmlformats.org/officeDocument/2006/relationships" xmlns:p="http://schemas.openxmlformats.org/presentationml/2006/main">
+  <p:cSld>
+    <p:spTree>
+      <p:nvGrpSpPr>
+        <p:cNvPr id="1" name=""/>
+        <p:cNvGrpSpPr/>
+        <p:nvPr/>
+      </p:nvGrpSpPr>
+      <p:grpSpPr>
+        <a:xfrm>
+          <a:off x="0" y="0"/>
+          <a:ext cx="0" cy="0"/>
+          <a:chOff x="0" y="0"/>
+          <a:chExt cx="0" cy="0"/>
+        </a:xfrm>
+      </p:grpSpPr>
+      <p:sp>
+        <p:nvSpPr>
+          <p:cNvPr id="2" name="Title 1">
+            <a:extLst>
+              <a:ext uri="{FF2B5EF4-FFF2-40B4-BE49-F238E27FC236}">
+                <a16:creationId xmlns:a16="http://schemas.microsoft.com/office/drawing/2014/main" id="{35F92F96-B088-8AA4-92E9-FA9A0C910C2E}"/>
+              </a:ext>
+            </a:extLst>
+          </p:cNvPr>
+          <p:cNvSpPr>
+            <a:spLocks noGrp="1"/>
+          </p:cNvSpPr>
+          <p:nvPr>
+            <p:ph type="title"/>
+          </p:nvPr>
+        </p:nvSpPr>
+        <p:spPr/>
+        <p:txBody>
+          <a:bodyPr/>
+          <a:lstStyle/>
+          <a:p>
+            <a:r>
+              <a:rPr lang="en-US" dirty="0"/>
+              <a:t>Example, damped-oscillation</a:t>
+            </a:r>
+            <a:endParaRPr lang="en-SG" dirty="0"/>
+          </a:p>
+        </p:txBody>
+      </p:sp>
+      <p:sp>
+        <p:nvSpPr>
+          <p:cNvPr id="4" name="TextBox 3">
+            <a:extLst>
+              <a:ext uri="{FF2B5EF4-FFF2-40B4-BE49-F238E27FC236}">
+                <a16:creationId xmlns:a16="http://schemas.microsoft.com/office/drawing/2014/main" id="{0EB2B38A-582C-3260-5626-BE5C32B786C1}"/>
+              </a:ext>
+            </a:extLst>
+          </p:cNvPr>
+          <p:cNvSpPr txBox="1"/>
+          <p:nvPr/>
+        </p:nvSpPr>
+        <p:spPr>
+          <a:xfrm>
+            <a:off x="734439" y="2699425"/>
+            <a:ext cx="8409561" cy="2862322"/>
+          </a:xfrm>
+          <a:prstGeom prst="rect">
+            <a:avLst/>
+          </a:prstGeom>
+          <a:noFill/>
+        </p:spPr>
+        <p:txBody>
+          <a:bodyPr wrap="square" rtlCol="0">
+            <a:spAutoFit/>
+          </a:bodyPr>
+          <a:lstStyle/>
+          <a:p>
+            <a:r>
+              <a:rPr lang="en-SG" b="1" dirty="0">
+                <a:latin typeface="Courier New" panose="02070309020205020404" pitchFamily="49" charset="0"/>
+                <a:cs typeface="Courier New" panose="02070309020205020404" pitchFamily="49" charset="0"/>
+              </a:rPr>
+              <a:t>class LSTM(</a:t>
+            </a:r>
+            <a:r>
+              <a:rPr lang="en-SG" b="1" dirty="0" err="1">
+                <a:latin typeface="Courier New" panose="02070309020205020404" pitchFamily="49" charset="0"/>
+                <a:cs typeface="Courier New" panose="02070309020205020404" pitchFamily="49" charset="0"/>
+              </a:rPr>
+              <a:t>nn.Module</a:t>
+            </a:r>
+            <a:r>
+              <a:rPr lang="en-SG" b="1" dirty="0">
+                <a:latin typeface="Courier New" panose="02070309020205020404" pitchFamily="49" charset="0"/>
+                <a:cs typeface="Courier New" panose="02070309020205020404" pitchFamily="49" charset="0"/>
+              </a:rPr>
+              <a:t>):</a:t>
+            </a:r>
+          </a:p>
+          <a:p>
+            <a:r>
+              <a:rPr lang="en-SG" b="1" dirty="0">
+                <a:latin typeface="Courier New" panose="02070309020205020404" pitchFamily="49" charset="0"/>
+                <a:cs typeface="Courier New" panose="02070309020205020404" pitchFamily="49" charset="0"/>
+              </a:rPr>
+              <a:t>    def __</a:t>
+            </a:r>
+            <a:r>
+              <a:rPr lang="en-SG" b="1" dirty="0" err="1">
+                <a:latin typeface="Courier New" panose="02070309020205020404" pitchFamily="49" charset="0"/>
+                <a:cs typeface="Courier New" panose="02070309020205020404" pitchFamily="49" charset="0"/>
+              </a:rPr>
+              <a:t>init</a:t>
+            </a:r>
+            <a:r>
+              <a:rPr lang="en-SG" b="1" dirty="0">
+                <a:latin typeface="Courier New" panose="02070309020205020404" pitchFamily="49" charset="0"/>
+                <a:cs typeface="Courier New" panose="02070309020205020404" pitchFamily="49" charset="0"/>
+              </a:rPr>
+              <a:t>__(self, </a:t>
+            </a:r>
+            <a:r>
+              <a:rPr lang="en-SG" b="1" dirty="0" err="1">
+                <a:latin typeface="Courier New" panose="02070309020205020404" pitchFamily="49" charset="0"/>
+                <a:cs typeface="Courier New" panose="02070309020205020404" pitchFamily="49" charset="0"/>
+              </a:rPr>
+              <a:t>n_hidden</a:t>
+            </a:r>
+            <a:r>
+              <a:rPr lang="en-SG" b="1" dirty="0">
+                <a:latin typeface="Courier New" panose="02070309020205020404" pitchFamily="49" charset="0"/>
+                <a:cs typeface="Courier New" panose="02070309020205020404" pitchFamily="49" charset="0"/>
+              </a:rPr>
+              <a:t>):</a:t>
+            </a:r>
+          </a:p>
+          <a:p>
+            <a:r>
+              <a:rPr lang="en-SG" b="1" dirty="0">
+                <a:latin typeface="Courier New" panose="02070309020205020404" pitchFamily="49" charset="0"/>
+                <a:cs typeface="Courier New" panose="02070309020205020404" pitchFamily="49" charset="0"/>
+              </a:rPr>
+              <a:t>        super().__</a:t>
+            </a:r>
+            <a:r>
+              <a:rPr lang="en-SG" b="1" dirty="0" err="1">
+                <a:latin typeface="Courier New" panose="02070309020205020404" pitchFamily="49" charset="0"/>
+                <a:cs typeface="Courier New" panose="02070309020205020404" pitchFamily="49" charset="0"/>
+              </a:rPr>
+              <a:t>init</a:t>
+            </a:r>
+            <a:r>
+              <a:rPr lang="en-SG" b="1" dirty="0">
+                <a:latin typeface="Courier New" panose="02070309020205020404" pitchFamily="49" charset="0"/>
+                <a:cs typeface="Courier New" panose="02070309020205020404" pitchFamily="49" charset="0"/>
+              </a:rPr>
+              <a:t>__()</a:t>
+            </a:r>
+          </a:p>
+          <a:p>
+            <a:r>
+              <a:rPr lang="en-SG" b="1" dirty="0">
+                <a:latin typeface="Courier New" panose="02070309020205020404" pitchFamily="49" charset="0"/>
+                <a:cs typeface="Courier New" panose="02070309020205020404" pitchFamily="49" charset="0"/>
+              </a:rPr>
+              <a:t>        </a:t>
+            </a:r>
+            <a:r>
+              <a:rPr lang="en-SG" b="1" dirty="0" err="1">
+                <a:latin typeface="Courier New" panose="02070309020205020404" pitchFamily="49" charset="0"/>
+                <a:cs typeface="Courier New" panose="02070309020205020404" pitchFamily="49" charset="0"/>
+              </a:rPr>
+              <a:t>self.lstm</a:t>
+            </a:r>
+            <a:r>
+              <a:rPr lang="en-SG" b="1" dirty="0">
+                <a:latin typeface="Courier New" panose="02070309020205020404" pitchFamily="49" charset="0"/>
+                <a:cs typeface="Courier New" panose="02070309020205020404" pitchFamily="49" charset="0"/>
+              </a:rPr>
+              <a:t> = </a:t>
+            </a:r>
+            <a:r>
+              <a:rPr lang="en-SG" b="1" dirty="0" err="1">
+                <a:latin typeface="Courier New" panose="02070309020205020404" pitchFamily="49" charset="0"/>
+                <a:cs typeface="Courier New" panose="02070309020205020404" pitchFamily="49" charset="0"/>
+              </a:rPr>
+              <a:t>nn.LSTM</a:t>
+            </a:r>
+            <a:r>
+              <a:rPr lang="en-SG" b="1" dirty="0">
+                <a:latin typeface="Courier New" panose="02070309020205020404" pitchFamily="49" charset="0"/>
+                <a:cs typeface="Courier New" panose="02070309020205020404" pitchFamily="49" charset="0"/>
+              </a:rPr>
+              <a:t>(1, </a:t>
+            </a:r>
+            <a:r>
+              <a:rPr lang="en-SG" b="1" dirty="0" err="1">
+                <a:latin typeface="Courier New" panose="02070309020205020404" pitchFamily="49" charset="0"/>
+                <a:cs typeface="Courier New" panose="02070309020205020404" pitchFamily="49" charset="0"/>
+              </a:rPr>
+              <a:t>n_hidden</a:t>
+            </a:r>
+            <a:r>
+              <a:rPr lang="en-SG" b="1" dirty="0">
+                <a:latin typeface="Courier New" panose="02070309020205020404" pitchFamily="49" charset="0"/>
+                <a:cs typeface="Courier New" panose="02070309020205020404" pitchFamily="49" charset="0"/>
+              </a:rPr>
+              <a:t>, </a:t>
+            </a:r>
+            <a:r>
+              <a:rPr lang="en-SG" b="1" dirty="0" err="1">
+                <a:latin typeface="Courier New" panose="02070309020205020404" pitchFamily="49" charset="0"/>
+                <a:cs typeface="Courier New" panose="02070309020205020404" pitchFamily="49" charset="0"/>
+              </a:rPr>
+              <a:t>batch_first</a:t>
+            </a:r>
+            <a:r>
+              <a:rPr lang="en-SG" b="1" dirty="0">
+                <a:latin typeface="Courier New" panose="02070309020205020404" pitchFamily="49" charset="0"/>
+                <a:cs typeface="Courier New" panose="02070309020205020404" pitchFamily="49" charset="0"/>
+              </a:rPr>
+              <a:t>=True)</a:t>
+            </a:r>
+          </a:p>
+          <a:p>
+            <a:r>
+              <a:rPr lang="en-SG" b="1" dirty="0">
+                <a:latin typeface="Courier New" panose="02070309020205020404" pitchFamily="49" charset="0"/>
+                <a:cs typeface="Courier New" panose="02070309020205020404" pitchFamily="49" charset="0"/>
+              </a:rPr>
+              <a:t>        </a:t>
+            </a:r>
+            <a:r>
+              <a:rPr lang="en-SG" b="1" dirty="0" err="1">
+                <a:latin typeface="Courier New" panose="02070309020205020404" pitchFamily="49" charset="0"/>
+                <a:cs typeface="Courier New" panose="02070309020205020404" pitchFamily="49" charset="0"/>
+              </a:rPr>
+              <a:t>self.fc</a:t>
+            </a:r>
+            <a:r>
+              <a:rPr lang="en-SG" b="1" dirty="0">
+                <a:latin typeface="Courier New" panose="02070309020205020404" pitchFamily="49" charset="0"/>
+                <a:cs typeface="Courier New" panose="02070309020205020404" pitchFamily="49" charset="0"/>
+              </a:rPr>
+              <a:t> = </a:t>
+            </a:r>
+            <a:r>
+              <a:rPr lang="en-SG" b="1" dirty="0" err="1">
+                <a:latin typeface="Courier New" panose="02070309020205020404" pitchFamily="49" charset="0"/>
+                <a:cs typeface="Courier New" panose="02070309020205020404" pitchFamily="49" charset="0"/>
+              </a:rPr>
+              <a:t>nn.Linear</a:t>
+            </a:r>
+            <a:r>
+              <a:rPr lang="en-SG" b="1" dirty="0">
+                <a:latin typeface="Courier New" panose="02070309020205020404" pitchFamily="49" charset="0"/>
+                <a:cs typeface="Courier New" panose="02070309020205020404" pitchFamily="49" charset="0"/>
+              </a:rPr>
+              <a:t>(</a:t>
+            </a:r>
+            <a:r>
+              <a:rPr lang="en-SG" b="1" dirty="0" err="1">
+                <a:latin typeface="Courier New" panose="02070309020205020404" pitchFamily="49" charset="0"/>
+                <a:cs typeface="Courier New" panose="02070309020205020404" pitchFamily="49" charset="0"/>
+              </a:rPr>
+              <a:t>n_hidden</a:t>
+            </a:r>
+            <a:r>
+              <a:rPr lang="en-SG" b="1" dirty="0">
+                <a:latin typeface="Courier New" panose="02070309020205020404" pitchFamily="49" charset="0"/>
+                <a:cs typeface="Courier New" panose="02070309020205020404" pitchFamily="49" charset="0"/>
+              </a:rPr>
+              <a:t>, 1)</a:t>
+            </a:r>
+          </a:p>
+          <a:p>
+            <a:endParaRPr lang="en-SG" b="1" dirty="0">
+              <a:latin typeface="Courier New" panose="02070309020205020404" pitchFamily="49" charset="0"/>
+              <a:cs typeface="Courier New" panose="02070309020205020404" pitchFamily="49" charset="0"/>
+            </a:endParaRPr>
+          </a:p>
+          <a:p>
+            <a:r>
+              <a:rPr lang="en-SG" b="1" dirty="0">
+                <a:latin typeface="Courier New" panose="02070309020205020404" pitchFamily="49" charset="0"/>
+                <a:cs typeface="Courier New" panose="02070309020205020404" pitchFamily="49" charset="0"/>
+              </a:rPr>
+              <a:t>    def forward(self, x):</a:t>
+            </a:r>
+          </a:p>
+          <a:p>
+            <a:r>
+              <a:rPr lang="en-SG" b="1" dirty="0">
+                <a:latin typeface="Courier New" panose="02070309020205020404" pitchFamily="49" charset="0"/>
+                <a:cs typeface="Courier New" panose="02070309020205020404" pitchFamily="49" charset="0"/>
+              </a:rPr>
+              <a:t>        h, _ = </a:t>
+            </a:r>
+            <a:r>
+              <a:rPr lang="en-SG" b="1" dirty="0" err="1">
+                <a:latin typeface="Courier New" panose="02070309020205020404" pitchFamily="49" charset="0"/>
+                <a:cs typeface="Courier New" panose="02070309020205020404" pitchFamily="49" charset="0"/>
+              </a:rPr>
+              <a:t>self.lstm</a:t>
+            </a:r>
+            <a:r>
+              <a:rPr lang="en-SG" b="1" dirty="0">
+                <a:latin typeface="Courier New" panose="02070309020205020404" pitchFamily="49" charset="0"/>
+                <a:cs typeface="Courier New" panose="02070309020205020404" pitchFamily="49" charset="0"/>
+              </a:rPr>
+              <a:t>(x)</a:t>
+            </a:r>
+          </a:p>
+          <a:p>
+            <a:r>
+              <a:rPr lang="en-SG" b="1" dirty="0">
+                <a:latin typeface="Courier New" panose="02070309020205020404" pitchFamily="49" charset="0"/>
+                <a:cs typeface="Courier New" panose="02070309020205020404" pitchFamily="49" charset="0"/>
+              </a:rPr>
+              <a:t>        y = </a:t>
+            </a:r>
+            <a:r>
+              <a:rPr lang="en-SG" b="1" dirty="0" err="1">
+                <a:latin typeface="Courier New" panose="02070309020205020404" pitchFamily="49" charset="0"/>
+                <a:cs typeface="Courier New" panose="02070309020205020404" pitchFamily="49" charset="0"/>
+              </a:rPr>
+              <a:t>self.fc</a:t>
+            </a:r>
+            <a:r>
+              <a:rPr lang="en-SG" b="1" dirty="0">
+                <a:latin typeface="Courier New" panose="02070309020205020404" pitchFamily="49" charset="0"/>
+                <a:cs typeface="Courier New" panose="02070309020205020404" pitchFamily="49" charset="0"/>
+              </a:rPr>
+              <a:t>(h[:, -1, :])</a:t>
+            </a:r>
+          </a:p>
+          <a:p>
+            <a:r>
+              <a:rPr lang="en-SG" b="1" dirty="0">
+                <a:latin typeface="Courier New" panose="02070309020205020404" pitchFamily="49" charset="0"/>
+                <a:cs typeface="Courier New" panose="02070309020205020404" pitchFamily="49" charset="0"/>
+              </a:rPr>
+              <a:t>        return y</a:t>
+            </a:r>
+          </a:p>
+        </p:txBody>
+      </p:sp>
+      <p:sp>
+        <p:nvSpPr>
+          <p:cNvPr id="3" name="TextBox 2">
+            <a:extLst>
+              <a:ext uri="{FF2B5EF4-FFF2-40B4-BE49-F238E27FC236}">
+                <a16:creationId xmlns:a16="http://schemas.microsoft.com/office/drawing/2014/main" id="{5AAF6C0F-15B3-B591-09A3-9BB34EA68BAD}"/>
+              </a:ext>
+            </a:extLst>
+          </p:cNvPr>
+          <p:cNvSpPr txBox="1"/>
+          <p:nvPr/>
+        </p:nvSpPr>
+        <p:spPr>
+          <a:xfrm>
+            <a:off x="807396" y="6055467"/>
+            <a:ext cx="3492229" cy="646331"/>
+          </a:xfrm>
+          <a:prstGeom prst="rect">
+            <a:avLst/>
+          </a:prstGeom>
+          <a:noFill/>
+        </p:spPr>
+        <p:txBody>
+          <a:bodyPr wrap="square" rtlCol="0">
+            <a:spAutoFit/>
+          </a:bodyPr>
+          <a:lstStyle/>
+          <a:p>
+            <a:r>
+              <a:rPr lang="en-US" dirty="0"/>
+              <a:t>See complete code in LSTM-damped-</a:t>
+            </a:r>
+            <a:r>
+              <a:rPr lang="en-US" dirty="0" err="1"/>
+              <a:t>oscillation.ipynb</a:t>
+            </a:r>
+            <a:endParaRPr lang="en-SG" dirty="0"/>
+          </a:p>
+        </p:txBody>
+      </p:sp>
+    </p:spTree>
+    <p:extLst>
+      <p:ext uri="{BB962C8B-B14F-4D97-AF65-F5344CB8AC3E}">
+        <p14:creationId xmlns:p14="http://schemas.microsoft.com/office/powerpoint/2010/main" val="1800611406"/>
+      </p:ext>
+    </p:extLst>
+  </p:cSld>
+  <p:clrMapOvr>
+    <a:masterClrMapping/>
+  </p:clrMapOvr>
+</p:sld>
+</file>
+
+<file path=ppt/slides/slide18.xml><?xml version="1.0" encoding="utf-8"?>
+<p:sld xmlns:a="http://schemas.openxmlformats.org/drawingml/2006/main" xmlns:r="http://schemas.openxmlformats.org/officeDocument/2006/relationships" xmlns:p="http://schemas.openxmlformats.org/presentationml/2006/main">
+  <p:cSld>
+    <p:spTree>
+      <p:nvGrpSpPr>
+        <p:cNvPr id="1" name=""/>
+        <p:cNvGrpSpPr/>
+        <p:nvPr/>
+      </p:nvGrpSpPr>
+      <p:grpSpPr>
+        <a:xfrm>
+          <a:off x="0" y="0"/>
+          <a:ext cx="0" cy="0"/>
+          <a:chOff x="0" y="0"/>
+          <a:chExt cx="0" cy="0"/>
+        </a:xfrm>
+      </p:grpSpPr>
+      <p:sp>
+        <p:nvSpPr>
+          <p:cNvPr id="2" name="Title 1">
+            <a:extLst>
+              <a:ext uri="{FF2B5EF4-FFF2-40B4-BE49-F238E27FC236}">
+                <a16:creationId xmlns:a16="http://schemas.microsoft.com/office/drawing/2014/main" id="{79F5382D-4A72-0542-9F3C-E6417F9CCAB6}"/>
+              </a:ext>
+            </a:extLst>
+          </p:cNvPr>
+          <p:cNvSpPr>
+            <a:spLocks noGrp="1"/>
+          </p:cNvSpPr>
+          <p:nvPr>
+            <p:ph type="title"/>
+          </p:nvPr>
+        </p:nvSpPr>
+        <p:spPr/>
+        <p:txBody>
+          <a:bodyPr/>
+          <a:lstStyle/>
+          <a:p>
+            <a:r>
+              <a:rPr lang="en-US" dirty="0"/>
+              <a:t>Questions and Answers</a:t>
+            </a:r>
+            <a:endParaRPr lang="en-SG" dirty="0"/>
+          </a:p>
+        </p:txBody>
+      </p:sp>
+      <p:sp>
+        <p:nvSpPr>
+          <p:cNvPr id="3" name="Content Placeholder 2">
+            <a:extLst>
+              <a:ext uri="{FF2B5EF4-FFF2-40B4-BE49-F238E27FC236}">
+                <a16:creationId xmlns:a16="http://schemas.microsoft.com/office/drawing/2014/main" id="{2EEA4FC6-1A5F-F958-C8FD-112364FE36C1}"/>
+              </a:ext>
+            </a:extLst>
+          </p:cNvPr>
+          <p:cNvSpPr>
+            <a:spLocks noGrp="1"/>
+          </p:cNvSpPr>
+          <p:nvPr>
+            <p:ph idx="1"/>
+          </p:nvPr>
+        </p:nvSpPr>
+        <p:spPr/>
+        <p:txBody>
+          <a:bodyPr/>
+          <a:lstStyle/>
+          <a:p>
+            <a:r>
+              <a:rPr lang="en-US" dirty="0"/>
+              <a:t>1) What is an RNN, 2) how is CNN similar/differ from RNN?  3) how to construct the loss function in RNN? 4) what is the vanishing/exploding gradient problems?  5) What is the use of LSTM?  How does it differ from RNN?  6) What is a Markov chain; what is a hidden Markov chain?  7) What is an encoder-decoder architecture?  </a:t>
+            </a:r>
+            <a:endParaRPr lang="en-SG" dirty="0"/>
+          </a:p>
+        </p:txBody>
+      </p:sp>
+    </p:spTree>
+    <p:extLst>
+      <p:ext uri="{BB962C8B-B14F-4D97-AF65-F5344CB8AC3E}">
+        <p14:creationId xmlns:p14="http://schemas.microsoft.com/office/powerpoint/2010/main" val="1531545693"/>
+      </p:ext>
+    </p:extLst>
+  </p:cSld>
+  <p:clrMapOvr>
+    <a:masterClrMapping/>
+  </p:clrMapOvr>
+</p:sld>
+</file>
+
 <file path=ppt/slides/slide2.xml><?xml version="1.0" encoding="utf-8"?>
+<p:sld xmlns:a="http://schemas.openxmlformats.org/drawingml/2006/main" xmlns:r="http://schemas.openxmlformats.org/officeDocument/2006/relationships" xmlns:p="http://schemas.openxmlformats.org/presentationml/2006/main">
+  <p:cSld>
+    <p:spTree>
+      <p:nvGrpSpPr>
+        <p:cNvPr id="1" name=""/>
+        <p:cNvGrpSpPr/>
+        <p:nvPr/>
+      </p:nvGrpSpPr>
+      <p:grpSpPr>
+        <a:xfrm>
+          <a:off x="0" y="0"/>
+          <a:ext cx="0" cy="0"/>
+          <a:chOff x="0" y="0"/>
+          <a:chExt cx="0" cy="0"/>
+        </a:xfrm>
+      </p:grpSpPr>
+      <p:sp>
+        <p:nvSpPr>
+          <p:cNvPr id="2" name="Title 1">
+            <a:extLst>
+              <a:ext uri="{FF2B5EF4-FFF2-40B4-BE49-F238E27FC236}">
+                <a16:creationId xmlns:a16="http://schemas.microsoft.com/office/drawing/2014/main" id="{606129A6-CAC0-1143-8F18-E12A72408B4C}"/>
+              </a:ext>
+            </a:extLst>
+          </p:cNvPr>
+          <p:cNvSpPr>
+            <a:spLocks noGrp="1"/>
+          </p:cNvSpPr>
+          <p:nvPr>
+            <p:ph type="title"/>
+          </p:nvPr>
+        </p:nvSpPr>
+        <p:spPr/>
+        <p:txBody>
+          <a:bodyPr/>
+          <a:lstStyle/>
+          <a:p>
+            <a:r>
+              <a:rPr lang="en-US" dirty="0"/>
+              <a:t>Outline</a:t>
+            </a:r>
+            <a:endParaRPr lang="en-SG" dirty="0"/>
+          </a:p>
+        </p:txBody>
+      </p:sp>
+      <p:sp>
+        <p:nvSpPr>
+          <p:cNvPr id="3" name="Content Placeholder 2">
+            <a:extLst>
+              <a:ext uri="{FF2B5EF4-FFF2-40B4-BE49-F238E27FC236}">
+                <a16:creationId xmlns:a16="http://schemas.microsoft.com/office/drawing/2014/main" id="{1B34D2CF-F38C-0974-BCA0-BE81FEE215F8}"/>
+              </a:ext>
+            </a:extLst>
+          </p:cNvPr>
+          <p:cNvSpPr>
+            <a:spLocks noGrp="1"/>
+          </p:cNvSpPr>
+          <p:nvPr>
+            <p:ph idx="1"/>
+          </p:nvPr>
+        </p:nvSpPr>
+        <p:spPr/>
+        <p:txBody>
+          <a:bodyPr>
+            <a:normAutofit/>
+          </a:bodyPr>
+          <a:lstStyle/>
+          <a:p>
+            <a:r>
+              <a:rPr lang="en-US" dirty="0"/>
+              <a:t>Neural networks for sequential data of variable length (e.g., text) – RNN</a:t>
+            </a:r>
+          </a:p>
+          <a:p>
+            <a:r>
+              <a:rPr lang="en-US" dirty="0"/>
+              <a:t>Parameter sharing over time</a:t>
+            </a:r>
+          </a:p>
+          <a:p>
+            <a:endParaRPr lang="en-US" dirty="0"/>
+          </a:p>
+          <a:p>
+            <a:r>
+              <a:rPr lang="en-US" dirty="0"/>
+              <a:t>Probability models for sequential data</a:t>
+            </a:r>
+          </a:p>
+          <a:p>
+            <a:endParaRPr lang="en-US" dirty="0"/>
+          </a:p>
+          <a:p>
+            <a:r>
+              <a:rPr lang="en-US" dirty="0"/>
+              <a:t>Vanishing and exploding gradients;  long short-term memory (LSTM) networks to overcome them</a:t>
+            </a:r>
+          </a:p>
+          <a:p>
+            <a:endParaRPr lang="en-US" dirty="0"/>
+          </a:p>
+          <a:p>
+            <a:endParaRPr lang="en-SG" dirty="0"/>
+          </a:p>
+        </p:txBody>
+      </p:sp>
+    </p:spTree>
+    <p:extLst>
+      <p:ext uri="{BB962C8B-B14F-4D97-AF65-F5344CB8AC3E}">
+        <p14:creationId xmlns:p14="http://schemas.microsoft.com/office/powerpoint/2010/main" val="1991156545"/>
+      </p:ext>
+    </p:extLst>
+  </p:cSld>
+  <p:clrMapOvr>
+    <a:masterClrMapping/>
+  </p:clrMapOvr>
+</p:sld>
+</file>
+
+<file path=ppt/slides/slide3.xml><?xml version="1.0" encoding="utf-8"?>
 <p:sld xmlns:a="http://schemas.openxmlformats.org/drawingml/2006/main" xmlns:r="http://schemas.openxmlformats.org/officeDocument/2006/relationships" xmlns:p="http://schemas.openxmlformats.org/presentationml/2006/main">
   <p:cSld>
     <p:spTree>
@@ -8717,7 +12127,7 @@
           <a:p>
             <a:r>
               <a:rPr lang="en-US" dirty="0"/>
-              <a:t>Handle sequence of data </a:t>
+              <a:t>Handling sequential data </a:t>
             </a:r>
             <a:endParaRPr lang="en-SG" dirty="0"/>
           </a:p>
@@ -8753,7 +12163,7 @@
             <a:pPr lvl="1"/>
             <a:r>
               <a:rPr lang="en-US" dirty="0"/>
-              <a:t>Time series such as music or stock market</a:t>
+              <a:t>Time series, such as audio or stock prices</a:t>
             </a:r>
           </a:p>
           <a:p>
@@ -8773,8 +12183,15 @@
           <a:p>
             <a:pPr lvl="1"/>
             <a:r>
-              <a:rPr lang="en-US" dirty="0" err="1"/>
-              <a:t>etc</a:t>
+              <a:rPr lang="en-US" dirty="0"/>
+              <a:t>Predicting the next state for a dynamic system</a:t>
+            </a:r>
+          </a:p>
+          <a:p>
+            <a:pPr lvl="1"/>
+            <a:r>
+              <a:rPr lang="en-US" dirty="0"/>
+              <a:t>…</a:t>
             </a:r>
             <a:endParaRPr lang="en-SG" dirty="0"/>
           </a:p>
@@ -8793,7 +12210,7 @@
 </p:sld>
 </file>
 
-<file path=ppt/slides/slide3.xml><?xml version="1.0" encoding="utf-8"?>
+<file path=ppt/slides/slide4.xml><?xml version="1.0" encoding="utf-8"?>
 <p:sld xmlns:a="http://schemas.openxmlformats.org/drawingml/2006/main" xmlns:r="http://schemas.openxmlformats.org/officeDocument/2006/relationships" xmlns:p="http://schemas.openxmlformats.org/presentationml/2006/main">
   <p:cSld>
     <p:spTree>
@@ -8878,56 +12295,133 @@
           </a:p>
         </p:txBody>
       </p:sp>
-      <p:sp>
-        <p:nvSpPr>
-          <p:cNvPr id="4" name="Rectangle: Rounded Corners 3">
-            <a:extLst>
-              <a:ext uri="{FF2B5EF4-FFF2-40B4-BE49-F238E27FC236}">
-                <a16:creationId xmlns:a16="http://schemas.microsoft.com/office/drawing/2014/main" id="{90584934-63E7-489A-9AE2-3950F5D18C47}"/>
-              </a:ext>
-            </a:extLst>
-          </p:cNvPr>
-          <p:cNvSpPr/>
-          <p:nvPr/>
-        </p:nvSpPr>
-        <p:spPr>
-          <a:xfrm>
-            <a:off x="1456509" y="3513909"/>
-            <a:ext cx="744582" cy="744582"/>
-          </a:xfrm>
-          <a:prstGeom prst="roundRect">
-            <a:avLst/>
-          </a:prstGeom>
-        </p:spPr>
-        <p:style>
-          <a:lnRef idx="2">
-            <a:schemeClr val="accent1">
-              <a:shade val="50000"/>
-            </a:schemeClr>
-          </a:lnRef>
-          <a:fillRef idx="1">
-            <a:schemeClr val="accent1"/>
-          </a:fillRef>
-          <a:effectRef idx="0">
-            <a:schemeClr val="accent1"/>
-          </a:effectRef>
-          <a:fontRef idx="minor">
-            <a:schemeClr val="lt1"/>
-          </a:fontRef>
-        </p:style>
-        <p:txBody>
-          <a:bodyPr rtlCol="0" anchor="ctr"/>
-          <a:lstStyle/>
-          <a:p>
-            <a:pPr algn="ctr"/>
-            <a:r>
-              <a:rPr lang="en-US" sz="1100" dirty="0"/>
-              <a:t>Hidden layers</a:t>
-            </a:r>
-            <a:endParaRPr lang="en-SG" sz="1100" dirty="0"/>
-          </a:p>
-        </p:txBody>
-      </p:sp>
+      <mc:AlternateContent xmlns:mc="http://schemas.openxmlformats.org/markup-compatibility/2006" xmlns:a14="http://schemas.microsoft.com/office/drawing/2010/main">
+        <mc:Choice Requires="a14">
+          <p:sp>
+            <p:nvSpPr>
+              <p:cNvPr id="4" name="Rectangle: Rounded Corners 3">
+                <a:extLst>
+                  <a:ext uri="{FF2B5EF4-FFF2-40B4-BE49-F238E27FC236}">
+                    <a16:creationId xmlns:a16="http://schemas.microsoft.com/office/drawing/2014/main" id="{90584934-63E7-489A-9AE2-3950F5D18C47}"/>
+                  </a:ext>
+                </a:extLst>
+              </p:cNvPr>
+              <p:cNvSpPr/>
+              <p:nvPr/>
+            </p:nvSpPr>
+            <p:spPr>
+              <a:xfrm>
+                <a:off x="1456509" y="3513909"/>
+                <a:ext cx="744582" cy="744582"/>
+              </a:xfrm>
+              <a:prstGeom prst="roundRect">
+                <a:avLst/>
+              </a:prstGeom>
+            </p:spPr>
+            <p:style>
+              <a:lnRef idx="2">
+                <a:schemeClr val="accent1">
+                  <a:shade val="50000"/>
+                </a:schemeClr>
+              </a:lnRef>
+              <a:fillRef idx="1">
+                <a:schemeClr val="accent1"/>
+              </a:fillRef>
+              <a:effectRef idx="0">
+                <a:schemeClr val="accent1"/>
+              </a:effectRef>
+              <a:fontRef idx="minor">
+                <a:schemeClr val="lt1"/>
+              </a:fontRef>
+            </p:style>
+            <p:txBody>
+              <a:bodyPr rtlCol="0" anchor="ctr"/>
+              <a:lstStyle/>
+              <a:p>
+                <a:pPr algn="ctr"/>
+                <a:r>
+                  <a:rPr lang="en-US" sz="1100" dirty="0"/>
+                  <a:t>Hidden state </a:t>
+                </a:r>
+                <a14:m>
+                  <m:oMath xmlns:m="http://schemas.openxmlformats.org/officeDocument/2006/math">
+                    <m:sSub>
+                      <m:sSubPr>
+                        <m:ctrlPr>
+                          <a:rPr lang="en-US" sz="1100" b="0" i="1" smtClean="0">
+                            <a:latin typeface="Cambria Math" panose="02040503050406030204" pitchFamily="18" charset="0"/>
+                          </a:rPr>
+                        </m:ctrlPr>
+                      </m:sSubPr>
+                      <m:e>
+                        <m:r>
+                          <a:rPr lang="en-US" sz="1100" b="0" i="1" smtClean="0">
+                            <a:latin typeface="Cambria Math" panose="02040503050406030204" pitchFamily="18" charset="0"/>
+                          </a:rPr>
+                          <m:t>ℎ</m:t>
+                        </m:r>
+                      </m:e>
+                      <m:sub>
+                        <m:r>
+                          <a:rPr lang="en-US" sz="1100" b="0" i="1" smtClean="0">
+                            <a:latin typeface="Cambria Math" panose="02040503050406030204" pitchFamily="18" charset="0"/>
+                          </a:rPr>
+                          <m:t>𝑡</m:t>
+                        </m:r>
+                      </m:sub>
+                    </m:sSub>
+                  </m:oMath>
+                </a14:m>
+                <a:endParaRPr lang="en-SG" sz="1100" i="1" dirty="0"/>
+              </a:p>
+            </p:txBody>
+          </p:sp>
+        </mc:Choice>
+        <mc:Fallback xmlns="">
+          <p:sp>
+            <p:nvSpPr>
+              <p:cNvPr id="4" name="Rectangle: Rounded Corners 3">
+                <a:extLst>
+                  <a:ext uri="{FF2B5EF4-FFF2-40B4-BE49-F238E27FC236}">
+                    <a16:creationId xmlns:a16="http://schemas.microsoft.com/office/drawing/2014/main" id="{90584934-63E7-489A-9AE2-3950F5D18C47}"/>
+                  </a:ext>
+                </a:extLst>
+              </p:cNvPr>
+              <p:cNvSpPr>
+                <a:spLocks noRot="1" noChangeAspect="1" noMove="1" noResize="1" noEditPoints="1" noAdjustHandles="1" noChangeArrowheads="1" noChangeShapeType="1" noTextEdit="1"/>
+              </p:cNvSpPr>
+              <p:nvPr/>
+            </p:nvSpPr>
+            <p:spPr>
+              <a:xfrm>
+                <a:off x="1456509" y="3513909"/>
+                <a:ext cx="744582" cy="744582"/>
+              </a:xfrm>
+              <a:prstGeom prst="roundRect">
+                <a:avLst/>
+              </a:prstGeom>
+              <a:blipFill>
+                <a:blip r:embed="rId2"/>
+                <a:stretch>
+                  <a:fillRect/>
+                </a:stretch>
+              </a:blipFill>
+            </p:spPr>
+            <p:txBody>
+              <a:bodyPr/>
+              <a:lstStyle/>
+              <a:p>
+                <a:r>
+                  <a:rPr lang="en-SG">
+                    <a:noFill/>
+                  </a:rPr>
+                  <a:t> </a:t>
+                </a:r>
+              </a:p>
+            </p:txBody>
+          </p:sp>
+        </mc:Fallback>
+      </mc:AlternateContent>
       <p:sp>
         <p:nvSpPr>
           <p:cNvPr id="16" name="Rectangle 15">
@@ -9747,7 +13241,7 @@
         </p:nvSpPr>
         <p:spPr>
           <a:xfrm>
-            <a:off x="2625634" y="3827415"/>
+            <a:off x="2737502" y="3827415"/>
             <a:ext cx="476795" cy="156755"/>
           </a:xfrm>
           <a:prstGeom prst="rightArrow">
@@ -9829,7 +13323,7 @@
         </p:nvCxnSpPr>
         <p:spPr>
           <a:xfrm flipV="1">
-            <a:off x="4149628" y="2954388"/>
+            <a:off x="4125308" y="2954388"/>
             <a:ext cx="0" cy="1822268"/>
           </a:xfrm>
           <a:prstGeom prst="straightConnector1">
@@ -9868,7 +13362,7 @@
         </p:nvSpPr>
         <p:spPr>
           <a:xfrm>
-            <a:off x="3783870" y="3516091"/>
+            <a:off x="3759550" y="3516091"/>
             <a:ext cx="744582" cy="744582"/>
           </a:xfrm>
           <a:prstGeom prst="roundRect">
@@ -9898,7 +13392,7 @@
             <a:pPr algn="ctr"/>
             <a:r>
               <a:rPr lang="en-US" sz="1100" dirty="0"/>
-              <a:t>Hidden layers</a:t>
+              <a:t>Hidden state 1</a:t>
             </a:r>
             <a:endParaRPr lang="en-SG" sz="1100" dirty="0"/>
           </a:p>
@@ -9987,7 +13481,7 @@
             <a:pPr algn="ctr"/>
             <a:r>
               <a:rPr lang="en-US" sz="1100" dirty="0"/>
-              <a:t>Hidden layers</a:t>
+              <a:t>Hidden state 2</a:t>
             </a:r>
             <a:endParaRPr lang="en-SG" sz="1100" dirty="0"/>
           </a:p>
@@ -10076,7 +13570,7 @@
             <a:pPr algn="ctr"/>
             <a:r>
               <a:rPr lang="en-US" sz="1100" dirty="0"/>
-              <a:t>Hidden layers</a:t>
+              <a:t>Hidden state 3</a:t>
             </a:r>
             <a:endParaRPr lang="en-SG" sz="1100" dirty="0"/>
           </a:p>
@@ -10096,7 +13590,7 @@
         </p:nvCxnSpPr>
         <p:spPr>
           <a:xfrm flipV="1">
-            <a:off x="7578614" y="2947853"/>
+            <a:off x="7632118" y="2947853"/>
             <a:ext cx="0" cy="1822268"/>
           </a:xfrm>
           <a:prstGeom prst="straightConnector1">
@@ -10135,7 +13629,7 @@
         </p:nvSpPr>
         <p:spPr>
           <a:xfrm>
-            <a:off x="7212856" y="3509556"/>
+            <a:off x="7266360" y="3509556"/>
             <a:ext cx="744582" cy="744582"/>
           </a:xfrm>
           <a:prstGeom prst="roundRect">
@@ -10165,7 +13659,14 @@
             <a:pPr algn="ctr"/>
             <a:r>
               <a:rPr lang="en-US" sz="1100" dirty="0"/>
-              <a:t>Hidden layers</a:t>
+              <a:t>Hidden</a:t>
+            </a:r>
+          </a:p>
+          <a:p>
+            <a:pPr algn="ctr"/>
+            <a:r>
+              <a:rPr lang="en-US" sz="1100" dirty="0"/>
+              <a:t>state 4</a:t>
             </a:r>
             <a:endParaRPr lang="en-SG" sz="1100" dirty="0"/>
           </a:p>
@@ -10181,14 +13682,14 @@
             </a:extLst>
           </p:cNvPr>
           <p:cNvCxnSpPr>
+            <a:cxnSpLocks/>
             <a:stCxn id="27" idx="3"/>
-            <a:endCxn id="30" idx="1"/>
           </p:cNvCxnSpPr>
           <p:nvPr/>
         </p:nvCxnSpPr>
         <p:spPr>
           <a:xfrm flipV="1">
-            <a:off x="4528452" y="3881848"/>
+            <a:off x="4504132" y="3881848"/>
             <a:ext cx="391878" cy="6534"/>
           </a:xfrm>
           <a:prstGeom prst="straightConnector1">
@@ -10314,7 +13815,7 @@
         </p:nvCxnSpPr>
         <p:spPr>
           <a:xfrm flipV="1">
-            <a:off x="7986746" y="3879500"/>
+            <a:off x="8040250" y="3879500"/>
             <a:ext cx="391878" cy="6534"/>
           </a:xfrm>
           <a:prstGeom prst="straightConnector1">
@@ -10393,7 +13894,7 @@
         <p:spPr>
           <a:xfrm>
             <a:off x="1374364" y="4999338"/>
-            <a:ext cx="6465611" cy="369332"/>
+            <a:ext cx="6612381" cy="369332"/>
           </a:xfrm>
           <a:prstGeom prst="rect">
             <a:avLst/>
@@ -10408,7 +13909,7 @@
           <a:p>
             <a:r>
               <a:rPr lang="en-US" dirty="0"/>
-              <a:t>input                     input 1    input 2   input 3        …</a:t>
+              <a:t> input                    input 1    input 2    input 3        …</a:t>
             </a:r>
             <a:endParaRPr lang="en-SG" dirty="0"/>
           </a:p>
@@ -10428,8 +13929,8 @@
         </p:nvSpPr>
         <p:spPr>
           <a:xfrm>
-            <a:off x="1512696" y="2274906"/>
-            <a:ext cx="6465611" cy="646331"/>
+            <a:off x="1447748" y="2273941"/>
+            <a:ext cx="6465611" cy="369332"/>
           </a:xfrm>
           <a:prstGeom prst="rect">
             <a:avLst/>
@@ -10444,7 +13945,7 @@
           <a:p>
             <a:r>
               <a:rPr lang="en-US" dirty="0"/>
-              <a:t>output                  </a:t>
+              <a:t>output                </a:t>
             </a:r>
             <a:r>
               <a:rPr lang="en-US" dirty="0" err="1"/>
@@ -10452,7 +13953,7 @@
             </a:r>
             <a:r>
               <a:rPr lang="en-US" dirty="0"/>
-              <a:t> 1    output 2   output 3        …</a:t>
+              <a:t> 1   output 2   output 3      …</a:t>
             </a:r>
             <a:endParaRPr lang="en-SG" dirty="0"/>
           </a:p>
@@ -10471,7 +13972,7 @@
 </p:sld>
 </file>
 
-<file path=ppt/slides/slide4.xml><?xml version="1.0" encoding="utf-8"?>
+<file path=ppt/slides/slide5.xml><?xml version="1.0" encoding="utf-8"?>
 <p:sld xmlns:a="http://schemas.openxmlformats.org/drawingml/2006/main" xmlns:r="http://schemas.openxmlformats.org/officeDocument/2006/relationships" xmlns:p="http://schemas.openxmlformats.org/presentationml/2006/main">
   <p:cSld>
     <p:spTree>
@@ -10511,7 +14012,7 @@
           <a:p>
             <a:r>
               <a:rPr lang="en-US" dirty="0"/>
-              <a:t>More concrete RNN and unfolding </a:t>
+              <a:t>A concrete RNN and its unfolding </a:t>
             </a:r>
             <a:endParaRPr lang="en-SG" dirty="0"/>
           </a:p>
@@ -10564,7 +14065,7 @@
             <p:spPr>
               <a:xfrm>
                 <a:off x="628649" y="5579076"/>
-                <a:ext cx="3943351" cy="830997"/>
+                <a:ext cx="3943351" cy="1015663"/>
               </a:xfrm>
               <a:prstGeom prst="rect">
                 <a:avLst/>
@@ -10635,7 +14136,7 @@
                 </a14:m>
                 <a:r>
                   <a:rPr lang="en-SG" sz="1200" dirty="0"/>
-                  <a:t> connect input to hidden </a:t>
+                  <a:t> connects input to hidden </a:t>
                 </a:r>
                 <a14:m>
                   <m:oMath xmlns:m="http://schemas.openxmlformats.org/officeDocument/2006/math">
@@ -10643,13 +14144,13 @@
                       <a:rPr lang="en-US" sz="1200" b="0" i="1" smtClean="0">
                         <a:latin typeface="Cambria Math" panose="02040503050406030204" pitchFamily="18" charset="0"/>
                       </a:rPr>
-                      <m:t>h</m:t>
+                      <m:t>ℎ</m:t>
                     </m:r>
                   </m:oMath>
                 </a14:m>
                 <a:r>
                   <a:rPr lang="en-SG" sz="1200" dirty="0"/>
-                  <a:t>, recurrent connection by </a:t>
+                  <a:t>, </a:t>
                 </a:r>
                 <a14:m>
                   <m:oMath xmlns:m="http://schemas.openxmlformats.org/officeDocument/2006/math">
@@ -10663,7 +14164,7 @@
                 </a14:m>
                 <a:r>
                   <a:rPr lang="en-SG" sz="1200" dirty="0"/>
-                  <a:t>, to output by </a:t>
+                  <a:t> hidden to hidden, </a:t>
                 </a:r>
                 <a14:m>
                   <m:oMath xmlns:m="http://schemas.openxmlformats.org/officeDocument/2006/math">
@@ -10677,7 +14178,49 @@
                 </a14:m>
                 <a:r>
                   <a:rPr lang="en-SG" sz="1200" dirty="0"/>
-                  <a:t>.</a:t>
+                  <a:t> hidden to output. </a:t>
+                </a:r>
+                <a14:m>
+                  <m:oMath xmlns:m="http://schemas.openxmlformats.org/officeDocument/2006/math">
+                    <m:r>
+                      <a:rPr lang="en-US" sz="1200" b="0" i="1" smtClean="0">
+                        <a:latin typeface="Cambria Math" panose="02040503050406030204" pitchFamily="18" charset="0"/>
+                      </a:rPr>
+                      <m:t>𝑈</m:t>
+                    </m:r>
+                  </m:oMath>
+                </a14:m>
+                <a:r>
+                  <a:rPr lang="en-SG" sz="1200" dirty="0"/>
+                  <a:t>, </a:t>
+                </a:r>
+                <a14:m>
+                  <m:oMath xmlns:m="http://schemas.openxmlformats.org/officeDocument/2006/math">
+                    <m:r>
+                      <a:rPr lang="en-US" sz="1200" b="0" i="1" smtClean="0">
+                        <a:latin typeface="Cambria Math" panose="02040503050406030204" pitchFamily="18" charset="0"/>
+                      </a:rPr>
+                      <m:t>𝑊</m:t>
+                    </m:r>
+                  </m:oMath>
+                </a14:m>
+                <a:r>
+                  <a:rPr lang="en-SG" sz="1200" dirty="0"/>
+                  <a:t>, </a:t>
+                </a:r>
+                <a14:m>
+                  <m:oMath xmlns:m="http://schemas.openxmlformats.org/officeDocument/2006/math">
+                    <m:r>
+                      <a:rPr lang="en-US" sz="1200" b="0" i="1" smtClean="0">
+                        <a:latin typeface="Cambria Math" panose="02040503050406030204" pitchFamily="18" charset="0"/>
+                      </a:rPr>
+                      <m:t>𝑉</m:t>
+                    </m:r>
+                  </m:oMath>
+                </a14:m>
+                <a:r>
+                  <a:rPr lang="en-SG" sz="1200" dirty="0"/>
+                  <a:t> are shared across all time steps.</a:t>
                 </a:r>
               </a:p>
             </p:txBody>
@@ -10701,7 +14244,7 @@
             <p:spPr>
               <a:xfrm>
                 <a:off x="628649" y="5579076"/>
-                <a:ext cx="3943351" cy="830997"/>
+                <a:ext cx="3943351" cy="1015663"/>
               </a:xfrm>
               <a:prstGeom prst="rect">
                 <a:avLst/>
@@ -10709,7 +14252,7 @@
               <a:blipFill>
                 <a:blip r:embed="rId3"/>
                 <a:stretch>
-                  <a:fillRect r="-1236" b="-4380"/>
+                  <a:fillRect r="-1236" b="-3593"/>
                 </a:stretch>
               </a:blipFill>
             </p:spPr>
@@ -10761,10 +14304,7 @@
                 <a:pPr/>
                 <a14:m>
                   <m:oMathPara xmlns:m="http://schemas.openxmlformats.org/officeDocument/2006/math">
-                    <m:oMathParaPr>
-                      <m:jc m:val="centerGroup"/>
-                    </m:oMathParaPr>
-                    <m:oMath xmlns:m="http://schemas.openxmlformats.org/officeDocument/2006/math">
+                    <m:oMath>
                       <m:sSup>
                         <m:sSupPr>
                           <m:ctrlPr>
@@ -10839,7 +14379,7 @@
                             <a:rPr lang="en-US" b="0" i="1" smtClean="0">
                               <a:latin typeface="Cambria Math" panose="02040503050406030204" pitchFamily="18" charset="0"/>
                             </a:rPr>
-                            <m:t>h</m:t>
+                            <m:t>ℎ</m:t>
                           </m:r>
                         </m:e>
                         <m:sup>
@@ -10921,10 +14461,7 @@
                 <a:pPr/>
                 <a14:m>
                   <m:oMathPara xmlns:m="http://schemas.openxmlformats.org/officeDocument/2006/math">
-                    <m:oMathParaPr>
-                      <m:jc m:val="centerGroup"/>
-                    </m:oMathParaPr>
-                    <m:oMath xmlns:m="http://schemas.openxmlformats.org/officeDocument/2006/math">
+                    <m:oMath>
                       <m:sSup>
                         <m:sSupPr>
                           <m:ctrlPr>
@@ -10938,7 +14475,7 @@
                             <a:rPr lang="en-US" b="0" i="1" smtClean="0">
                               <a:latin typeface="Cambria Math" panose="02040503050406030204" pitchFamily="18" charset="0"/>
                             </a:rPr>
-                            <m:t>h</m:t>
+                            <m:t>ℎ</m:t>
                           </m:r>
                         </m:e>
                         <m:sup>
@@ -10971,7 +14508,7 @@
                       <m:func>
                         <m:funcPr>
                           <m:ctrlPr>
-                            <a:rPr lang="en-US" b="0" i="1" smtClean="0">
+                            <a:rPr lang="en-US" b="0" i="0" smtClean="0">
                               <a:latin typeface="Cambria Math" panose="02040503050406030204" pitchFamily="18" charset="0"/>
                             </a:rPr>
                           </m:ctrlPr>
@@ -11047,10 +14584,7 @@
                 <a:pPr/>
                 <a14:m>
                   <m:oMathPara xmlns:m="http://schemas.openxmlformats.org/officeDocument/2006/math">
-                    <m:oMathParaPr>
-                      <m:jc m:val="centerGroup"/>
-                    </m:oMathParaPr>
-                    <m:oMath xmlns:m="http://schemas.openxmlformats.org/officeDocument/2006/math">
+                    <m:oMath>
                       <m:sSup>
                         <m:sSupPr>
                           <m:ctrlPr>
@@ -11125,7 +14659,7 @@
                             <a:rPr lang="en-US" b="0" i="1" smtClean="0">
                               <a:latin typeface="Cambria Math" panose="02040503050406030204" pitchFamily="18" charset="0"/>
                             </a:rPr>
-                            <m:t>h</m:t>
+                            <m:t>ℎ</m:t>
                           </m:r>
                         </m:e>
                         <m:sup>
@@ -11158,10 +14692,7 @@
                 <a:pPr/>
                 <a14:m>
                   <m:oMathPara xmlns:m="http://schemas.openxmlformats.org/officeDocument/2006/math">
-                    <m:oMathParaPr>
-                      <m:jc m:val="centerGroup"/>
-                    </m:oMathParaPr>
-                    <m:oMath xmlns:m="http://schemas.openxmlformats.org/officeDocument/2006/math">
+                    <m:oMath>
                       <m:sSup>
                         <m:sSupPr>
                           <m:ctrlPr>
@@ -11175,7 +14706,7 @@
                             <m:accPr>
                               <m:chr m:val="̂"/>
                               <m:ctrlPr>
-                                <a:rPr lang="en-SG" i="1" smtClean="0">
+                                <a:rPr lang="en-US" b="0" i="1" smtClean="0">
                                   <a:latin typeface="Cambria Math" panose="02040503050406030204" pitchFamily="18" charset="0"/>
                                 </a:rPr>
                               </m:ctrlPr>
@@ -11286,10 +14817,7 @@
                 <a:pPr/>
                 <a14:m>
                   <m:oMathPara xmlns:m="http://schemas.openxmlformats.org/officeDocument/2006/math">
-                    <m:oMathParaPr>
-                      <m:jc m:val="centerGroup"/>
-                    </m:oMathParaPr>
-                    <m:oMath xmlns:m="http://schemas.openxmlformats.org/officeDocument/2006/math">
+                    <m:oMath>
                       <m:r>
                         <a:rPr lang="en-US" b="0" i="1" smtClean="0">
                           <a:latin typeface="Cambria Math" panose="02040503050406030204" pitchFamily="18" charset="0"/>
@@ -11407,7 +14935,7 @@
                               <m:begChr m:val="{"/>
                               <m:endChr m:val="}"/>
                               <m:ctrlPr>
-                                <a:rPr lang="en-US" i="1">
+                                <a:rPr lang="en-US" b="0" i="1" smtClean="0">
                                   <a:solidFill>
                                     <a:prstClr val="black"/>
                                   </a:solidFill>
@@ -11419,7 +14947,7 @@
                               <m:sSup>
                                 <m:sSupPr>
                                   <m:ctrlPr>
-                                    <a:rPr lang="en-US" i="1">
+                                    <a:rPr lang="en-US" b="0" i="1" smtClean="0">
                                       <a:solidFill>
                                         <a:prstClr val="black"/>
                                       </a:solidFill>
@@ -11476,7 +15004,7 @@
                               <m:sSup>
                                 <m:sSupPr>
                                   <m:ctrlPr>
-                                    <a:rPr lang="en-US" i="1">
+                                    <a:rPr lang="en-US" b="0" i="1" smtClean="0">
                                       <a:solidFill>
                                         <a:prstClr val="black"/>
                                       </a:solidFill>
@@ -11637,10 +15165,7 @@
                 <a:pPr/>
                 <a14:m>
                   <m:oMathPara xmlns:m="http://schemas.openxmlformats.org/officeDocument/2006/math">
-                    <m:oMathParaPr>
-                      <m:jc m:val="centerGroup"/>
-                    </m:oMathParaPr>
-                    <m:oMath xmlns:m="http://schemas.openxmlformats.org/officeDocument/2006/math">
+                    <m:oMath>
                       <m:r>
                         <a:rPr lang="en-US" i="1">
                           <a:solidFill>
@@ -11682,7 +15207,7 @@
                           <m:func>
                             <m:funcPr>
                               <m:ctrlPr>
-                                <a:rPr lang="en-US" i="1">
+                                <a:rPr lang="en-US">
                                   <a:solidFill>
                                     <a:prstClr val="black"/>
                                   </a:solidFill>
@@ -12011,7 +15536,1387 @@
 </p:sld>
 </file>
 
-<file path=ppt/slides/slide5.xml><?xml version="1.0" encoding="utf-8"?>
+<file path=ppt/slides/slide6.xml><?xml version="1.0" encoding="utf-8"?>
+<p:sld xmlns:a="http://schemas.openxmlformats.org/drawingml/2006/main" xmlns:r="http://schemas.openxmlformats.org/officeDocument/2006/relationships" xmlns:p="http://schemas.openxmlformats.org/presentationml/2006/main">
+  <p:cSld>
+    <p:spTree>
+      <p:nvGrpSpPr>
+        <p:cNvPr id="1" name=""/>
+        <p:cNvGrpSpPr/>
+        <p:nvPr/>
+      </p:nvGrpSpPr>
+      <p:grpSpPr>
+        <a:xfrm>
+          <a:off x="0" y="0"/>
+          <a:ext cx="0" cy="0"/>
+          <a:chOff x="0" y="0"/>
+          <a:chExt cx="0" cy="0"/>
+        </a:xfrm>
+      </p:grpSpPr>
+      <p:sp>
+        <p:nvSpPr>
+          <p:cNvPr id="2" name="Title 1">
+            <a:extLst>
+              <a:ext uri="{FF2B5EF4-FFF2-40B4-BE49-F238E27FC236}">
+                <a16:creationId xmlns:a16="http://schemas.microsoft.com/office/drawing/2014/main" id="{50562389-204A-8E8B-0193-44E614561343}"/>
+              </a:ext>
+            </a:extLst>
+          </p:cNvPr>
+          <p:cNvSpPr>
+            <a:spLocks noGrp="1"/>
+          </p:cNvSpPr>
+          <p:nvPr>
+            <p:ph type="title"/>
+          </p:nvPr>
+        </p:nvSpPr>
+        <p:spPr/>
+        <p:txBody>
+          <a:bodyPr/>
+          <a:lstStyle/>
+          <a:p>
+            <a:r>
+              <a:rPr lang="en-US" dirty="0" err="1"/>
+              <a:t>PyTorch</a:t>
+            </a:r>
+            <a:r>
+              <a:rPr lang="en-US" dirty="0"/>
+              <a:t> code for a simple RNN</a:t>
+            </a:r>
+            <a:endParaRPr lang="en-SG" dirty="0"/>
+          </a:p>
+        </p:txBody>
+      </p:sp>
+      <p:sp>
+        <p:nvSpPr>
+          <p:cNvPr id="3" name="Content Placeholder 2">
+            <a:extLst>
+              <a:ext uri="{FF2B5EF4-FFF2-40B4-BE49-F238E27FC236}">
+                <a16:creationId xmlns:a16="http://schemas.microsoft.com/office/drawing/2014/main" id="{72C50A9B-4516-D5A2-6B37-2FAD31EC41E7}"/>
+              </a:ext>
+            </a:extLst>
+          </p:cNvPr>
+          <p:cNvSpPr>
+            <a:spLocks noGrp="1"/>
+          </p:cNvSpPr>
+          <p:nvPr>
+            <p:ph idx="1"/>
+          </p:nvPr>
+        </p:nvSpPr>
+        <p:spPr>
+          <a:xfrm>
+            <a:off x="87495" y="2093295"/>
+            <a:ext cx="4536737" cy="2671409"/>
+          </a:xfrm>
+        </p:spPr>
+        <p:txBody>
+          <a:bodyPr numCol="1">
+            <a:normAutofit/>
+          </a:bodyPr>
+          <a:lstStyle/>
+          <a:p>
+            <a:pPr marL="0" indent="0">
+              <a:buNone/>
+            </a:pPr>
+            <a:r>
+              <a:rPr lang="en-SG" sz="1200" b="1" dirty="0">
+                <a:latin typeface="Courier New" panose="02070309020205020404" pitchFamily="49" charset="0"/>
+                <a:cs typeface="Courier New" panose="02070309020205020404" pitchFamily="49" charset="0"/>
+              </a:rPr>
+              <a:t>import torch</a:t>
+            </a:r>
+          </a:p>
+          <a:p>
+            <a:pPr marL="0" indent="0">
+              <a:buNone/>
+            </a:pPr>
+            <a:r>
+              <a:rPr lang="en-SG" sz="1200" b="1" dirty="0">
+                <a:latin typeface="Courier New" panose="02070309020205020404" pitchFamily="49" charset="0"/>
+                <a:cs typeface="Courier New" panose="02070309020205020404" pitchFamily="49" charset="0"/>
+              </a:rPr>
+              <a:t>import </a:t>
+            </a:r>
+            <a:r>
+              <a:rPr lang="en-SG" sz="1200" b="1" dirty="0" err="1">
+                <a:latin typeface="Courier New" panose="02070309020205020404" pitchFamily="49" charset="0"/>
+                <a:cs typeface="Courier New" panose="02070309020205020404" pitchFamily="49" charset="0"/>
+              </a:rPr>
+              <a:t>torch.nn</a:t>
+            </a:r>
+            <a:r>
+              <a:rPr lang="en-SG" sz="1200" b="1" dirty="0">
+                <a:latin typeface="Courier New" panose="02070309020205020404" pitchFamily="49" charset="0"/>
+                <a:cs typeface="Courier New" panose="02070309020205020404" pitchFamily="49" charset="0"/>
+              </a:rPr>
+              <a:t> as </a:t>
+            </a:r>
+            <a:r>
+              <a:rPr lang="en-SG" sz="1200" b="1" dirty="0" err="1">
+                <a:latin typeface="Courier New" panose="02070309020205020404" pitchFamily="49" charset="0"/>
+                <a:cs typeface="Courier New" panose="02070309020205020404" pitchFamily="49" charset="0"/>
+              </a:rPr>
+              <a:t>nn</a:t>
+            </a:r>
+            <a:endParaRPr lang="en-SG" sz="1200" b="1" dirty="0">
+              <a:latin typeface="Courier New" panose="02070309020205020404" pitchFamily="49" charset="0"/>
+              <a:cs typeface="Courier New" panose="02070309020205020404" pitchFamily="49" charset="0"/>
+            </a:endParaRPr>
+          </a:p>
+          <a:p>
+            <a:pPr marL="0" indent="0">
+              <a:buNone/>
+            </a:pPr>
+            <a:r>
+              <a:rPr lang="en-SG" sz="1200" b="1" dirty="0">
+                <a:latin typeface="Courier New" panose="02070309020205020404" pitchFamily="49" charset="0"/>
+                <a:cs typeface="Courier New" panose="02070309020205020404" pitchFamily="49" charset="0"/>
+              </a:rPr>
+              <a:t>class RNN(</a:t>
+            </a:r>
+            <a:r>
+              <a:rPr lang="en-SG" sz="1200" b="1" dirty="0" err="1">
+                <a:latin typeface="Courier New" panose="02070309020205020404" pitchFamily="49" charset="0"/>
+                <a:cs typeface="Courier New" panose="02070309020205020404" pitchFamily="49" charset="0"/>
+              </a:rPr>
+              <a:t>nn.Module</a:t>
+            </a:r>
+            <a:r>
+              <a:rPr lang="en-SG" sz="1200" b="1" dirty="0">
+                <a:latin typeface="Courier New" panose="02070309020205020404" pitchFamily="49" charset="0"/>
+                <a:cs typeface="Courier New" panose="02070309020205020404" pitchFamily="49" charset="0"/>
+              </a:rPr>
+              <a:t>):</a:t>
+            </a:r>
+          </a:p>
+          <a:p>
+            <a:pPr marL="0" indent="0">
+              <a:buNone/>
+            </a:pPr>
+            <a:r>
+              <a:rPr lang="en-SG" sz="1200" b="1" dirty="0">
+                <a:latin typeface="Courier New" panose="02070309020205020404" pitchFamily="49" charset="0"/>
+                <a:cs typeface="Courier New" panose="02070309020205020404" pitchFamily="49" charset="0"/>
+              </a:rPr>
+              <a:t>    def __</a:t>
+            </a:r>
+            <a:r>
+              <a:rPr lang="en-SG" sz="1200" b="1" dirty="0" err="1">
+                <a:latin typeface="Courier New" panose="02070309020205020404" pitchFamily="49" charset="0"/>
+                <a:cs typeface="Courier New" panose="02070309020205020404" pitchFamily="49" charset="0"/>
+              </a:rPr>
+              <a:t>init</a:t>
+            </a:r>
+            <a:r>
+              <a:rPr lang="en-SG" sz="1200" b="1" dirty="0">
+                <a:latin typeface="Courier New" panose="02070309020205020404" pitchFamily="49" charset="0"/>
+                <a:cs typeface="Courier New" panose="02070309020205020404" pitchFamily="49" charset="0"/>
+              </a:rPr>
+              <a:t>__(self, </a:t>
+            </a:r>
+            <a:r>
+              <a:rPr lang="en-SG" sz="1200" b="1" dirty="0" err="1">
+                <a:latin typeface="Courier New" panose="02070309020205020404" pitchFamily="49" charset="0"/>
+                <a:cs typeface="Courier New" panose="02070309020205020404" pitchFamily="49" charset="0"/>
+              </a:rPr>
+              <a:t>n_in</a:t>
+            </a:r>
+            <a:r>
+              <a:rPr lang="en-SG" sz="1200" b="1" dirty="0">
+                <a:latin typeface="Courier New" panose="02070309020205020404" pitchFamily="49" charset="0"/>
+                <a:cs typeface="Courier New" panose="02070309020205020404" pitchFamily="49" charset="0"/>
+              </a:rPr>
+              <a:t>, </a:t>
+            </a:r>
+            <a:r>
+              <a:rPr lang="en-SG" sz="1200" b="1" dirty="0" err="1">
+                <a:latin typeface="Courier New" panose="02070309020205020404" pitchFamily="49" charset="0"/>
+                <a:cs typeface="Courier New" panose="02070309020205020404" pitchFamily="49" charset="0"/>
+              </a:rPr>
+              <a:t>n_hidden</a:t>
+            </a:r>
+            <a:r>
+              <a:rPr lang="en-SG" sz="1200" b="1" dirty="0">
+                <a:latin typeface="Courier New" panose="02070309020205020404" pitchFamily="49" charset="0"/>
+                <a:cs typeface="Courier New" panose="02070309020205020404" pitchFamily="49" charset="0"/>
+              </a:rPr>
+              <a:t>, </a:t>
+            </a:r>
+            <a:r>
+              <a:rPr lang="en-SG" sz="1200" b="1" dirty="0" err="1">
+                <a:latin typeface="Courier New" panose="02070309020205020404" pitchFamily="49" charset="0"/>
+                <a:cs typeface="Courier New" panose="02070309020205020404" pitchFamily="49" charset="0"/>
+              </a:rPr>
+              <a:t>n_out</a:t>
+            </a:r>
+            <a:r>
+              <a:rPr lang="en-SG" sz="1200" b="1" dirty="0">
+                <a:latin typeface="Courier New" panose="02070309020205020404" pitchFamily="49" charset="0"/>
+                <a:cs typeface="Courier New" panose="02070309020205020404" pitchFamily="49" charset="0"/>
+              </a:rPr>
+              <a:t>):</a:t>
+            </a:r>
+          </a:p>
+          <a:p>
+            <a:pPr marL="0" indent="0">
+              <a:buNone/>
+            </a:pPr>
+            <a:r>
+              <a:rPr lang="en-SG" sz="1200" b="1" dirty="0">
+                <a:latin typeface="Courier New" panose="02070309020205020404" pitchFamily="49" charset="0"/>
+                <a:cs typeface="Courier New" panose="02070309020205020404" pitchFamily="49" charset="0"/>
+              </a:rPr>
+              <a:t>        super().__</a:t>
+            </a:r>
+            <a:r>
+              <a:rPr lang="en-SG" sz="1200" b="1" dirty="0" err="1">
+                <a:latin typeface="Courier New" panose="02070309020205020404" pitchFamily="49" charset="0"/>
+                <a:cs typeface="Courier New" panose="02070309020205020404" pitchFamily="49" charset="0"/>
+              </a:rPr>
+              <a:t>init</a:t>
+            </a:r>
+            <a:r>
+              <a:rPr lang="en-SG" sz="1200" b="1" dirty="0">
+                <a:latin typeface="Courier New" panose="02070309020205020404" pitchFamily="49" charset="0"/>
+                <a:cs typeface="Courier New" panose="02070309020205020404" pitchFamily="49" charset="0"/>
+              </a:rPr>
+              <a:t>__()</a:t>
+            </a:r>
+          </a:p>
+          <a:p>
+            <a:pPr marL="0" indent="0">
+              <a:buNone/>
+            </a:pPr>
+            <a:r>
+              <a:rPr lang="en-SG" sz="1200" b="1" dirty="0">
+                <a:latin typeface="Courier New" panose="02070309020205020404" pitchFamily="49" charset="0"/>
+                <a:cs typeface="Courier New" panose="02070309020205020404" pitchFamily="49" charset="0"/>
+              </a:rPr>
+              <a:t>        </a:t>
+            </a:r>
+            <a:r>
+              <a:rPr lang="en-SG" sz="1200" b="1" dirty="0" err="1">
+                <a:latin typeface="Courier New" panose="02070309020205020404" pitchFamily="49" charset="0"/>
+                <a:cs typeface="Courier New" panose="02070309020205020404" pitchFamily="49" charset="0"/>
+              </a:rPr>
+              <a:t>self.U</a:t>
+            </a:r>
+            <a:r>
+              <a:rPr lang="en-SG" sz="1200" b="1" dirty="0">
+                <a:latin typeface="Courier New" panose="02070309020205020404" pitchFamily="49" charset="0"/>
+                <a:cs typeface="Courier New" panose="02070309020205020404" pitchFamily="49" charset="0"/>
+              </a:rPr>
+              <a:t> = </a:t>
+            </a:r>
+            <a:r>
+              <a:rPr lang="en-SG" sz="1200" b="1" dirty="0" err="1">
+                <a:latin typeface="Courier New" panose="02070309020205020404" pitchFamily="49" charset="0"/>
+                <a:cs typeface="Courier New" panose="02070309020205020404" pitchFamily="49" charset="0"/>
+              </a:rPr>
+              <a:t>nn.Linear</a:t>
+            </a:r>
+            <a:r>
+              <a:rPr lang="en-SG" sz="1200" b="1" dirty="0">
+                <a:latin typeface="Courier New" panose="02070309020205020404" pitchFamily="49" charset="0"/>
+                <a:cs typeface="Courier New" panose="02070309020205020404" pitchFamily="49" charset="0"/>
+              </a:rPr>
+              <a:t>(</a:t>
+            </a:r>
+            <a:r>
+              <a:rPr lang="en-SG" sz="1200" b="1" dirty="0" err="1">
+                <a:latin typeface="Courier New" panose="02070309020205020404" pitchFamily="49" charset="0"/>
+                <a:cs typeface="Courier New" panose="02070309020205020404" pitchFamily="49" charset="0"/>
+              </a:rPr>
+              <a:t>n_in</a:t>
+            </a:r>
+            <a:r>
+              <a:rPr lang="en-SG" sz="1200" b="1" dirty="0">
+                <a:latin typeface="Courier New" panose="02070309020205020404" pitchFamily="49" charset="0"/>
+                <a:cs typeface="Courier New" panose="02070309020205020404" pitchFamily="49" charset="0"/>
+              </a:rPr>
+              <a:t>, </a:t>
+            </a:r>
+            <a:r>
+              <a:rPr lang="en-SG" sz="1200" b="1" dirty="0" err="1">
+                <a:latin typeface="Courier New" panose="02070309020205020404" pitchFamily="49" charset="0"/>
+                <a:cs typeface="Courier New" panose="02070309020205020404" pitchFamily="49" charset="0"/>
+              </a:rPr>
+              <a:t>n_hidden</a:t>
+            </a:r>
+            <a:r>
+              <a:rPr lang="en-SG" sz="1200" b="1" dirty="0">
+                <a:latin typeface="Courier New" panose="02070309020205020404" pitchFamily="49" charset="0"/>
+                <a:cs typeface="Courier New" panose="02070309020205020404" pitchFamily="49" charset="0"/>
+              </a:rPr>
+              <a:t>)</a:t>
+            </a:r>
+          </a:p>
+          <a:p>
+            <a:pPr marL="0" indent="0">
+              <a:buNone/>
+            </a:pPr>
+            <a:r>
+              <a:rPr lang="en-SG" sz="1200" b="1" dirty="0">
+                <a:latin typeface="Courier New" panose="02070309020205020404" pitchFamily="49" charset="0"/>
+                <a:cs typeface="Courier New" panose="02070309020205020404" pitchFamily="49" charset="0"/>
+              </a:rPr>
+              <a:t>        </a:t>
+            </a:r>
+            <a:r>
+              <a:rPr lang="en-SG" sz="1200" b="1" dirty="0" err="1">
+                <a:latin typeface="Courier New" panose="02070309020205020404" pitchFamily="49" charset="0"/>
+                <a:cs typeface="Courier New" panose="02070309020205020404" pitchFamily="49" charset="0"/>
+              </a:rPr>
+              <a:t>self.W</a:t>
+            </a:r>
+            <a:r>
+              <a:rPr lang="en-SG" sz="1200" b="1" dirty="0">
+                <a:latin typeface="Courier New" panose="02070309020205020404" pitchFamily="49" charset="0"/>
+                <a:cs typeface="Courier New" panose="02070309020205020404" pitchFamily="49" charset="0"/>
+              </a:rPr>
+              <a:t> = </a:t>
+            </a:r>
+            <a:r>
+              <a:rPr lang="en-SG" sz="1200" b="1" dirty="0" err="1">
+                <a:latin typeface="Courier New" panose="02070309020205020404" pitchFamily="49" charset="0"/>
+                <a:cs typeface="Courier New" panose="02070309020205020404" pitchFamily="49" charset="0"/>
+              </a:rPr>
+              <a:t>nn.Linear</a:t>
+            </a:r>
+            <a:r>
+              <a:rPr lang="en-SG" sz="1200" b="1" dirty="0">
+                <a:latin typeface="Courier New" panose="02070309020205020404" pitchFamily="49" charset="0"/>
+                <a:cs typeface="Courier New" panose="02070309020205020404" pitchFamily="49" charset="0"/>
+              </a:rPr>
+              <a:t>(</a:t>
+            </a:r>
+            <a:r>
+              <a:rPr lang="en-SG" sz="1200" b="1" dirty="0" err="1">
+                <a:latin typeface="Courier New" panose="02070309020205020404" pitchFamily="49" charset="0"/>
+                <a:cs typeface="Courier New" panose="02070309020205020404" pitchFamily="49" charset="0"/>
+              </a:rPr>
+              <a:t>n_hidden</a:t>
+            </a:r>
+            <a:r>
+              <a:rPr lang="en-SG" sz="1200" b="1" dirty="0">
+                <a:latin typeface="Courier New" panose="02070309020205020404" pitchFamily="49" charset="0"/>
+                <a:cs typeface="Courier New" panose="02070309020205020404" pitchFamily="49" charset="0"/>
+              </a:rPr>
+              <a:t>, </a:t>
+            </a:r>
+            <a:r>
+              <a:rPr lang="en-SG" sz="1200" b="1" dirty="0" err="1">
+                <a:latin typeface="Courier New" panose="02070309020205020404" pitchFamily="49" charset="0"/>
+                <a:cs typeface="Courier New" panose="02070309020205020404" pitchFamily="49" charset="0"/>
+              </a:rPr>
+              <a:t>n_hidden</a:t>
+            </a:r>
+            <a:r>
+              <a:rPr lang="en-SG" sz="1200" b="1" dirty="0">
+                <a:latin typeface="Courier New" panose="02070309020205020404" pitchFamily="49" charset="0"/>
+                <a:cs typeface="Courier New" panose="02070309020205020404" pitchFamily="49" charset="0"/>
+              </a:rPr>
+              <a:t>)</a:t>
+            </a:r>
+          </a:p>
+          <a:p>
+            <a:pPr marL="0" indent="0">
+              <a:buNone/>
+            </a:pPr>
+            <a:r>
+              <a:rPr lang="en-SG" sz="1200" b="1" dirty="0">
+                <a:latin typeface="Courier New" panose="02070309020205020404" pitchFamily="49" charset="0"/>
+                <a:cs typeface="Courier New" panose="02070309020205020404" pitchFamily="49" charset="0"/>
+              </a:rPr>
+              <a:t>        </a:t>
+            </a:r>
+            <a:r>
+              <a:rPr lang="en-SG" sz="1200" b="1" dirty="0" err="1">
+                <a:latin typeface="Courier New" panose="02070309020205020404" pitchFamily="49" charset="0"/>
+                <a:cs typeface="Courier New" panose="02070309020205020404" pitchFamily="49" charset="0"/>
+              </a:rPr>
+              <a:t>self.V</a:t>
+            </a:r>
+            <a:r>
+              <a:rPr lang="en-SG" sz="1200" b="1" dirty="0">
+                <a:latin typeface="Courier New" panose="02070309020205020404" pitchFamily="49" charset="0"/>
+                <a:cs typeface="Courier New" panose="02070309020205020404" pitchFamily="49" charset="0"/>
+              </a:rPr>
+              <a:t> = </a:t>
+            </a:r>
+            <a:r>
+              <a:rPr lang="en-SG" sz="1200" b="1" dirty="0" err="1">
+                <a:latin typeface="Courier New" panose="02070309020205020404" pitchFamily="49" charset="0"/>
+                <a:cs typeface="Courier New" panose="02070309020205020404" pitchFamily="49" charset="0"/>
+              </a:rPr>
+              <a:t>nn.Linear</a:t>
+            </a:r>
+            <a:r>
+              <a:rPr lang="en-SG" sz="1200" b="1" dirty="0">
+                <a:latin typeface="Courier New" panose="02070309020205020404" pitchFamily="49" charset="0"/>
+                <a:cs typeface="Courier New" panose="02070309020205020404" pitchFamily="49" charset="0"/>
+              </a:rPr>
+              <a:t>(</a:t>
+            </a:r>
+            <a:r>
+              <a:rPr lang="en-SG" sz="1200" b="1" dirty="0" err="1">
+                <a:latin typeface="Courier New" panose="02070309020205020404" pitchFamily="49" charset="0"/>
+                <a:cs typeface="Courier New" panose="02070309020205020404" pitchFamily="49" charset="0"/>
+              </a:rPr>
+              <a:t>n_hidden</a:t>
+            </a:r>
+            <a:r>
+              <a:rPr lang="en-SG" sz="1200" b="1" dirty="0">
+                <a:latin typeface="Courier New" panose="02070309020205020404" pitchFamily="49" charset="0"/>
+                <a:cs typeface="Courier New" panose="02070309020205020404" pitchFamily="49" charset="0"/>
+              </a:rPr>
+              <a:t>, </a:t>
+            </a:r>
+            <a:r>
+              <a:rPr lang="en-SG" sz="1200" b="1" dirty="0" err="1">
+                <a:latin typeface="Courier New" panose="02070309020205020404" pitchFamily="49" charset="0"/>
+                <a:cs typeface="Courier New" panose="02070309020205020404" pitchFamily="49" charset="0"/>
+              </a:rPr>
+              <a:t>n_out</a:t>
+            </a:r>
+            <a:r>
+              <a:rPr lang="en-SG" sz="1200" b="1" dirty="0">
+                <a:latin typeface="Courier New" panose="02070309020205020404" pitchFamily="49" charset="0"/>
+                <a:cs typeface="Courier New" panose="02070309020205020404" pitchFamily="49" charset="0"/>
+              </a:rPr>
+              <a:t>)</a:t>
+            </a:r>
+          </a:p>
+        </p:txBody>
+      </p:sp>
+      <p:sp>
+        <p:nvSpPr>
+          <p:cNvPr id="4" name="Content Placeholder 2">
+            <a:extLst>
+              <a:ext uri="{FF2B5EF4-FFF2-40B4-BE49-F238E27FC236}">
+                <a16:creationId xmlns:a16="http://schemas.microsoft.com/office/drawing/2014/main" id="{CBE6DC94-7D26-C5B1-29AD-7AFF5A3D8D57}"/>
+              </a:ext>
+            </a:extLst>
+          </p:cNvPr>
+          <p:cNvSpPr txBox="1">
+            <a:spLocks/>
+          </p:cNvSpPr>
+          <p:nvPr/>
+        </p:nvSpPr>
+        <p:spPr>
+          <a:xfrm>
+            <a:off x="3979248" y="3315196"/>
+            <a:ext cx="5462081" cy="4351338"/>
+          </a:xfrm>
+          <a:prstGeom prst="rect">
+            <a:avLst/>
+          </a:prstGeom>
+        </p:spPr>
+        <p:txBody>
+          <a:bodyPr vert="horz" lIns="91440" tIns="45720" rIns="91440" bIns="45720" numCol="1" rtlCol="0">
+            <a:normAutofit/>
+          </a:bodyPr>
+          <a:lstStyle>
+            <a:lvl1pPr marL="228600" indent="-228600" algn="l" defTabSz="914400" rtl="0" eaLnBrk="1" latinLnBrk="0" hangingPunct="1">
+              <a:lnSpc>
+                <a:spcPct val="90000"/>
+              </a:lnSpc>
+              <a:spcBef>
+                <a:spcPts val="1000"/>
+              </a:spcBef>
+              <a:buFont typeface="Arial" panose="020B0604020202020204" pitchFamily="34" charset="0"/>
+              <a:buChar char="•"/>
+              <a:defRPr sz="2800" kern="1200">
+                <a:solidFill>
+                  <a:schemeClr val="tx1"/>
+                </a:solidFill>
+                <a:latin typeface="Verdana" panose="020B0604030504040204" pitchFamily="34" charset="0"/>
+                <a:ea typeface="Verdana" panose="020B0604030504040204" pitchFamily="34" charset="0"/>
+                <a:cs typeface="+mn-cs"/>
+              </a:defRPr>
+            </a:lvl1pPr>
+            <a:lvl2pPr marL="685800" indent="-228600" algn="l" defTabSz="914400" rtl="0" eaLnBrk="1" latinLnBrk="0" hangingPunct="1">
+              <a:lnSpc>
+                <a:spcPct val="90000"/>
+              </a:lnSpc>
+              <a:spcBef>
+                <a:spcPts val="500"/>
+              </a:spcBef>
+              <a:buFont typeface="Arial" panose="020B0604020202020204" pitchFamily="34" charset="0"/>
+              <a:buChar char="•"/>
+              <a:defRPr sz="2400" kern="1200">
+                <a:solidFill>
+                  <a:schemeClr val="tx1"/>
+                </a:solidFill>
+                <a:latin typeface="Verdana" panose="020B0604030504040204" pitchFamily="34" charset="0"/>
+                <a:ea typeface="Verdana" panose="020B0604030504040204" pitchFamily="34" charset="0"/>
+                <a:cs typeface="+mn-cs"/>
+              </a:defRPr>
+            </a:lvl2pPr>
+            <a:lvl3pPr marL="1143000" indent="-228600" algn="l" defTabSz="914400" rtl="0" eaLnBrk="1" latinLnBrk="0" hangingPunct="1">
+              <a:lnSpc>
+                <a:spcPct val="90000"/>
+              </a:lnSpc>
+              <a:spcBef>
+                <a:spcPts val="500"/>
+              </a:spcBef>
+              <a:buFont typeface="Arial" panose="020B0604020202020204" pitchFamily="34" charset="0"/>
+              <a:buChar char="•"/>
+              <a:defRPr sz="2000" kern="1200">
+                <a:solidFill>
+                  <a:schemeClr val="tx1"/>
+                </a:solidFill>
+                <a:latin typeface="Verdana" panose="020B0604030504040204" pitchFamily="34" charset="0"/>
+                <a:ea typeface="Verdana" panose="020B0604030504040204" pitchFamily="34" charset="0"/>
+                <a:cs typeface="+mn-cs"/>
+              </a:defRPr>
+            </a:lvl3pPr>
+            <a:lvl4pPr marL="1600200" indent="-228600" algn="l" defTabSz="914400" rtl="0" eaLnBrk="1" latinLnBrk="0" hangingPunct="1">
+              <a:lnSpc>
+                <a:spcPct val="90000"/>
+              </a:lnSpc>
+              <a:spcBef>
+                <a:spcPts val="500"/>
+              </a:spcBef>
+              <a:buFont typeface="Arial" panose="020B0604020202020204" pitchFamily="34" charset="0"/>
+              <a:buChar char="•"/>
+              <a:defRPr sz="1800" kern="1200">
+                <a:solidFill>
+                  <a:schemeClr val="tx1"/>
+                </a:solidFill>
+                <a:latin typeface="Verdana" panose="020B0604030504040204" pitchFamily="34" charset="0"/>
+                <a:ea typeface="Verdana" panose="020B0604030504040204" pitchFamily="34" charset="0"/>
+                <a:cs typeface="+mn-cs"/>
+              </a:defRPr>
+            </a:lvl4pPr>
+            <a:lvl5pPr marL="2057400" indent="-228600" algn="l" defTabSz="914400" rtl="0" eaLnBrk="1" latinLnBrk="0" hangingPunct="1">
+              <a:lnSpc>
+                <a:spcPct val="90000"/>
+              </a:lnSpc>
+              <a:spcBef>
+                <a:spcPts val="500"/>
+              </a:spcBef>
+              <a:buFont typeface="Arial" panose="020B0604020202020204" pitchFamily="34" charset="0"/>
+              <a:buChar char="•"/>
+              <a:defRPr sz="1800" kern="1200">
+                <a:solidFill>
+                  <a:schemeClr val="tx1"/>
+                </a:solidFill>
+                <a:latin typeface="Verdana" panose="020B0604030504040204" pitchFamily="34" charset="0"/>
+                <a:ea typeface="Verdana" panose="020B0604030504040204" pitchFamily="34" charset="0"/>
+                <a:cs typeface="+mn-cs"/>
+              </a:defRPr>
+            </a:lvl5pPr>
+            <a:lvl6pPr marL="2514600" indent="-228600" algn="l" defTabSz="914400" rtl="0" eaLnBrk="1" latinLnBrk="0" hangingPunct="1">
+              <a:lnSpc>
+                <a:spcPct val="90000"/>
+              </a:lnSpc>
+              <a:spcBef>
+                <a:spcPts val="500"/>
+              </a:spcBef>
+              <a:buFont typeface="Arial" panose="020B0604020202020204" pitchFamily="34" charset="0"/>
+              <a:buChar char="•"/>
+              <a:defRPr sz="1800" kern="1200">
+                <a:solidFill>
+                  <a:schemeClr val="tx1"/>
+                </a:solidFill>
+                <a:latin typeface="+mn-lt"/>
+                <a:ea typeface="+mn-ea"/>
+                <a:cs typeface="+mn-cs"/>
+              </a:defRPr>
+            </a:lvl6pPr>
+            <a:lvl7pPr marL="2971800" indent="-228600" algn="l" defTabSz="914400" rtl="0" eaLnBrk="1" latinLnBrk="0" hangingPunct="1">
+              <a:lnSpc>
+                <a:spcPct val="90000"/>
+              </a:lnSpc>
+              <a:spcBef>
+                <a:spcPts val="500"/>
+              </a:spcBef>
+              <a:buFont typeface="Arial" panose="020B0604020202020204" pitchFamily="34" charset="0"/>
+              <a:buChar char="•"/>
+              <a:defRPr sz="1800" kern="1200">
+                <a:solidFill>
+                  <a:schemeClr val="tx1"/>
+                </a:solidFill>
+                <a:latin typeface="+mn-lt"/>
+                <a:ea typeface="+mn-ea"/>
+                <a:cs typeface="+mn-cs"/>
+              </a:defRPr>
+            </a:lvl7pPr>
+            <a:lvl8pPr marL="3429000" indent="-228600" algn="l" defTabSz="914400" rtl="0" eaLnBrk="1" latinLnBrk="0" hangingPunct="1">
+              <a:lnSpc>
+                <a:spcPct val="90000"/>
+              </a:lnSpc>
+              <a:spcBef>
+                <a:spcPts val="500"/>
+              </a:spcBef>
+              <a:buFont typeface="Arial" panose="020B0604020202020204" pitchFamily="34" charset="0"/>
+              <a:buChar char="•"/>
+              <a:defRPr sz="1800" kern="1200">
+                <a:solidFill>
+                  <a:schemeClr val="tx1"/>
+                </a:solidFill>
+                <a:latin typeface="+mn-lt"/>
+                <a:ea typeface="+mn-ea"/>
+                <a:cs typeface="+mn-cs"/>
+              </a:defRPr>
+            </a:lvl8pPr>
+            <a:lvl9pPr marL="3886200" indent="-228600" algn="l" defTabSz="914400" rtl="0" eaLnBrk="1" latinLnBrk="0" hangingPunct="1">
+              <a:lnSpc>
+                <a:spcPct val="90000"/>
+              </a:lnSpc>
+              <a:spcBef>
+                <a:spcPts val="500"/>
+              </a:spcBef>
+              <a:buFont typeface="Arial" panose="020B0604020202020204" pitchFamily="34" charset="0"/>
+              <a:buChar char="•"/>
+              <a:defRPr sz="1800" kern="1200">
+                <a:solidFill>
+                  <a:schemeClr val="tx1"/>
+                </a:solidFill>
+                <a:latin typeface="+mn-lt"/>
+                <a:ea typeface="+mn-ea"/>
+                <a:cs typeface="+mn-cs"/>
+              </a:defRPr>
+            </a:lvl9pPr>
+          </a:lstStyle>
+          <a:p>
+            <a:pPr marL="0" indent="0">
+              <a:buFont typeface="Arial" panose="020B0604020202020204" pitchFamily="34" charset="0"/>
+              <a:buNone/>
+            </a:pPr>
+            <a:r>
+              <a:rPr lang="en-SG" sz="1200" b="1" dirty="0">
+                <a:latin typeface="Courier New" panose="02070309020205020404" pitchFamily="49" charset="0"/>
+                <a:cs typeface="Courier New" panose="02070309020205020404" pitchFamily="49" charset="0"/>
+              </a:rPr>
+              <a:t>def forward(self, x):</a:t>
+            </a:r>
+          </a:p>
+          <a:p>
+            <a:pPr marL="0" indent="0">
+              <a:buFont typeface="Arial" panose="020B0604020202020204" pitchFamily="34" charset="0"/>
+              <a:buNone/>
+            </a:pPr>
+            <a:r>
+              <a:rPr lang="en-SG" sz="1200" b="1" dirty="0">
+                <a:latin typeface="Courier New" panose="02070309020205020404" pitchFamily="49" charset="0"/>
+                <a:cs typeface="Courier New" panose="02070309020205020404" pitchFamily="49" charset="0"/>
+              </a:rPr>
+              <a:t>        # x: (batch, time, </a:t>
+            </a:r>
+            <a:r>
+              <a:rPr lang="en-SG" sz="1200" b="1" dirty="0" err="1">
+                <a:latin typeface="Courier New" panose="02070309020205020404" pitchFamily="49" charset="0"/>
+                <a:cs typeface="Courier New" panose="02070309020205020404" pitchFamily="49" charset="0"/>
+              </a:rPr>
+              <a:t>n_in</a:t>
+            </a:r>
+            <a:r>
+              <a:rPr lang="en-SG" sz="1200" b="1" dirty="0">
+                <a:latin typeface="Courier New" panose="02070309020205020404" pitchFamily="49" charset="0"/>
+                <a:cs typeface="Courier New" panose="02070309020205020404" pitchFamily="49" charset="0"/>
+              </a:rPr>
+              <a:t>)</a:t>
+            </a:r>
+          </a:p>
+          <a:p>
+            <a:pPr marL="0" indent="0">
+              <a:buFont typeface="Arial" panose="020B0604020202020204" pitchFamily="34" charset="0"/>
+              <a:buNone/>
+            </a:pPr>
+            <a:r>
+              <a:rPr lang="en-SG" sz="1200" b="1" dirty="0">
+                <a:latin typeface="Courier New" panose="02070309020205020404" pitchFamily="49" charset="0"/>
+                <a:cs typeface="Courier New" panose="02070309020205020404" pitchFamily="49" charset="0"/>
+              </a:rPr>
+              <a:t>        h = </a:t>
+            </a:r>
+            <a:r>
+              <a:rPr lang="en-SG" sz="1200" b="1" dirty="0" err="1">
+                <a:latin typeface="Courier New" panose="02070309020205020404" pitchFamily="49" charset="0"/>
+                <a:cs typeface="Courier New" panose="02070309020205020404" pitchFamily="49" charset="0"/>
+              </a:rPr>
+              <a:t>torch.zeros</a:t>
+            </a:r>
+            <a:r>
+              <a:rPr lang="en-SG" sz="1200" b="1" dirty="0">
+                <a:latin typeface="Courier New" panose="02070309020205020404" pitchFamily="49" charset="0"/>
+                <a:cs typeface="Courier New" panose="02070309020205020404" pitchFamily="49" charset="0"/>
+              </a:rPr>
+              <a:t>(</a:t>
+            </a:r>
+            <a:r>
+              <a:rPr lang="en-SG" sz="1200" b="1" dirty="0" err="1">
+                <a:latin typeface="Courier New" panose="02070309020205020404" pitchFamily="49" charset="0"/>
+                <a:cs typeface="Courier New" panose="02070309020205020404" pitchFamily="49" charset="0"/>
+              </a:rPr>
+              <a:t>x.size</a:t>
+            </a:r>
+            <a:r>
+              <a:rPr lang="en-SG" sz="1200" b="1" dirty="0">
+                <a:latin typeface="Courier New" panose="02070309020205020404" pitchFamily="49" charset="0"/>
+                <a:cs typeface="Courier New" panose="02070309020205020404" pitchFamily="49" charset="0"/>
+              </a:rPr>
+              <a:t>(0), </a:t>
+            </a:r>
+            <a:r>
+              <a:rPr lang="en-SG" sz="1200" b="1" dirty="0" err="1">
+                <a:latin typeface="Courier New" panose="02070309020205020404" pitchFamily="49" charset="0"/>
+                <a:cs typeface="Courier New" panose="02070309020205020404" pitchFamily="49" charset="0"/>
+              </a:rPr>
+              <a:t>self.W.out_features</a:t>
+            </a:r>
+            <a:r>
+              <a:rPr lang="en-SG" sz="1200" b="1" dirty="0">
+                <a:latin typeface="Courier New" panose="02070309020205020404" pitchFamily="49" charset="0"/>
+                <a:cs typeface="Courier New" panose="02070309020205020404" pitchFamily="49" charset="0"/>
+              </a:rPr>
+              <a:t>)</a:t>
+            </a:r>
+          </a:p>
+          <a:p>
+            <a:pPr marL="0" indent="0">
+              <a:buFont typeface="Arial" panose="020B0604020202020204" pitchFamily="34" charset="0"/>
+              <a:buNone/>
+            </a:pPr>
+            <a:r>
+              <a:rPr lang="en-SG" sz="1200" b="1" dirty="0">
+                <a:latin typeface="Courier New" panose="02070309020205020404" pitchFamily="49" charset="0"/>
+                <a:cs typeface="Courier New" panose="02070309020205020404" pitchFamily="49" charset="0"/>
+              </a:rPr>
+              <a:t>        outputs = []</a:t>
+            </a:r>
+          </a:p>
+          <a:p>
+            <a:pPr marL="0" indent="0">
+              <a:buFont typeface="Arial" panose="020B0604020202020204" pitchFamily="34" charset="0"/>
+              <a:buNone/>
+            </a:pPr>
+            <a:r>
+              <a:rPr lang="en-SG" sz="1200" b="1" dirty="0">
+                <a:latin typeface="Courier New" panose="02070309020205020404" pitchFamily="49" charset="0"/>
+                <a:cs typeface="Courier New" panose="02070309020205020404" pitchFamily="49" charset="0"/>
+              </a:rPr>
+              <a:t>        for t in range(</a:t>
+            </a:r>
+            <a:r>
+              <a:rPr lang="en-SG" sz="1200" b="1" dirty="0" err="1">
+                <a:latin typeface="Courier New" panose="02070309020205020404" pitchFamily="49" charset="0"/>
+                <a:cs typeface="Courier New" panose="02070309020205020404" pitchFamily="49" charset="0"/>
+              </a:rPr>
+              <a:t>x.size</a:t>
+            </a:r>
+            <a:r>
+              <a:rPr lang="en-SG" sz="1200" b="1" dirty="0">
+                <a:latin typeface="Courier New" panose="02070309020205020404" pitchFamily="49" charset="0"/>
+                <a:cs typeface="Courier New" panose="02070309020205020404" pitchFamily="49" charset="0"/>
+              </a:rPr>
+              <a:t>(1)):</a:t>
+            </a:r>
+          </a:p>
+          <a:p>
+            <a:pPr marL="0" indent="0">
+              <a:buFont typeface="Arial" panose="020B0604020202020204" pitchFamily="34" charset="0"/>
+              <a:buNone/>
+            </a:pPr>
+            <a:r>
+              <a:rPr lang="en-SG" sz="1200" b="1" dirty="0">
+                <a:latin typeface="Courier New" panose="02070309020205020404" pitchFamily="49" charset="0"/>
+                <a:cs typeface="Courier New" panose="02070309020205020404" pitchFamily="49" charset="0"/>
+              </a:rPr>
+              <a:t>            h = </a:t>
+            </a:r>
+            <a:r>
+              <a:rPr lang="en-SG" sz="1200" b="1" dirty="0" err="1">
+                <a:latin typeface="Courier New" panose="02070309020205020404" pitchFamily="49" charset="0"/>
+                <a:cs typeface="Courier New" panose="02070309020205020404" pitchFamily="49" charset="0"/>
+              </a:rPr>
+              <a:t>torch.tanh</a:t>
+            </a:r>
+            <a:r>
+              <a:rPr lang="en-SG" sz="1200" b="1" dirty="0">
+                <a:latin typeface="Courier New" panose="02070309020205020404" pitchFamily="49" charset="0"/>
+                <a:cs typeface="Courier New" panose="02070309020205020404" pitchFamily="49" charset="0"/>
+              </a:rPr>
+              <a:t>(</a:t>
+            </a:r>
+            <a:r>
+              <a:rPr lang="en-SG" sz="1200" b="1" dirty="0" err="1">
+                <a:latin typeface="Courier New" panose="02070309020205020404" pitchFamily="49" charset="0"/>
+                <a:cs typeface="Courier New" panose="02070309020205020404" pitchFamily="49" charset="0"/>
+              </a:rPr>
+              <a:t>self.U</a:t>
+            </a:r>
+            <a:r>
+              <a:rPr lang="en-SG" sz="1200" b="1" dirty="0">
+                <a:latin typeface="Courier New" panose="02070309020205020404" pitchFamily="49" charset="0"/>
+                <a:cs typeface="Courier New" panose="02070309020205020404" pitchFamily="49" charset="0"/>
+              </a:rPr>
+              <a:t>(x[:, t, :]) + </a:t>
+            </a:r>
+            <a:r>
+              <a:rPr lang="en-SG" sz="1200" b="1" dirty="0" err="1">
+                <a:latin typeface="Courier New" panose="02070309020205020404" pitchFamily="49" charset="0"/>
+                <a:cs typeface="Courier New" panose="02070309020205020404" pitchFamily="49" charset="0"/>
+              </a:rPr>
+              <a:t>self.W</a:t>
+            </a:r>
+            <a:r>
+              <a:rPr lang="en-SG" sz="1200" b="1" dirty="0">
+                <a:latin typeface="Courier New" panose="02070309020205020404" pitchFamily="49" charset="0"/>
+                <a:cs typeface="Courier New" panose="02070309020205020404" pitchFamily="49" charset="0"/>
+              </a:rPr>
+              <a:t>(h))</a:t>
+            </a:r>
+          </a:p>
+          <a:p>
+            <a:pPr marL="0" indent="0">
+              <a:buFont typeface="Arial" panose="020B0604020202020204" pitchFamily="34" charset="0"/>
+              <a:buNone/>
+            </a:pPr>
+            <a:endParaRPr lang="en-SG" sz="1200" b="1" dirty="0">
+              <a:latin typeface="Courier New" panose="02070309020205020404" pitchFamily="49" charset="0"/>
+              <a:cs typeface="Courier New" panose="02070309020205020404" pitchFamily="49" charset="0"/>
+            </a:endParaRPr>
+          </a:p>
+          <a:p>
+            <a:pPr marL="0" indent="0">
+              <a:buFont typeface="Arial" panose="020B0604020202020204" pitchFamily="34" charset="0"/>
+              <a:buNone/>
+            </a:pPr>
+            <a:r>
+              <a:rPr lang="en-SG" sz="1200" b="1" dirty="0">
+                <a:latin typeface="Courier New" panose="02070309020205020404" pitchFamily="49" charset="0"/>
+                <a:cs typeface="Courier New" panose="02070309020205020404" pitchFamily="49" charset="0"/>
+              </a:rPr>
+              <a:t>            y = </a:t>
+            </a:r>
+            <a:r>
+              <a:rPr lang="en-SG" sz="1200" b="1" dirty="0" err="1">
+                <a:latin typeface="Courier New" panose="02070309020205020404" pitchFamily="49" charset="0"/>
+                <a:cs typeface="Courier New" panose="02070309020205020404" pitchFamily="49" charset="0"/>
+              </a:rPr>
+              <a:t>self.V</a:t>
+            </a:r>
+            <a:r>
+              <a:rPr lang="en-SG" sz="1200" b="1" dirty="0">
+                <a:latin typeface="Courier New" panose="02070309020205020404" pitchFamily="49" charset="0"/>
+                <a:cs typeface="Courier New" panose="02070309020205020404" pitchFamily="49" charset="0"/>
+              </a:rPr>
+              <a:t>(h)</a:t>
+            </a:r>
+          </a:p>
+          <a:p>
+            <a:pPr marL="0" indent="0">
+              <a:buFont typeface="Arial" panose="020B0604020202020204" pitchFamily="34" charset="0"/>
+              <a:buNone/>
+            </a:pPr>
+            <a:r>
+              <a:rPr lang="en-SG" sz="1200" b="1" dirty="0">
+                <a:latin typeface="Courier New" panose="02070309020205020404" pitchFamily="49" charset="0"/>
+                <a:cs typeface="Courier New" panose="02070309020205020404" pitchFamily="49" charset="0"/>
+              </a:rPr>
+              <a:t>            </a:t>
+            </a:r>
+            <a:r>
+              <a:rPr lang="en-SG" sz="1200" b="1" dirty="0" err="1">
+                <a:latin typeface="Courier New" panose="02070309020205020404" pitchFamily="49" charset="0"/>
+                <a:cs typeface="Courier New" panose="02070309020205020404" pitchFamily="49" charset="0"/>
+              </a:rPr>
+              <a:t>outputs.append</a:t>
+            </a:r>
+            <a:r>
+              <a:rPr lang="en-SG" sz="1200" b="1" dirty="0">
+                <a:latin typeface="Courier New" panose="02070309020205020404" pitchFamily="49" charset="0"/>
+                <a:cs typeface="Courier New" panose="02070309020205020404" pitchFamily="49" charset="0"/>
+              </a:rPr>
+              <a:t>(y)</a:t>
+            </a:r>
+          </a:p>
+          <a:p>
+            <a:pPr marL="0" indent="0">
+              <a:buFont typeface="Arial" panose="020B0604020202020204" pitchFamily="34" charset="0"/>
+              <a:buNone/>
+            </a:pPr>
+            <a:endParaRPr lang="en-SG" sz="1200" b="1" dirty="0">
+              <a:latin typeface="Courier New" panose="02070309020205020404" pitchFamily="49" charset="0"/>
+              <a:cs typeface="Courier New" panose="02070309020205020404" pitchFamily="49" charset="0"/>
+            </a:endParaRPr>
+          </a:p>
+          <a:p>
+            <a:pPr marL="0" indent="0">
+              <a:buFont typeface="Arial" panose="020B0604020202020204" pitchFamily="34" charset="0"/>
+              <a:buNone/>
+            </a:pPr>
+            <a:r>
+              <a:rPr lang="en-SG" sz="1200" b="1" dirty="0">
+                <a:latin typeface="Courier New" panose="02070309020205020404" pitchFamily="49" charset="0"/>
+                <a:cs typeface="Courier New" panose="02070309020205020404" pitchFamily="49" charset="0"/>
+              </a:rPr>
+              <a:t>        return </a:t>
+            </a:r>
+            <a:r>
+              <a:rPr lang="en-SG" sz="1200" b="1" dirty="0" err="1">
+                <a:latin typeface="Courier New" panose="02070309020205020404" pitchFamily="49" charset="0"/>
+                <a:cs typeface="Courier New" panose="02070309020205020404" pitchFamily="49" charset="0"/>
+              </a:rPr>
+              <a:t>torch.stack</a:t>
+            </a:r>
+            <a:r>
+              <a:rPr lang="en-SG" sz="1200" b="1" dirty="0">
+                <a:latin typeface="Courier New" panose="02070309020205020404" pitchFamily="49" charset="0"/>
+                <a:cs typeface="Courier New" panose="02070309020205020404" pitchFamily="49" charset="0"/>
+              </a:rPr>
+              <a:t>(outputs, dim=1)</a:t>
+            </a:r>
+          </a:p>
+        </p:txBody>
+      </p:sp>
+      <mc:AlternateContent xmlns:mc="http://schemas.openxmlformats.org/markup-compatibility/2006" xmlns:a14="http://schemas.microsoft.com/office/drawing/2010/main">
+        <mc:Choice Requires="a14">
+          <p:sp>
+            <p:nvSpPr>
+              <p:cNvPr id="5" name="TextBox 4">
+                <a:extLst>
+                  <a:ext uri="{FF2B5EF4-FFF2-40B4-BE49-F238E27FC236}">
+                    <a16:creationId xmlns:a16="http://schemas.microsoft.com/office/drawing/2014/main" id="{54A95B21-1D66-C578-9FD8-CCE6C6109649}"/>
+                  </a:ext>
+                </a:extLst>
+              </p:cNvPr>
+              <p:cNvSpPr txBox="1"/>
+              <p:nvPr/>
+            </p:nvSpPr>
+            <p:spPr>
+              <a:xfrm>
+                <a:off x="5406886" y="1556510"/>
+                <a:ext cx="2951922" cy="1477328"/>
+              </a:xfrm>
+              <a:prstGeom prst="rect">
+                <a:avLst/>
+              </a:prstGeom>
+              <a:noFill/>
+            </p:spPr>
+            <p:txBody>
+              <a:bodyPr wrap="square" rtlCol="0">
+                <a:spAutoFit/>
+              </a:bodyPr>
+              <a:lstStyle/>
+              <a:p>
+                <a:r>
+                  <a:rPr lang="en-US" dirty="0"/>
+                  <a:t>Forward pass:</a:t>
+                </a:r>
+              </a:p>
+              <a:p>
+                <a:endParaRPr lang="en-US" dirty="0"/>
+              </a:p>
+              <a:p>
+                <a:pPr/>
+                <a14:m>
+                  <m:oMathPara xmlns:m="http://schemas.openxmlformats.org/officeDocument/2006/math">
+                    <m:oMath>
+                      <m:sSub>
+                        <m:sSubPr>
+                          <m:ctrlPr>
+                            <a:rPr lang="en-US" b="0" i="1" smtClean="0">
+                              <a:latin typeface="Cambria Math" panose="02040503050406030204" pitchFamily="18" charset="0"/>
+                            </a:rPr>
+                          </m:ctrlPr>
+                        </m:sSubPr>
+                        <m:e>
+                          <m:r>
+                            <a:rPr lang="en-US" b="0" i="1" smtClean="0">
+                              <a:latin typeface="Cambria Math" panose="02040503050406030204" pitchFamily="18" charset="0"/>
+                            </a:rPr>
+                            <m:t>ℎ</m:t>
+                          </m:r>
+                        </m:e>
+                        <m:sub>
+                          <m:r>
+                            <a:rPr lang="en-US" b="0" i="1" smtClean="0">
+                              <a:latin typeface="Cambria Math" panose="02040503050406030204" pitchFamily="18" charset="0"/>
+                            </a:rPr>
+                            <m:t>𝑡</m:t>
+                          </m:r>
+                        </m:sub>
+                      </m:sSub>
+                      <m:r>
+                        <a:rPr lang="en-US" b="0" i="1" smtClean="0">
+                          <a:latin typeface="Cambria Math" panose="02040503050406030204" pitchFamily="18" charset="0"/>
+                        </a:rPr>
+                        <m:t>=</m:t>
+                      </m:r>
+                      <m:func>
+                        <m:funcPr>
+                          <m:ctrlPr>
+                            <a:rPr lang="en-US" b="0" i="0" smtClean="0">
+                              <a:latin typeface="Cambria Math" panose="02040503050406030204" pitchFamily="18" charset="0"/>
+                            </a:rPr>
+                          </m:ctrlPr>
+                        </m:funcPr>
+                        <m:fName>
+                          <m:r>
+                            <m:rPr>
+                              <m:sty m:val="p"/>
+                            </m:rPr>
+                            <a:rPr lang="en-US" b="0" i="0" smtClean="0">
+                              <a:latin typeface="Cambria Math" panose="02040503050406030204" pitchFamily="18" charset="0"/>
+                            </a:rPr>
+                            <m:t>tanh</m:t>
+                          </m:r>
+                        </m:fName>
+                        <m:e>
+                          <m:d>
+                            <m:dPr>
+                              <m:ctrlPr>
+                                <a:rPr lang="en-US" b="0" i="1" smtClean="0">
+                                  <a:latin typeface="Cambria Math" panose="02040503050406030204" pitchFamily="18" charset="0"/>
+                                </a:rPr>
+                              </m:ctrlPr>
+                            </m:dPr>
+                            <m:e>
+                              <m:r>
+                                <a:rPr lang="en-US" b="0" i="1" smtClean="0">
+                                  <a:latin typeface="Cambria Math" panose="02040503050406030204" pitchFamily="18" charset="0"/>
+                                </a:rPr>
+                                <m:t>𝑈</m:t>
+                              </m:r>
+                              <m:sSub>
+                                <m:sSubPr>
+                                  <m:ctrlPr>
+                                    <a:rPr lang="en-US" b="0" i="1" smtClean="0">
+                                      <a:latin typeface="Cambria Math" panose="02040503050406030204" pitchFamily="18" charset="0"/>
+                                    </a:rPr>
+                                  </m:ctrlPr>
+                                </m:sSubPr>
+                                <m:e>
+                                  <m:r>
+                                    <a:rPr lang="en-US" b="0" i="1" smtClean="0">
+                                      <a:latin typeface="Cambria Math" panose="02040503050406030204" pitchFamily="18" charset="0"/>
+                                    </a:rPr>
+                                    <m:t>𝑥</m:t>
+                                  </m:r>
+                                </m:e>
+                                <m:sub>
+                                  <m:r>
+                                    <a:rPr lang="en-US" b="0" i="1" smtClean="0">
+                                      <a:latin typeface="Cambria Math" panose="02040503050406030204" pitchFamily="18" charset="0"/>
+                                    </a:rPr>
+                                    <m:t>𝑡</m:t>
+                                  </m:r>
+                                </m:sub>
+                              </m:sSub>
+                              <m:r>
+                                <a:rPr lang="en-US" b="0" i="1" smtClean="0">
+                                  <a:latin typeface="Cambria Math" panose="02040503050406030204" pitchFamily="18" charset="0"/>
+                                </a:rPr>
+                                <m:t>+</m:t>
+                              </m:r>
+                              <m:r>
+                                <a:rPr lang="en-US" b="0" i="1" smtClean="0">
+                                  <a:latin typeface="Cambria Math" panose="02040503050406030204" pitchFamily="18" charset="0"/>
+                                </a:rPr>
+                                <m:t>𝑊</m:t>
+                              </m:r>
+                              <m:sSub>
+                                <m:sSubPr>
+                                  <m:ctrlPr>
+                                    <a:rPr lang="en-US" b="0" i="1" smtClean="0">
+                                      <a:latin typeface="Cambria Math" panose="02040503050406030204" pitchFamily="18" charset="0"/>
+                                    </a:rPr>
+                                  </m:ctrlPr>
+                                </m:sSubPr>
+                                <m:e>
+                                  <m:r>
+                                    <a:rPr lang="en-US" b="0" i="1" smtClean="0">
+                                      <a:latin typeface="Cambria Math" panose="02040503050406030204" pitchFamily="18" charset="0"/>
+                                    </a:rPr>
+                                    <m:t>ℎ</m:t>
+                                  </m:r>
+                                </m:e>
+                                <m:sub>
+                                  <m:r>
+                                    <a:rPr lang="en-US" b="0" i="1" smtClean="0">
+                                      <a:latin typeface="Cambria Math" panose="02040503050406030204" pitchFamily="18" charset="0"/>
+                                    </a:rPr>
+                                    <m:t>𝑡</m:t>
+                                  </m:r>
+                                  <m:r>
+                                    <a:rPr lang="en-US" b="0" i="1" smtClean="0">
+                                      <a:latin typeface="Cambria Math" panose="02040503050406030204" pitchFamily="18" charset="0"/>
+                                    </a:rPr>
+                                    <m:t>−1</m:t>
+                                  </m:r>
+                                </m:sub>
+                              </m:sSub>
+                            </m:e>
+                          </m:d>
+                        </m:e>
+                      </m:func>
+                    </m:oMath>
+                  </m:oMathPara>
+                </a14:m>
+                <a:endParaRPr lang="en-US" b="0" dirty="0"/>
+              </a:p>
+              <a:p>
+                <a:endParaRPr lang="en-SG" dirty="0"/>
+              </a:p>
+              <a:p>
+                <a:pPr/>
+                <a14:m>
+                  <m:oMathPara xmlns:m="http://schemas.openxmlformats.org/officeDocument/2006/math">
+                    <m:oMath>
+                      <m:sSub>
+                        <m:sSubPr>
+                          <m:ctrlPr>
+                            <a:rPr lang="en-US" b="0" i="1" smtClean="0">
+                              <a:latin typeface="Cambria Math" panose="02040503050406030204" pitchFamily="18" charset="0"/>
+                            </a:rPr>
+                          </m:ctrlPr>
+                        </m:sSubPr>
+                        <m:e>
+                          <m:r>
+                            <a:rPr lang="en-US" b="0" i="1" smtClean="0">
+                              <a:latin typeface="Cambria Math" panose="02040503050406030204" pitchFamily="18" charset="0"/>
+                            </a:rPr>
+                            <m:t>𝑦</m:t>
+                          </m:r>
+                        </m:e>
+                        <m:sub>
+                          <m:r>
+                            <a:rPr lang="en-US" b="0" i="1" smtClean="0">
+                              <a:latin typeface="Cambria Math" panose="02040503050406030204" pitchFamily="18" charset="0"/>
+                            </a:rPr>
+                            <m:t>𝑡</m:t>
+                          </m:r>
+                        </m:sub>
+                      </m:sSub>
+                      <m:r>
+                        <a:rPr lang="en-US" b="0" i="1" smtClean="0">
+                          <a:latin typeface="Cambria Math" panose="02040503050406030204" pitchFamily="18" charset="0"/>
+                        </a:rPr>
+                        <m:t>=</m:t>
+                      </m:r>
+                      <m:r>
+                        <a:rPr lang="en-US" b="0" i="1" smtClean="0">
+                          <a:latin typeface="Cambria Math" panose="02040503050406030204" pitchFamily="18" charset="0"/>
+                        </a:rPr>
+                        <m:t>𝑉</m:t>
+                      </m:r>
+                      <m:sSub>
+                        <m:sSubPr>
+                          <m:ctrlPr>
+                            <a:rPr lang="en-US" b="0" i="1" smtClean="0">
+                              <a:latin typeface="Cambria Math" panose="02040503050406030204" pitchFamily="18" charset="0"/>
+                            </a:rPr>
+                          </m:ctrlPr>
+                        </m:sSubPr>
+                        <m:e>
+                          <m:r>
+                            <a:rPr lang="en-US" b="0" i="1" smtClean="0">
+                              <a:latin typeface="Cambria Math" panose="02040503050406030204" pitchFamily="18" charset="0"/>
+                            </a:rPr>
+                            <m:t>ℎ</m:t>
+                          </m:r>
+                        </m:e>
+                        <m:sub>
+                          <m:r>
+                            <a:rPr lang="en-US" b="0" i="1" smtClean="0">
+                              <a:latin typeface="Cambria Math" panose="02040503050406030204" pitchFamily="18" charset="0"/>
+                            </a:rPr>
+                            <m:t>𝑡</m:t>
+                          </m:r>
+                        </m:sub>
+                      </m:sSub>
+                    </m:oMath>
+                  </m:oMathPara>
+                </a14:m>
+                <a:endParaRPr lang="en-SG" dirty="0"/>
+              </a:p>
+            </p:txBody>
+          </p:sp>
+        </mc:Choice>
+        <mc:Fallback xmlns="">
+          <p:sp>
+            <p:nvSpPr>
+              <p:cNvPr id="5" name="TextBox 4">
+                <a:extLst>
+                  <a:ext uri="{FF2B5EF4-FFF2-40B4-BE49-F238E27FC236}">
+                    <a16:creationId xmlns:a16="http://schemas.microsoft.com/office/drawing/2014/main" id="{54A95B21-1D66-C578-9FD8-CCE6C6109649}"/>
+                  </a:ext>
+                </a:extLst>
+              </p:cNvPr>
+              <p:cNvSpPr txBox="1">
+                <a:spLocks noRot="1" noChangeAspect="1" noMove="1" noResize="1" noEditPoints="1" noAdjustHandles="1" noChangeArrowheads="1" noChangeShapeType="1" noTextEdit="1"/>
+              </p:cNvSpPr>
+              <p:nvPr/>
+            </p:nvSpPr>
+            <p:spPr>
+              <a:xfrm>
+                <a:off x="5406886" y="1556510"/>
+                <a:ext cx="2951922" cy="1477328"/>
+              </a:xfrm>
+              <a:prstGeom prst="rect">
+                <a:avLst/>
+              </a:prstGeom>
+              <a:blipFill>
+                <a:blip r:embed="rId2"/>
+                <a:stretch>
+                  <a:fillRect l="-1860" t="-2058" b="-1646"/>
+                </a:stretch>
+              </a:blipFill>
+            </p:spPr>
+            <p:txBody>
+              <a:bodyPr/>
+              <a:lstStyle/>
+              <a:p>
+                <a:r>
+                  <a:rPr lang="en-SG">
+                    <a:noFill/>
+                  </a:rPr>
+                  <a:t> </a:t>
+                </a:r>
+              </a:p>
+            </p:txBody>
+          </p:sp>
+        </mc:Fallback>
+      </mc:AlternateContent>
+      <mc:AlternateContent xmlns:mc="http://schemas.openxmlformats.org/markup-compatibility/2006" xmlns:a14="http://schemas.microsoft.com/office/drawing/2010/main">
+        <mc:Choice Requires="a14">
+          <p:sp>
+            <p:nvSpPr>
+              <p:cNvPr id="6" name="TextBox 5">
+                <a:extLst>
+                  <a:ext uri="{FF2B5EF4-FFF2-40B4-BE49-F238E27FC236}">
+                    <a16:creationId xmlns:a16="http://schemas.microsoft.com/office/drawing/2014/main" id="{5D7E0FD0-FDEF-734B-CB9C-059954C21C3B}"/>
+                  </a:ext>
+                </a:extLst>
+              </p:cNvPr>
+              <p:cNvSpPr txBox="1"/>
+              <p:nvPr/>
+            </p:nvSpPr>
+            <p:spPr>
+              <a:xfrm>
+                <a:off x="628650" y="5312465"/>
+                <a:ext cx="2902227" cy="646331"/>
+              </a:xfrm>
+              <a:prstGeom prst="rect">
+                <a:avLst/>
+              </a:prstGeom>
+              <a:noFill/>
+            </p:spPr>
+            <p:txBody>
+              <a:bodyPr wrap="square" rtlCol="0">
+                <a:spAutoFit/>
+              </a:bodyPr>
+              <a:lstStyle/>
+              <a:p>
+                <a:r>
+                  <a:rPr lang="en-US" dirty="0"/>
+                  <a:t>Instantiate affine transforms </a:t>
+                </a:r>
+                <a14:m>
+                  <m:oMath xmlns:m="http://schemas.openxmlformats.org/officeDocument/2006/math">
+                    <m:r>
+                      <a:rPr lang="en-US" b="0" i="1" smtClean="0">
+                        <a:latin typeface="Cambria Math" panose="02040503050406030204" pitchFamily="18" charset="0"/>
+                      </a:rPr>
+                      <m:t>𝑈</m:t>
+                    </m:r>
+                  </m:oMath>
+                </a14:m>
+                <a:r>
+                  <a:rPr lang="en-SG" dirty="0"/>
+                  <a:t>, </a:t>
+                </a:r>
+                <a14:m>
+                  <m:oMath xmlns:m="http://schemas.openxmlformats.org/officeDocument/2006/math">
+                    <m:r>
+                      <a:rPr lang="en-US" b="0" i="1" smtClean="0">
+                        <a:latin typeface="Cambria Math" panose="02040503050406030204" pitchFamily="18" charset="0"/>
+                      </a:rPr>
+                      <m:t>𝑊</m:t>
+                    </m:r>
+                  </m:oMath>
+                </a14:m>
+                <a:r>
+                  <a:rPr lang="en-SG" dirty="0"/>
+                  <a:t>, and </a:t>
+                </a:r>
+                <a14:m>
+                  <m:oMath xmlns:m="http://schemas.openxmlformats.org/officeDocument/2006/math">
+                    <m:r>
+                      <a:rPr lang="en-US" b="0" i="1" smtClean="0">
+                        <a:latin typeface="Cambria Math" panose="02040503050406030204" pitchFamily="18" charset="0"/>
+                      </a:rPr>
+                      <m:t>𝑉</m:t>
+                    </m:r>
+                  </m:oMath>
+                </a14:m>
+                <a:endParaRPr lang="en-SG" dirty="0"/>
+              </a:p>
+            </p:txBody>
+          </p:sp>
+        </mc:Choice>
+        <mc:Fallback xmlns="">
+          <p:sp>
+            <p:nvSpPr>
+              <p:cNvPr id="6" name="TextBox 5">
+                <a:extLst>
+                  <a:ext uri="{FF2B5EF4-FFF2-40B4-BE49-F238E27FC236}">
+                    <a16:creationId xmlns:a16="http://schemas.microsoft.com/office/drawing/2014/main" id="{5D7E0FD0-FDEF-734B-CB9C-059954C21C3B}"/>
+                  </a:ext>
+                </a:extLst>
+              </p:cNvPr>
+              <p:cNvSpPr txBox="1">
+                <a:spLocks noRot="1" noChangeAspect="1" noMove="1" noResize="1" noEditPoints="1" noAdjustHandles="1" noChangeArrowheads="1" noChangeShapeType="1" noTextEdit="1"/>
+              </p:cNvSpPr>
+              <p:nvPr/>
+            </p:nvSpPr>
+            <p:spPr>
+              <a:xfrm>
+                <a:off x="628650" y="5312465"/>
+                <a:ext cx="2902227" cy="646331"/>
+              </a:xfrm>
+              <a:prstGeom prst="rect">
+                <a:avLst/>
+              </a:prstGeom>
+              <a:blipFill>
+                <a:blip r:embed="rId3"/>
+                <a:stretch>
+                  <a:fillRect l="-1681" t="-4717" b="-14151"/>
+                </a:stretch>
+              </a:blipFill>
+            </p:spPr>
+            <p:txBody>
+              <a:bodyPr/>
+              <a:lstStyle/>
+              <a:p>
+                <a:r>
+                  <a:rPr lang="en-SG">
+                    <a:noFill/>
+                  </a:rPr>
+                  <a:t> </a:t>
+                </a:r>
+              </a:p>
+            </p:txBody>
+          </p:sp>
+        </mc:Fallback>
+      </mc:AlternateContent>
+    </p:spTree>
+    <p:extLst>
+      <p:ext uri="{BB962C8B-B14F-4D97-AF65-F5344CB8AC3E}">
+        <p14:creationId xmlns:p14="http://schemas.microsoft.com/office/powerpoint/2010/main" val="2840551416"/>
+      </p:ext>
+    </p:extLst>
+  </p:cSld>
+  <p:clrMapOvr>
+    <a:masterClrMapping/>
+  </p:clrMapOvr>
+</p:sld>
+</file>
+
+<file path=ppt/slides/slide7.xml><?xml version="1.0" encoding="utf-8"?>
 <p:sld xmlns:a="http://schemas.openxmlformats.org/drawingml/2006/main" xmlns:r="http://schemas.openxmlformats.org/officeDocument/2006/relationships" xmlns:p="http://schemas.openxmlformats.org/presentationml/2006/main">
   <p:cSld>
     <p:spTree>
@@ -12053,7 +16958,7 @@
           <a:p>
             <a:r>
               <a:rPr lang="en-US" dirty="0"/>
-              <a:t>Using neural network models represent joint probabilities of sequences</a:t>
+              <a:t>Using neural networks to represent joint probabilities of sequences</a:t>
             </a:r>
             <a:endParaRPr lang="en-SG" dirty="0"/>
           </a:p>
@@ -13485,7 +18390,7 @@
 </p:sld>
 </file>
 
-<file path=ppt/slides/slide6.xml><?xml version="1.0" encoding="utf-8"?>
+<file path=ppt/slides/slide8.xml><?xml version="1.0" encoding="utf-8"?>
 <p:sld xmlns:a="http://schemas.openxmlformats.org/drawingml/2006/main" xmlns:r="http://schemas.openxmlformats.org/officeDocument/2006/relationships" xmlns:p="http://schemas.openxmlformats.org/presentationml/2006/main">
   <p:cSld>
     <p:spTree>
@@ -13549,14 +18454,19 @@
                 <p:ph idx="1"/>
               </p:nvPr>
             </p:nvSpPr>
-            <p:spPr/>
+            <p:spPr>
+              <a:xfrm>
+                <a:off x="605547" y="1835353"/>
+                <a:ext cx="7886700" cy="4351338"/>
+              </a:xfrm>
+            </p:spPr>
             <p:txBody>
               <a:bodyPr/>
               <a:lstStyle/>
               <a:p>
                 <a:r>
                   <a:rPr lang="en-US" dirty="0"/>
-                  <a:t>Assuming the conditional probability only depends on the immediate past:</a:t>
+                  <a:t>Assuming that the conditional probability depends only on the immediately preceding state:</a:t>
                 </a:r>
               </a:p>
               <a:p>
@@ -13816,10 +18726,14 @@
               </p:nvPr>
             </p:nvSpPr>
             <p:spPr>
+              <a:xfrm>
+                <a:off x="605547" y="1835353"/>
+                <a:ext cx="7886700" cy="4351338"/>
+              </a:xfrm>
               <a:blipFill>
                 <a:blip r:embed="rId2"/>
                 <a:stretch>
-                  <a:fillRect l="-1391" t="-2381" r="-2009"/>
+                  <a:fillRect l="-1391" t="-2381" r="-1700"/>
                 </a:stretch>
               </a:blipFill>
             </p:spPr>
@@ -13884,10 +18798,7 @@
                 <a:pPr algn="ctr"/>
                 <a14:m>
                   <m:oMathPara xmlns:m="http://schemas.openxmlformats.org/officeDocument/2006/math">
-                    <m:oMathParaPr>
-                      <m:jc m:val="centerGroup"/>
-                    </m:oMathParaPr>
-                    <m:oMath xmlns:m="http://schemas.openxmlformats.org/officeDocument/2006/math">
+                    <m:oMath>
                       <m:sSub>
                         <m:sSubPr>
                           <m:ctrlPr>
@@ -14064,10 +18975,7 @@
                 <a:pPr algn="ctr"/>
                 <a14:m>
                   <m:oMathPara xmlns:m="http://schemas.openxmlformats.org/officeDocument/2006/math">
-                    <m:oMathParaPr>
-                      <m:jc m:val="centerGroup"/>
-                    </m:oMathParaPr>
-                    <m:oMath xmlns:m="http://schemas.openxmlformats.org/officeDocument/2006/math">
+                    <m:oMath>
                       <m:sSub>
                         <m:sSubPr>
                           <m:ctrlPr>
@@ -14244,10 +19152,7 @@
                 <a:pPr algn="ctr"/>
                 <a14:m>
                   <m:oMathPara xmlns:m="http://schemas.openxmlformats.org/officeDocument/2006/math">
-                    <m:oMathParaPr>
-                      <m:jc m:val="centerGroup"/>
-                    </m:oMathParaPr>
-                    <m:oMath xmlns:m="http://schemas.openxmlformats.org/officeDocument/2006/math">
+                    <m:oMath>
                       <m:sSub>
                         <m:sSubPr>
                           <m:ctrlPr>
@@ -14424,10 +19329,7 @@
                 <a:pPr algn="ctr"/>
                 <a14:m>
                   <m:oMathPara xmlns:m="http://schemas.openxmlformats.org/officeDocument/2006/math">
-                    <m:oMathParaPr>
-                      <m:jc m:val="centerGroup"/>
-                    </m:oMathParaPr>
-                    <m:oMath xmlns:m="http://schemas.openxmlformats.org/officeDocument/2006/math">
+                    <m:oMath>
                       <m:sSub>
                         <m:sSubPr>
                           <m:ctrlPr>
@@ -14621,7 +19523,7 @@
 </p:sld>
 </file>
 
-<file path=ppt/slides/slide7.xml><?xml version="1.0" encoding="utf-8"?>
+<file path=ppt/slides/slide9.xml><?xml version="1.0" encoding="utf-8"?>
 <p:sld xmlns:a="http://schemas.openxmlformats.org/drawingml/2006/main" xmlns:r="http://schemas.openxmlformats.org/officeDocument/2006/relationships" xmlns:p="http://schemas.openxmlformats.org/presentationml/2006/main">
   <p:cSld>
     <p:spTree>
@@ -14661,7 +19563,7 @@
           <a:p>
             <a:r>
               <a:rPr lang="en-US" dirty="0"/>
-              <a:t>Fully connected model vs hidden Markov chain</a:t>
+              <a:t>Fully connected model vs. hidden Markov chain</a:t>
             </a:r>
             <a:endParaRPr lang="en-SG" dirty="0"/>
           </a:p>
@@ -14742,7 +19644,7 @@
         <p:spPr>
           <a:xfrm>
             <a:off x="6054634" y="1874520"/>
-            <a:ext cx="2318657" cy="5078313"/>
+            <a:ext cx="2318657" cy="4801314"/>
           </a:xfrm>
           <a:prstGeom prst="rect">
             <a:avLst/>
@@ -14757,23 +19659,17 @@
           <a:p>
             <a:r>
               <a:rPr lang="en-US" dirty="0"/>
-              <a:t>If all connections are represented, it is very inefficient due to exponentially growing parameters.</a:t>
+              <a:t>Directly representing all dependencies becomes inefficient for long sequences. </a:t>
             </a:r>
           </a:p>
           <a:p>
             <a:endParaRPr lang="en-US" dirty="0"/>
           </a:p>
           <a:p>
-            <a:endParaRPr lang="en-US" dirty="0"/>
-          </a:p>
-          <a:p>
             <a:r>
               <a:rPr lang="en-US" dirty="0"/>
-              <a:t>RNN obtains the same functionality efficiently with hidden states.</a:t>
-            </a:r>
-          </a:p>
-          <a:p>
-            <a:endParaRPr lang="en-US" dirty="0"/>
+              <a:t>RNN summarizes the past using a hidden state.  It reuses the same parameters at every time step.</a:t>
+            </a:r>
           </a:p>
           <a:p>
             <a:endParaRPr lang="en-US" dirty="0"/>
@@ -14791,583 +19687,6 @@
     <p:extLst>
       <p:ext uri="{BB962C8B-B14F-4D97-AF65-F5344CB8AC3E}">
         <p14:creationId xmlns:p14="http://schemas.microsoft.com/office/powerpoint/2010/main" val="2847271593"/>
-      </p:ext>
-    </p:extLst>
-  </p:cSld>
-  <p:clrMapOvr>
-    <a:masterClrMapping/>
-  </p:clrMapOvr>
-</p:sld>
-</file>
-
-<file path=ppt/slides/slide8.xml><?xml version="1.0" encoding="utf-8"?>
-<p:sld xmlns:a="http://schemas.openxmlformats.org/drawingml/2006/main" xmlns:r="http://schemas.openxmlformats.org/officeDocument/2006/relationships" xmlns:p="http://schemas.openxmlformats.org/presentationml/2006/main">
-  <p:cSld>
-    <p:spTree>
-      <p:nvGrpSpPr>
-        <p:cNvPr id="1" name=""/>
-        <p:cNvGrpSpPr/>
-        <p:nvPr/>
-      </p:nvGrpSpPr>
-      <p:grpSpPr>
-        <a:xfrm>
-          <a:off x="0" y="0"/>
-          <a:ext cx="0" cy="0"/>
-          <a:chOff x="0" y="0"/>
-          <a:chExt cx="0" cy="0"/>
-        </a:xfrm>
-      </p:grpSpPr>
-      <p:sp>
-        <p:nvSpPr>
-          <p:cNvPr id="2" name="Title 1">
-            <a:extLst>
-              <a:ext uri="{FF2B5EF4-FFF2-40B4-BE49-F238E27FC236}">
-                <a16:creationId xmlns:a16="http://schemas.microsoft.com/office/drawing/2014/main" id="{12E07596-A587-4579-BE78-4105E81366C4}"/>
-              </a:ext>
-            </a:extLst>
-          </p:cNvPr>
-          <p:cNvSpPr>
-            <a:spLocks noGrp="1"/>
-          </p:cNvSpPr>
-          <p:nvPr>
-            <p:ph type="title"/>
-          </p:nvPr>
-        </p:nvSpPr>
-        <p:spPr/>
-        <p:txBody>
-          <a:bodyPr/>
-          <a:lstStyle/>
-          <a:p>
-            <a:r>
-              <a:rPr lang="en-US" dirty="0"/>
-              <a:t>Compute gradient in RNN</a:t>
-            </a:r>
-            <a:endParaRPr lang="en-SG" dirty="0"/>
-          </a:p>
-        </p:txBody>
-      </p:sp>
-      <p:sp>
-        <p:nvSpPr>
-          <p:cNvPr id="3" name="Content Placeholder 2">
-            <a:extLst>
-              <a:ext uri="{FF2B5EF4-FFF2-40B4-BE49-F238E27FC236}">
-                <a16:creationId xmlns:a16="http://schemas.microsoft.com/office/drawing/2014/main" id="{32B29F24-D127-497D-A2F7-01136AC46F6A}"/>
-              </a:ext>
-            </a:extLst>
-          </p:cNvPr>
-          <p:cNvSpPr>
-            <a:spLocks noGrp="1"/>
-          </p:cNvSpPr>
-          <p:nvPr>
-            <p:ph idx="1"/>
-          </p:nvPr>
-        </p:nvSpPr>
-        <p:spPr/>
-        <p:txBody>
-          <a:bodyPr/>
-          <a:lstStyle/>
-          <a:p>
-            <a:endParaRPr lang="en-SG"/>
-          </a:p>
-        </p:txBody>
-      </p:sp>
-    </p:spTree>
-    <p:extLst>
-      <p:ext uri="{BB962C8B-B14F-4D97-AF65-F5344CB8AC3E}">
-        <p14:creationId xmlns:p14="http://schemas.microsoft.com/office/powerpoint/2010/main" val="1229292703"/>
-      </p:ext>
-    </p:extLst>
-  </p:cSld>
-  <p:clrMapOvr>
-    <a:masterClrMapping/>
-  </p:clrMapOvr>
-</p:sld>
-</file>
-
-<file path=ppt/slides/slide9.xml><?xml version="1.0" encoding="utf-8"?>
-<p:sld xmlns:a="http://schemas.openxmlformats.org/drawingml/2006/main" xmlns:r="http://schemas.openxmlformats.org/officeDocument/2006/relationships" xmlns:p="http://schemas.openxmlformats.org/presentationml/2006/main">
-  <p:cSld>
-    <p:spTree>
-      <p:nvGrpSpPr>
-        <p:cNvPr id="1" name=""/>
-        <p:cNvGrpSpPr/>
-        <p:nvPr/>
-      </p:nvGrpSpPr>
-      <p:grpSpPr>
-        <a:xfrm>
-          <a:off x="0" y="0"/>
-          <a:ext cx="0" cy="0"/>
-          <a:chOff x="0" y="0"/>
-          <a:chExt cx="0" cy="0"/>
-        </a:xfrm>
-      </p:grpSpPr>
-      <p:sp>
-        <p:nvSpPr>
-          <p:cNvPr id="2" name="Title 1">
-            <a:extLst>
-              <a:ext uri="{FF2B5EF4-FFF2-40B4-BE49-F238E27FC236}">
-                <a16:creationId xmlns:a16="http://schemas.microsoft.com/office/drawing/2014/main" id="{EA2C1B18-6EF7-43D4-8119-89388B460CC2}"/>
-              </a:ext>
-            </a:extLst>
-          </p:cNvPr>
-          <p:cNvSpPr>
-            <a:spLocks noGrp="1"/>
-          </p:cNvSpPr>
-          <p:nvPr>
-            <p:ph type="title"/>
-          </p:nvPr>
-        </p:nvSpPr>
-        <p:spPr/>
-        <p:txBody>
-          <a:bodyPr/>
-          <a:lstStyle/>
-          <a:p>
-            <a:r>
-              <a:rPr lang="en-US" dirty="0"/>
-              <a:t>Encode-decoder sequence-to-sequence architecture</a:t>
-            </a:r>
-            <a:endParaRPr lang="en-SG" dirty="0"/>
-          </a:p>
-        </p:txBody>
-      </p:sp>
-      <p:pic>
-        <p:nvPicPr>
-          <p:cNvPr id="4" name="Picture 3">
-            <a:extLst>
-              <a:ext uri="{FF2B5EF4-FFF2-40B4-BE49-F238E27FC236}">
-                <a16:creationId xmlns:a16="http://schemas.microsoft.com/office/drawing/2014/main" id="{1264084C-B0F0-43C3-A6C5-8096672CC8DC}"/>
-              </a:ext>
-            </a:extLst>
-          </p:cNvPr>
-          <p:cNvPicPr>
-            <a:picLocks noChangeAspect="1"/>
-          </p:cNvPicPr>
-          <p:nvPr/>
-        </p:nvPicPr>
-        <p:blipFill>
-          <a:blip r:embed="rId2"/>
-          <a:stretch>
-            <a:fillRect/>
-          </a:stretch>
-        </p:blipFill>
-        <p:spPr>
-          <a:xfrm>
-            <a:off x="994441" y="2031011"/>
-            <a:ext cx="4034760" cy="4461863"/>
-          </a:xfrm>
-          <a:prstGeom prst="rect">
-            <a:avLst/>
-          </a:prstGeom>
-        </p:spPr>
-      </p:pic>
-      <mc:AlternateContent xmlns:mc="http://schemas.openxmlformats.org/markup-compatibility/2006" xmlns:a14="http://schemas.microsoft.com/office/drawing/2010/main">
-        <mc:Choice Requires="a14">
-          <p:sp>
-            <p:nvSpPr>
-              <p:cNvPr id="5" name="TextBox 4">
-                <a:extLst>
-                  <a:ext uri="{FF2B5EF4-FFF2-40B4-BE49-F238E27FC236}">
-                    <a16:creationId xmlns:a16="http://schemas.microsoft.com/office/drawing/2014/main" id="{8FE3A315-B45E-48BF-B009-A934AF3EE65D}"/>
-                  </a:ext>
-                </a:extLst>
-              </p:cNvPr>
-              <p:cNvSpPr txBox="1"/>
-              <p:nvPr/>
-            </p:nvSpPr>
-            <p:spPr>
-              <a:xfrm>
-                <a:off x="5839097" y="2893423"/>
-                <a:ext cx="2181497" cy="2633606"/>
-              </a:xfrm>
-              <a:prstGeom prst="rect">
-                <a:avLst/>
-              </a:prstGeom>
-              <a:noFill/>
-            </p:spPr>
-            <p:txBody>
-              <a:bodyPr wrap="square" rtlCol="0">
-                <a:spAutoFit/>
-              </a:bodyPr>
-              <a:lstStyle/>
-              <a:p>
-                <a:r>
-                  <a:rPr lang="en-US" dirty="0"/>
-                  <a:t>Figure 10.12 on page 386 in Goodfellow.   This architecture generate the conditional probability </a:t>
-                </a:r>
-                <a14:m>
-                  <m:oMath xmlns:m="http://schemas.openxmlformats.org/officeDocument/2006/math">
-                    <m:r>
-                      <a:rPr lang="en-US" b="0" i="1" smtClean="0">
-                        <a:latin typeface="Cambria Math" panose="02040503050406030204" pitchFamily="18" charset="0"/>
-                      </a:rPr>
-                      <m:t>𝑃</m:t>
-                    </m:r>
-                    <m:r>
-                      <a:rPr lang="en-US" b="0" i="1" smtClean="0">
-                        <a:latin typeface="Cambria Math" panose="02040503050406030204" pitchFamily="18" charset="0"/>
-                      </a:rPr>
-                      <m:t>(</m:t>
-                    </m:r>
-                    <m:sSup>
-                      <m:sSupPr>
-                        <m:ctrlPr>
-                          <a:rPr lang="en-US" b="0" i="1" smtClean="0">
-                            <a:latin typeface="Cambria Math" panose="02040503050406030204" pitchFamily="18" charset="0"/>
-                          </a:rPr>
-                        </m:ctrlPr>
-                      </m:sSupPr>
-                      <m:e>
-                        <m:r>
-                          <a:rPr lang="en-US" b="0" i="1" smtClean="0">
-                            <a:latin typeface="Cambria Math" panose="02040503050406030204" pitchFamily="18" charset="0"/>
-                          </a:rPr>
-                          <m:t>𝑦</m:t>
-                        </m:r>
-                      </m:e>
-                      <m:sup>
-                        <m:d>
-                          <m:dPr>
-                            <m:ctrlPr>
-                              <a:rPr lang="en-US" b="0" i="1" smtClean="0">
-                                <a:latin typeface="Cambria Math" panose="02040503050406030204" pitchFamily="18" charset="0"/>
-                              </a:rPr>
-                            </m:ctrlPr>
-                          </m:dPr>
-                          <m:e>
-                            <m:r>
-                              <a:rPr lang="en-US" b="0" i="1" smtClean="0">
-                                <a:latin typeface="Cambria Math" panose="02040503050406030204" pitchFamily="18" charset="0"/>
-                              </a:rPr>
-                              <m:t>1</m:t>
-                            </m:r>
-                          </m:e>
-                        </m:d>
-                      </m:sup>
-                    </m:sSup>
-                    <m:r>
-                      <a:rPr lang="en-US" b="0" i="1" smtClean="0">
-                        <a:latin typeface="Cambria Math" panose="02040503050406030204" pitchFamily="18" charset="0"/>
-                      </a:rPr>
-                      <m:t>,</m:t>
-                    </m:r>
-                    <m:sSup>
-                      <m:sSupPr>
-                        <m:ctrlPr>
-                          <a:rPr lang="en-US" b="0" i="1" smtClean="0">
-                            <a:latin typeface="Cambria Math" panose="02040503050406030204" pitchFamily="18" charset="0"/>
-                          </a:rPr>
-                        </m:ctrlPr>
-                      </m:sSupPr>
-                      <m:e>
-                        <m:r>
-                          <a:rPr lang="en-US" b="0" i="1" smtClean="0">
-                            <a:latin typeface="Cambria Math" panose="02040503050406030204" pitchFamily="18" charset="0"/>
-                          </a:rPr>
-                          <m:t>𝑦</m:t>
-                        </m:r>
-                      </m:e>
-                      <m:sup>
-                        <m:d>
-                          <m:dPr>
-                            <m:ctrlPr>
-                              <a:rPr lang="en-US" b="0" i="1" smtClean="0">
-                                <a:latin typeface="Cambria Math" panose="02040503050406030204" pitchFamily="18" charset="0"/>
-                              </a:rPr>
-                            </m:ctrlPr>
-                          </m:dPr>
-                          <m:e>
-                            <m:r>
-                              <a:rPr lang="en-US" b="0" i="1" smtClean="0">
-                                <a:latin typeface="Cambria Math" panose="02040503050406030204" pitchFamily="18" charset="0"/>
-                              </a:rPr>
-                              <m:t>2</m:t>
-                            </m:r>
-                          </m:e>
-                        </m:d>
-                      </m:sup>
-                    </m:sSup>
-                    <m:r>
-                      <a:rPr lang="en-US" b="0" i="1" smtClean="0">
-                        <a:latin typeface="Cambria Math" panose="02040503050406030204" pitchFamily="18" charset="0"/>
-                      </a:rPr>
-                      <m:t>,⋯,</m:t>
-                    </m:r>
-                    <m:sSup>
-                      <m:sSupPr>
-                        <m:ctrlPr>
-                          <a:rPr lang="en-US" b="0" i="1" smtClean="0">
-                            <a:latin typeface="Cambria Math" panose="02040503050406030204" pitchFamily="18" charset="0"/>
-                          </a:rPr>
-                        </m:ctrlPr>
-                      </m:sSupPr>
-                      <m:e>
-                        <m:r>
-                          <a:rPr lang="en-US" b="0" i="1" smtClean="0">
-                            <a:latin typeface="Cambria Math" panose="02040503050406030204" pitchFamily="18" charset="0"/>
-                          </a:rPr>
-                          <m:t>𝑦</m:t>
-                        </m:r>
-                      </m:e>
-                      <m:sup>
-                        <m:d>
-                          <m:dPr>
-                            <m:ctrlPr>
-                              <a:rPr lang="en-US" b="0" i="1" smtClean="0">
-                                <a:latin typeface="Cambria Math" panose="02040503050406030204" pitchFamily="18" charset="0"/>
-                              </a:rPr>
-                            </m:ctrlPr>
-                          </m:dPr>
-                          <m:e>
-                            <m:sSub>
-                              <m:sSubPr>
-                                <m:ctrlPr>
-                                  <a:rPr lang="en-US" b="0" i="1" smtClean="0">
-                                    <a:latin typeface="Cambria Math" panose="02040503050406030204" pitchFamily="18" charset="0"/>
-                                  </a:rPr>
-                                </m:ctrlPr>
-                              </m:sSubPr>
-                              <m:e>
-                                <m:r>
-                                  <a:rPr lang="en-US" b="0" i="1" smtClean="0">
-                                    <a:latin typeface="Cambria Math" panose="02040503050406030204" pitchFamily="18" charset="0"/>
-                                  </a:rPr>
-                                  <m:t>𝑛</m:t>
-                                </m:r>
-                              </m:e>
-                              <m:sub>
-                                <m:r>
-                                  <a:rPr lang="en-US" b="0" i="1" smtClean="0">
-                                    <a:latin typeface="Cambria Math" panose="02040503050406030204" pitchFamily="18" charset="0"/>
-                                  </a:rPr>
-                                  <m:t>𝑦</m:t>
-                                </m:r>
-                              </m:sub>
-                            </m:sSub>
-                          </m:e>
-                        </m:d>
-                      </m:sup>
-                    </m:sSup>
-                    <m:r>
-                      <a:rPr lang="en-US" b="0" i="1" smtClean="0">
-                        <a:latin typeface="Cambria Math" panose="02040503050406030204" pitchFamily="18" charset="0"/>
-                      </a:rPr>
-                      <m:t> |</m:t>
-                    </m:r>
-                  </m:oMath>
-                </a14:m>
-                <a:endParaRPr lang="en-US" b="0" dirty="0"/>
-              </a:p>
-              <a:p>
-                <a:pPr/>
-                <a14:m>
-                  <m:oMathPara xmlns:m="http://schemas.openxmlformats.org/officeDocument/2006/math">
-                    <m:oMathParaPr>
-                      <m:jc m:val="centerGroup"/>
-                    </m:oMathParaPr>
-                    <m:oMath xmlns:m="http://schemas.openxmlformats.org/officeDocument/2006/math">
-                      <m:sSup>
-                        <m:sSupPr>
-                          <m:ctrlPr>
-                            <a:rPr lang="en-US" b="0" i="1" smtClean="0">
-                              <a:latin typeface="Cambria Math" panose="02040503050406030204" pitchFamily="18" charset="0"/>
-                            </a:rPr>
-                          </m:ctrlPr>
-                        </m:sSupPr>
-                        <m:e>
-                          <m:r>
-                            <a:rPr lang="en-US" b="0" i="1" smtClean="0">
-                              <a:latin typeface="Cambria Math" panose="02040503050406030204" pitchFamily="18" charset="0"/>
-                            </a:rPr>
-                            <m:t>𝑥</m:t>
-                          </m:r>
-                        </m:e>
-                        <m:sup>
-                          <m:d>
-                            <m:dPr>
-                              <m:ctrlPr>
-                                <a:rPr lang="en-US" b="0" i="1" smtClean="0">
-                                  <a:latin typeface="Cambria Math" panose="02040503050406030204" pitchFamily="18" charset="0"/>
-                                </a:rPr>
-                              </m:ctrlPr>
-                            </m:dPr>
-                            <m:e>
-                              <m:r>
-                                <a:rPr lang="en-US" b="0" i="1" smtClean="0">
-                                  <a:latin typeface="Cambria Math" panose="02040503050406030204" pitchFamily="18" charset="0"/>
-                                </a:rPr>
-                                <m:t>1</m:t>
-                              </m:r>
-                            </m:e>
-                          </m:d>
-                        </m:sup>
-                      </m:sSup>
-                      <m:r>
-                        <a:rPr lang="en-US" b="0" i="1" smtClean="0">
-                          <a:latin typeface="Cambria Math" panose="02040503050406030204" pitchFamily="18" charset="0"/>
-                        </a:rPr>
-                        <m:t>,</m:t>
-                      </m:r>
-                      <m:sSup>
-                        <m:sSupPr>
-                          <m:ctrlPr>
-                            <a:rPr lang="en-US" b="0" i="1" smtClean="0">
-                              <a:latin typeface="Cambria Math" panose="02040503050406030204" pitchFamily="18" charset="0"/>
-                            </a:rPr>
-                          </m:ctrlPr>
-                        </m:sSupPr>
-                        <m:e>
-                          <m:r>
-                            <a:rPr lang="en-US" b="0" i="1" smtClean="0">
-                              <a:latin typeface="Cambria Math" panose="02040503050406030204" pitchFamily="18" charset="0"/>
-                            </a:rPr>
-                            <m:t>𝑥</m:t>
-                          </m:r>
-                        </m:e>
-                        <m:sup>
-                          <m:r>
-                            <a:rPr lang="en-US" b="0" i="1" smtClean="0">
-                              <a:latin typeface="Cambria Math" panose="02040503050406030204" pitchFamily="18" charset="0"/>
-                            </a:rPr>
-                            <m:t>(2)</m:t>
-                          </m:r>
-                        </m:sup>
-                      </m:sSup>
-                      <m:r>
-                        <a:rPr lang="en-US" b="0" i="1" smtClean="0">
-                          <a:latin typeface="Cambria Math" panose="02040503050406030204" pitchFamily="18" charset="0"/>
-                        </a:rPr>
-                        <m:t>,</m:t>
-                      </m:r>
-                      <m:r>
-                        <a:rPr lang="en-US" b="0" i="1" smtClean="0">
-                          <a:latin typeface="Cambria Math" panose="02040503050406030204" pitchFamily="18" charset="0"/>
-                        </a:rPr>
-                        <m:t>𝑐</m:t>
-                      </m:r>
-                      <m:r>
-                        <a:rPr lang="en-US" b="0" i="1" smtClean="0">
-                          <a:latin typeface="Cambria Math" panose="02040503050406030204" pitchFamily="18" charset="0"/>
-                        </a:rPr>
-                        <m:t>…, </m:t>
-                      </m:r>
-                      <m:sSup>
-                        <m:sSupPr>
-                          <m:ctrlPr>
-                            <a:rPr lang="en-US" b="0" i="1" smtClean="0">
-                              <a:latin typeface="Cambria Math" panose="02040503050406030204" pitchFamily="18" charset="0"/>
-                            </a:rPr>
-                          </m:ctrlPr>
-                        </m:sSupPr>
-                        <m:e>
-                          <m:r>
-                            <a:rPr lang="en-US" b="0" i="1" smtClean="0">
-                              <a:latin typeface="Cambria Math" panose="02040503050406030204" pitchFamily="18" charset="0"/>
-                            </a:rPr>
-                            <m:t>𝑥</m:t>
-                          </m:r>
-                        </m:e>
-                        <m:sup>
-                          <m:d>
-                            <m:dPr>
-                              <m:ctrlPr>
-                                <a:rPr lang="en-US" b="0" i="1" smtClean="0">
-                                  <a:latin typeface="Cambria Math" panose="02040503050406030204" pitchFamily="18" charset="0"/>
-                                </a:rPr>
-                              </m:ctrlPr>
-                            </m:dPr>
-                            <m:e>
-                              <m:sSub>
-                                <m:sSubPr>
-                                  <m:ctrlPr>
-                                    <a:rPr lang="en-US" b="0" i="1" smtClean="0">
-                                      <a:latin typeface="Cambria Math" panose="02040503050406030204" pitchFamily="18" charset="0"/>
-                                    </a:rPr>
-                                  </m:ctrlPr>
-                                </m:sSubPr>
-                                <m:e>
-                                  <m:r>
-                                    <a:rPr lang="en-US" b="0" i="1" smtClean="0">
-                                      <a:latin typeface="Cambria Math" panose="02040503050406030204" pitchFamily="18" charset="0"/>
-                                    </a:rPr>
-                                    <m:t>𝑛</m:t>
-                                  </m:r>
-                                </m:e>
-                                <m:sub>
-                                  <m:r>
-                                    <a:rPr lang="en-US" b="0" i="1" smtClean="0">
-                                      <a:latin typeface="Cambria Math" panose="02040503050406030204" pitchFamily="18" charset="0"/>
-                                    </a:rPr>
-                                    <m:t>𝑥</m:t>
-                                  </m:r>
-                                </m:sub>
-                              </m:sSub>
-                            </m:e>
-                          </m:d>
-                        </m:sup>
-                      </m:sSup>
-                      <m:r>
-                        <a:rPr lang="en-US" b="0" i="1" smtClean="0">
-                          <a:latin typeface="Cambria Math" panose="02040503050406030204" pitchFamily="18" charset="0"/>
-                        </a:rPr>
-                        <m:t>)</m:t>
-                      </m:r>
-                    </m:oMath>
-                  </m:oMathPara>
-                </a14:m>
-                <a:endParaRPr lang="en-US" b="0" dirty="0"/>
-              </a:p>
-            </p:txBody>
-          </p:sp>
-        </mc:Choice>
-        <mc:Fallback xmlns="">
-          <p:sp>
-            <p:nvSpPr>
-              <p:cNvPr id="5" name="TextBox 4">
-                <a:extLst>
-                  <a:ext uri="{FF2B5EF4-FFF2-40B4-BE49-F238E27FC236}">
-                    <a16:creationId xmlns:a16="http://schemas.microsoft.com/office/drawing/2014/main" id="{8FE3A315-B45E-48BF-B009-A934AF3EE65D}"/>
-                  </a:ext>
-                </a:extLst>
-              </p:cNvPr>
-              <p:cNvSpPr txBox="1">
-                <a:spLocks noRot="1" noChangeAspect="1" noMove="1" noResize="1" noEditPoints="1" noAdjustHandles="1" noChangeArrowheads="1" noChangeShapeType="1" noTextEdit="1"/>
-              </p:cNvSpPr>
-              <p:nvPr/>
-            </p:nvSpPr>
-            <p:spPr>
-              <a:xfrm>
-                <a:off x="5839097" y="2893423"/>
-                <a:ext cx="2181497" cy="2633606"/>
-              </a:xfrm>
-              <a:prstGeom prst="rect">
-                <a:avLst/>
-              </a:prstGeom>
-              <a:blipFill>
-                <a:blip r:embed="rId3"/>
-                <a:stretch>
-                  <a:fillRect l="-2514" t="-1389" r="-7263" b="-2083"/>
-                </a:stretch>
-              </a:blipFill>
-            </p:spPr>
-            <p:txBody>
-              <a:bodyPr/>
-              <a:lstStyle/>
-              <a:p>
-                <a:r>
-                  <a:rPr lang="en-SG">
-                    <a:noFill/>
-                  </a:rPr>
-                  <a:t> </a:t>
-                </a:r>
-              </a:p>
-            </p:txBody>
-          </p:sp>
-        </mc:Fallback>
-      </mc:AlternateContent>
-    </p:spTree>
-    <p:extLst>
-      <p:ext uri="{BB962C8B-B14F-4D97-AF65-F5344CB8AC3E}">
-        <p14:creationId xmlns:p14="http://schemas.microsoft.com/office/powerpoint/2010/main" val="1875225173"/>
       </p:ext>
     </p:extLst>
   </p:cSld>
